--- a/presentations/12-kids-first-blocks/12-kids-first-blocks-lab.pptx
+++ b/presentations/12-kids-first-blocks/12-kids-first-blocks-lab.pptx
@@ -35,9 +35,10 @@
     <p:sldId id="283" r:id="rId29"/>
     <p:sldId id="284" r:id="rId30"/>
     <p:sldId id="285" r:id="rId31"/>
+    <p:sldId id="286" r:id="rId32"/>
   </p:sldIdLst>
   <p:notesMasterIdLst>
-    <p:notesMasterId r:id="rId32"/>
+    <p:notesMasterId r:id="rId33"/>
   </p:notesMasterIdLst>
   <p:sldSz cx="12192000" cy="6858000"/>
   <p:notesSz cx="6858000" cy="12192000"/>
@@ -136,7 +137,7 @@
   <p:extLst>
     <p:ext uri="{521415D9-36F7-43E2-AB2F-B90AF26B5E84}">
       <p14:sectionLst xmlns:p14="http://schemas.microsoft.com/office/powerpoint/2010/main">
-        <p14:section name="Opening" id="{05059de5-d674-b39b-ddc6-3b32bbdc5e22}">
+        <p14:section name="Opening" id="{7543a6b2-6b52-ca3f-6bf5-0babf4f722ed}">
           <p14:sldIdLst>
             <p14:sldId id="256"/>
             <p14:sldId id="257"/>
@@ -144,14 +145,14 @@
             <p14:sldId id="259"/>
           </p14:sldIdLst>
         </p14:section>
-        <p14:section name="Open and create" id="{d58ac34c-e568-e39e-211e-39028e09a975}">
+        <p14:section name="Open and create" id="{bbbc9eb9-e1a4-e494-942f-f33a98279be9}">
           <p14:sldIdLst>
             <p14:sldId id="260"/>
             <p14:sldId id="261"/>
             <p14:sldId id="262"/>
           </p14:sldIdLst>
         </p14:section>
-        <p14:section name="Get ready" id="{597ab14a-c1f6-96a0-f7b6-86ea0ce3ea4f}">
+        <p14:section name="Get ready" id="{03e87b24-9d73-ac54-814d-dc39c09a1269}">
           <p14:sldIdLst>
             <p14:sldId id="263"/>
             <p14:sldId id="264"/>
@@ -159,18 +160,18 @@
             <p14:sldId id="266"/>
           </p14:sldIdLst>
         </p14:section>
-        <p14:section name="Draw" id="{2370b30a-a78b-2b03-2702-87dab30ffaea}">
+        <p14:section name="Draw" id="{034a6b0e-765a-a2ce-3189-1ecc26ebcc69}">
           <p14:sldIdLst>
             <p14:sldId id="267"/>
             <p14:sldId id="268"/>
             <p14:sldId id="269"/>
             <p14:sldId id="270"/>
             <p14:sldId id="271"/>
+            <p14:sldId id="272"/>
           </p14:sldIdLst>
         </p14:section>
-        <p14:section name="Change one thing" id="{0f166114-c6c4-dbc3-7889-7749e565b8ee}">
+        <p14:section name="Change one thing" id="{511701c0-9b33-66fa-db0b-941710f20810}">
           <p14:sldIdLst>
-            <p14:sldId id="272"/>
             <p14:sldId id="273"/>
             <p14:sldId id="274"/>
             <p14:sldId id="275"/>
@@ -178,20 +179,21 @@
             <p14:sldId id="277"/>
             <p14:sldId id="278"/>
             <p14:sldId id="279"/>
+            <p14:sldId id="280"/>
           </p14:sldIdLst>
         </p14:section>
-        <p14:section name="Challenge" id="{fa7aa65e-a69f-9f65-5a22-665478b0e10d}">
+        <p14:section name="Challenge" id="{31506338-fd8b-4030-b4f2-68c59a6adbbb}">
           <p14:sldIdLst>
-            <p14:sldId id="280"/>
             <p14:sldId id="281"/>
             <p14:sldId id="282"/>
             <p14:sldId id="283"/>
             <p14:sldId id="284"/>
+            <p14:sldId id="285"/>
           </p14:sldIdLst>
         </p14:section>
-        <p14:section name="Closing" id="{7b5b4efe-be81-6772-0d3e-714061899e6b}">
+        <p14:section name="Closing" id="{57032f10-8d8b-4bbb-c215-b0511193398c}">
           <p14:sldIdLst>
-            <p14:sldId id="285"/>
+            <p14:sldId id="286"/>
           </p14:sldIdLst>
         </p14:section>
       </p14:sectionLst>
@@ -1742,7 +1744,7 @@
           <a:p>
             <a:r>
               <a:rPr lang="en-US" dirty="0"/>
-              <a:t>Answer: B. Far right (big x), top (y = 0).</a:t>
+              <a:t/>
             </a:r>
             <a:endParaRPr lang="en-US" dirty="0"/>
           </a:p>
@@ -1830,7 +1832,7 @@
           <a:p>
             <a:r>
               <a:rPr lang="en-US" dirty="0"/>
-              <a:t/>
+              <a:t>Answer: B. Far right (big x), top (y = 0).</a:t>
             </a:r>
             <a:endParaRPr lang="en-US" dirty="0"/>
           </a:p>
@@ -2646,6 +2648,94 @@
             <a:fld id="{F7021451-1387-4CA6-816F-3879F97B5CBC}" type="slidenum">
               <a:rPr lang="en-US"/>
               <a:t>30</a:t>
+            </a:fld>
+            <a:endParaRPr lang="en-US"/>
+          </a:p>
+        </p:txBody>
+      </p:sp>
+    </p:spTree>
+    <p:extLst>
+      <p:ext uri="{BB962C8B-B14F-4D97-AF65-F5344CB8AC3E}">
+        <p14:creationId xmlns:p14="http://schemas.microsoft.com/office/powerpoint/2010/main" val="1024086991"/>
+      </p:ext>
+    </p:extLst>
+  </p:cSld>
+  <p:clrMapOvr>
+    <a:masterClrMapping/>
+  </p:clrMapOvr>
+</p:notes>
+</file>
+
+<file path=ppt/notesSlides/notesSlide31.xml><?xml version="1.0" encoding="utf-8"?>
+<p:notes xmlns:a="http://schemas.openxmlformats.org/drawingml/2006/main" xmlns:r="http://schemas.openxmlformats.org/officeDocument/2006/relationships" xmlns:p="http://schemas.openxmlformats.org/presentationml/2006/main">
+  <p:cSld>
+    <p:spTree>
+      <p:nvGrpSpPr>
+        <p:cNvPr id="1" name=""/>
+        <p:cNvGrpSpPr/>
+        <p:nvPr/>
+      </p:nvGrpSpPr>
+      <p:grpSpPr>
+        <a:xfrm>
+          <a:off x="0" y="0"/>
+          <a:ext cx="0" cy="0"/>
+          <a:chOff x="0" y="0"/>
+          <a:chExt cx="0" cy="0"/>
+        </a:xfrm>
+      </p:grpSpPr>
+      <p:sp>
+        <p:nvSpPr>
+          <p:cNvPr id="2" name="Slide Image Placeholder 1"/>
+          <p:cNvSpPr>
+            <a:spLocks noGrp="1" noRot="1" noChangeAspect="1"/>
+          </p:cNvSpPr>
+          <p:nvPr>
+            <p:ph type="sldImg"/>
+          </p:nvPr>
+        </p:nvSpPr>
+        <p:spPr/>
+      </p:sp>
+      <p:sp>
+        <p:nvSpPr>
+          <p:cNvPr id="3" name="Notes Placeholder 2"/>
+          <p:cNvSpPr>
+            <a:spLocks noGrp="1"/>
+          </p:cNvSpPr>
+          <p:nvPr>
+            <p:ph type="body" idx="1"/>
+          </p:nvPr>
+        </p:nvSpPr>
+        <p:spPr/>
+        <p:txBody>
+          <a:bodyPr/>
+          <a:lstStyle/>
+          <a:p>
+            <a:r>
+              <a:rPr lang="en-US" dirty="0"/>
+              <a:t/>
+            </a:r>
+            <a:endParaRPr lang="en-US" dirty="0"/>
+          </a:p>
+        </p:txBody>
+      </p:sp>
+      <p:sp>
+        <p:nvSpPr>
+          <p:cNvPr id="4" name="Slide Number Placeholder 3"/>
+          <p:cNvSpPr>
+            <a:spLocks noGrp="1"/>
+          </p:cNvSpPr>
+          <p:nvPr>
+            <p:ph type="sldNum" sz="quarter" idx="10"/>
+          </p:nvPr>
+        </p:nvSpPr>
+        <p:spPr/>
+        <p:txBody>
+          <a:bodyPr/>
+          <a:lstStyle/>
+          <a:p>
+            <a:fld id="{F7021451-1387-4CA6-816F-3879F97B5CBC}" type="slidenum">
+              <a:rPr lang="en-US"/>
+              <a:t>31</a:t>
             </a:fld>
             <a:endParaRPr lang="en-US"/>
           </a:p>
@@ -4612,12 +4702,12 @@
         </p:nvSpPr>
         <p:spPr>
           <a:xfrm>
-            <a:off x="8092440" y="2834640"/>
-            <a:ext cx="3550615" cy="3383280"/>
+            <a:off x="8092440" y="2788920"/>
+            <a:ext cx="3550615" cy="3429000"/>
           </a:xfrm>
           <a:prstGeom prst="roundRect">
             <a:avLst>
-              <a:gd name="adj" fmla="val 2162"/>
+              <a:gd name="adj" fmla="val 2133"/>
             </a:avLst>
           </a:prstGeom>
           <a:solidFill>
@@ -4639,8 +4729,8 @@
         </p:nvSpPr>
         <p:spPr>
           <a:xfrm>
-            <a:off x="8321040" y="2971800"/>
-            <a:ext cx="3093415" cy="365760"/>
+            <a:off x="8321040" y="2880360"/>
+            <a:ext cx="3093415" cy="310896"/>
           </a:xfrm>
           <a:prstGeom prst="rect">
             <a:avLst/>
@@ -4656,7 +4746,7 @@
               <a:buNone/>
             </a:pPr>
             <a:r>
-              <a:rPr lang="en-US" sz="1500" b="1" dirty="0">
+              <a:rPr lang="en-US" sz="1400" b="1" dirty="0">
                 <a:solidFill>
                   <a:srgbClr val="2F7D4F"/>
                 </a:solidFill>
@@ -4666,7 +4756,7 @@
               </a:rPr>
               <a:t>You should see</a:t>
             </a:r>
-            <a:endParaRPr lang="en-US" sz="1500" dirty="0"/>
+            <a:endParaRPr lang="en-US" sz="1400" dirty="0"/>
           </a:p>
         </p:txBody>
       </p:sp>
@@ -4678,8 +4768,8 @@
         </p:nvSpPr>
         <p:spPr>
           <a:xfrm>
-            <a:off x="8321040" y="3429000"/>
-            <a:ext cx="3093415" cy="2606040"/>
+            <a:off x="8321040" y="3246120"/>
+            <a:ext cx="3093415" cy="2862072"/>
           </a:xfrm>
           <a:prstGeom prst="rect">
             <a:avLst/>
@@ -6834,12 +6924,12 @@
         </p:nvSpPr>
         <p:spPr>
           <a:xfrm>
-            <a:off x="8092440" y="2834640"/>
-            <a:ext cx="3550615" cy="3383280"/>
+            <a:off x="8092440" y="2788920"/>
+            <a:ext cx="3550615" cy="3429000"/>
           </a:xfrm>
           <a:prstGeom prst="roundRect">
             <a:avLst>
-              <a:gd name="adj" fmla="val 2162"/>
+              <a:gd name="adj" fmla="val 2133"/>
             </a:avLst>
           </a:prstGeom>
           <a:solidFill>
@@ -6861,8 +6951,8 @@
         </p:nvSpPr>
         <p:spPr>
           <a:xfrm>
-            <a:off x="8321040" y="2971800"/>
-            <a:ext cx="3093415" cy="365760"/>
+            <a:off x="8321040" y="2880360"/>
+            <a:ext cx="3093415" cy="310896"/>
           </a:xfrm>
           <a:prstGeom prst="rect">
             <a:avLst/>
@@ -6878,7 +6968,7 @@
               <a:buNone/>
             </a:pPr>
             <a:r>
-              <a:rPr lang="en-US" sz="1500" b="1" dirty="0">
+              <a:rPr lang="en-US" sz="1400" b="1" dirty="0">
                 <a:solidFill>
                   <a:srgbClr val="2F7D4F"/>
                 </a:solidFill>
@@ -6888,7 +6978,7 @@
               </a:rPr>
               <a:t>You should see</a:t>
             </a:r>
-            <a:endParaRPr lang="en-US" sz="1500" dirty="0"/>
+            <a:endParaRPr lang="en-US" sz="1400" dirty="0"/>
           </a:p>
         </p:txBody>
       </p:sp>
@@ -6900,8 +6990,8 @@
         </p:nvSpPr>
         <p:spPr>
           <a:xfrm>
-            <a:off x="8321040" y="3429000"/>
-            <a:ext cx="3093415" cy="2606040"/>
+            <a:off x="8321040" y="3246120"/>
+            <a:ext cx="3093415" cy="2862072"/>
           </a:xfrm>
           <a:prstGeom prst="rect">
             <a:avLst/>
@@ -7416,12 +7506,12 @@
         </p:nvSpPr>
         <p:spPr>
           <a:xfrm>
-            <a:off x="8092440" y="2834640"/>
-            <a:ext cx="3550615" cy="3383280"/>
+            <a:off x="8092440" y="2788920"/>
+            <a:ext cx="3550615" cy="3429000"/>
           </a:xfrm>
           <a:prstGeom prst="roundRect">
             <a:avLst>
-              <a:gd name="adj" fmla="val 2162"/>
+              <a:gd name="adj" fmla="val 2133"/>
             </a:avLst>
           </a:prstGeom>
           <a:solidFill>
@@ -7443,8 +7533,8 @@
         </p:nvSpPr>
         <p:spPr>
           <a:xfrm>
-            <a:off x="8321040" y="2971800"/>
-            <a:ext cx="3093415" cy="365760"/>
+            <a:off x="8321040" y="2880360"/>
+            <a:ext cx="3093415" cy="310896"/>
           </a:xfrm>
           <a:prstGeom prst="rect">
             <a:avLst/>
@@ -7460,7 +7550,7 @@
               <a:buNone/>
             </a:pPr>
             <a:r>
-              <a:rPr lang="en-US" sz="1500" b="1" dirty="0">
+              <a:rPr lang="en-US" sz="1400" b="1" dirty="0">
                 <a:solidFill>
                   <a:srgbClr val="2F7D4F"/>
                 </a:solidFill>
@@ -7470,7 +7560,7 @@
               </a:rPr>
               <a:t>You should see</a:t>
             </a:r>
-            <a:endParaRPr lang="en-US" sz="1500" dirty="0"/>
+            <a:endParaRPr lang="en-US" sz="1400" dirty="0"/>
           </a:p>
         </p:txBody>
       </p:sp>
@@ -7482,8 +7572,8 @@
         </p:nvSpPr>
         <p:spPr>
           <a:xfrm>
-            <a:off x="8321040" y="3429000"/>
-            <a:ext cx="3093415" cy="2606040"/>
+            <a:off x="8321040" y="3246120"/>
+            <a:ext cx="3093415" cy="2862072"/>
           </a:xfrm>
           <a:prstGeom prst="rect">
             <a:avLst/>
@@ -8099,14 +8189,16 @@
       </p:grpSpPr>
       <p:sp>
         <p:nvSpPr>
-          <p:cNvPr id="2" name="Text 0"/>
-          <p:cNvSpPr txBox="1"/>
-          <p:nvPr/>
-        </p:nvSpPr>
-        <p:spPr>
-          <a:xfrm>
-            <a:off x="548640" y="1371600"/>
-            <a:ext cx="2743200" cy="1188720"/>
+          <p:cNvPr id="2" name="Text 1"/>
+          <p:cNvSpPr/>
+          <p:nvPr>
+            <p:ph idx="101" type="title" hasCustomPrompt="1"/>
+          </p:nvPr>
+        </p:nvSpPr>
+        <p:spPr>
+          <a:xfrm>
+            <a:off x="548640" y="384048"/>
+            <a:ext cx="11094415" cy="868680"/>
           </a:xfrm>
           <a:prstGeom prst="rect">
             <a:avLst/>
@@ -8115,37 +8207,61 @@
           <a:ln/>
         </p:spPr>
         <p:txBody>
-          <a:bodyPr wrap="square" lIns="0" tIns="0" rIns="0" bIns="0" rtlCol="0" anchor="t"/>
-          <a:lstStyle/>
-          <a:p>
-            <a:pPr indent="0" marL="0">
-              <a:buNone/>
-            </a:pPr>
-            <a:r>
-              <a:rPr lang="en-US" sz="8000" b="1" dirty="0">
-                <a:solidFill>
-                  <a:srgbClr val="B9A4E3"/>
+          <a:bodyPr wrap="square" lIns="0" tIns="0" rIns="0" bIns="0" rtlCol="0" anchor="ctr"/>
+          <a:lstStyle/>
+          <a:p>
+            <a:pPr algn="l" indent="0" marL="0">
+              <a:buNone/>
+            </a:pPr>
+            <a:r>
+              <a:rPr lang="en-US" sz="3000" b="1" dirty="0">
+                <a:solidFill>
+                  <a:srgbClr val="2E4A62"/>
                 </a:solidFill>
                 <a:latin typeface="Cambria" pitchFamily="34" charset="0"/>
                 <a:ea typeface="Cambria" pitchFamily="34" charset="-122"/>
                 <a:cs typeface="Cambria" pitchFamily="34" charset="-120"/>
               </a:rPr>
-              <a:t>04</a:t>
-            </a:r>
-            <a:endParaRPr lang="en-US" sz="8000" dirty="0"/>
-          </a:p>
-        </p:txBody>
-      </p:sp>
-      <p:sp>
-        <p:nvSpPr>
-          <p:cNvPr id="3" name="Text 1"/>
-          <p:cNvSpPr txBox="1"/>
-          <p:nvPr/>
-        </p:nvSpPr>
-        <p:spPr>
-          <a:xfrm>
-            <a:off x="548640" y="2834640"/>
-            <a:ext cx="11094415" cy="1371600"/>
+              <a:t>The real thing</a:t>
+            </a:r>
+            <a:endParaRPr lang="en-US" sz="3000" dirty="0"/>
+          </a:p>
+        </p:txBody>
+      </p:sp>
+      <p:pic>
+        <p:nvPicPr>
+          <p:cNvPr id="3" name="Image 0" descr="First Square, built from the Kit's generated C and run on the PRG32 runtime">    </p:cNvPr>
+          <p:cNvPicPr>
+            <a:picLocks noChangeAspect="1"/>
+          </p:cNvPicPr>
+          <p:nvPr/>
+        </p:nvPicPr>
+        <p:blipFill>
+          <a:blip r:embed="rId1"/>
+          <a:stretch>
+            <a:fillRect/>
+          </a:stretch>
+        </p:blipFill>
+        <p:spPr>
+          <a:xfrm>
+            <a:off x="2804008" y="1463040"/>
+            <a:ext cx="6583680" cy="4114800"/>
+          </a:xfrm>
+          <a:prstGeom prst="rect">
+            <a:avLst/>
+          </a:prstGeom>
+        </p:spPr>
+      </p:pic>
+      <p:sp>
+        <p:nvSpPr>
+          <p:cNvPr id="4" name="Text 1"/>
+          <p:cNvSpPr txBox="1"/>
+          <p:nvPr/>
+        </p:nvSpPr>
+        <p:spPr>
+          <a:xfrm>
+            <a:off x="548640" y="5715000"/>
+            <a:ext cx="11094415" cy="457200"/>
           </a:xfrm>
           <a:prstGeom prst="rect">
             <a:avLst/>
@@ -8154,63 +8270,24 @@
           <a:ln/>
         </p:spPr>
         <p:txBody>
-          <a:bodyPr wrap="square" lIns="0" tIns="0" rIns="0" bIns="0" rtlCol="0" anchor="ctr"/>
-          <a:lstStyle/>
-          <a:p>
-            <a:pPr indent="0" marL="0">
-              <a:buNone/>
-            </a:pPr>
-            <a:r>
-              <a:rPr lang="en-US" sz="4200" b="1" dirty="0">
-                <a:solidFill>
-                  <a:srgbClr val="FFFFFF"/>
-                </a:solidFill>
-                <a:latin typeface="Cambria" pitchFamily="34" charset="0"/>
-                <a:ea typeface="Cambria" pitchFamily="34" charset="-122"/>
-                <a:cs typeface="Cambria" pitchFamily="34" charset="-120"/>
-              </a:rPr>
-              <a:t>Change one thing</a:t>
-            </a:r>
-            <a:endParaRPr lang="en-US" sz="4200" dirty="0"/>
-          </a:p>
-        </p:txBody>
-      </p:sp>
-      <p:sp>
-        <p:nvSpPr>
-          <p:cNvPr id="4" name="Text 2"/>
-          <p:cNvSpPr txBox="1"/>
-          <p:nvPr/>
-        </p:nvSpPr>
-        <p:spPr>
-          <a:xfrm>
-            <a:off x="548640" y="4389120"/>
-            <a:ext cx="11094415" cy="1097280"/>
-          </a:xfrm>
-          <a:prstGeom prst="rect">
-            <a:avLst/>
-          </a:prstGeom>
-          <a:noFill/>
-          <a:ln/>
-        </p:spPr>
-        <p:txBody>
           <a:bodyPr wrap="square" lIns="0" tIns="0" rIns="0" bIns="0" rtlCol="0" anchor="t"/>
           <a:lstStyle/>
           <a:p>
-            <a:pPr indent="0" marL="0">
-              <a:buNone/>
-            </a:pPr>
-            <a:r>
-              <a:rPr lang="en-US" sz="2200" dirty="0">
-                <a:solidFill>
-                  <a:srgbClr val="CFE3EA"/>
-                </a:solidFill>
-                <a:latin typeface="Calibri" pitchFamily="34" charset="0"/>
-                <a:ea typeface="Calibri" pitchFamily="34" charset="-122"/>
-                <a:cs typeface="Calibri" pitchFamily="34" charset="-120"/>
-              </a:rPr>
-              <a:t>Real programmers experiment</a:t>
-            </a:r>
-            <a:endParaRPr lang="en-US" sz="2200" dirty="0"/>
+            <a:pPr algn="ctr" indent="0" marL="0">
+              <a:buNone/>
+            </a:pPr>
+            <a:r>
+              <a:rPr lang="en-US" sz="1400" i="1" dirty="0">
+                <a:solidFill>
+                  <a:srgbClr val="5B6B78"/>
+                </a:solidFill>
+                <a:latin typeface="Calibri" pitchFamily="34" charset="0"/>
+                <a:ea typeface="Calibri" pitchFamily="34" charset="-122"/>
+                <a:cs typeface="Calibri" pitchFamily="34" charset="-120"/>
+              </a:rPr>
+              <a:t>First Square, built from the Kit's generated C and run on the PRG32 runtime</a:t>
+            </a:r>
+            <a:endParaRPr lang="en-US" sz="1400" dirty="0"/>
           </a:p>
         </p:txBody>
       </p:sp>
@@ -8244,7 +8321,7 @@
             <a:lvl1pPr>
               <a:defRPr sz="1000">
                 <a:solidFill>
-                  <a:srgbClr val="CFE3EA"/>
+                  <a:srgbClr val="5B6B78"/>
                 </a:solidFill>
                 <a:latin typeface="Calibri"/>
                 <a:ea typeface="Calibri"/>
@@ -8289,16 +8366,14 @@
       </p:grpSpPr>
       <p:sp>
         <p:nvSpPr>
-          <p:cNvPr id="2" name="Text 1"/>
-          <p:cNvSpPr/>
-          <p:nvPr>
-            <p:ph idx="101" type="title" hasCustomPrompt="1"/>
-          </p:nvPr>
-        </p:nvSpPr>
-        <p:spPr>
-          <a:xfrm>
-            <a:off x="548640" y="384048"/>
-            <a:ext cx="11094415" cy="868680"/>
+          <p:cNvPr id="2" name="Text 0"/>
+          <p:cNvSpPr txBox="1"/>
+          <p:nvPr/>
+        </p:nvSpPr>
+        <p:spPr>
+          <a:xfrm>
+            <a:off x="548640" y="1371600"/>
+            <a:ext cx="2743200" cy="1188720"/>
           </a:xfrm>
           <a:prstGeom prst="rect">
             <a:avLst/>
@@ -8307,24 +8382,24 @@
           <a:ln/>
         </p:spPr>
         <p:txBody>
-          <a:bodyPr wrap="square" lIns="0" tIns="0" rIns="0" bIns="0" rtlCol="0" anchor="ctr"/>
-          <a:lstStyle/>
-          <a:p>
-            <a:pPr algn="l" indent="0" marL="0">
-              <a:buNone/>
-            </a:pPr>
-            <a:r>
-              <a:rPr lang="en-US" sz="3000" b="1" dirty="0">
-                <a:solidFill>
-                  <a:srgbClr val="2E4A62"/>
+          <a:bodyPr wrap="square" lIns="0" tIns="0" rIns="0" bIns="0" rtlCol="0" anchor="t"/>
+          <a:lstStyle/>
+          <a:p>
+            <a:pPr indent="0" marL="0">
+              <a:buNone/>
+            </a:pPr>
+            <a:r>
+              <a:rPr lang="en-US" sz="8000" b="1" dirty="0">
+                <a:solidFill>
+                  <a:srgbClr val="B9A4E3"/>
                 </a:solidFill>
                 <a:latin typeface="Cambria" pitchFamily="34" charset="0"/>
                 <a:ea typeface="Cambria" pitchFamily="34" charset="-122"/>
                 <a:cs typeface="Cambria" pitchFamily="34" charset="-120"/>
               </a:rPr>
-              <a:t>The rule of one</a:t>
-            </a:r>
-            <a:endParaRPr lang="en-US" sz="3000" dirty="0"/>
+              <a:t>04</a:t>
+            </a:r>
+            <a:endParaRPr lang="en-US" sz="8000" dirty="0"/>
           </a:p>
         </p:txBody>
       </p:sp>
@@ -8336,55 +8411,8 @@
         </p:nvSpPr>
         <p:spPr>
           <a:xfrm>
-            <a:off x="548640" y="1481328"/>
-            <a:ext cx="457200" cy="457200"/>
-          </a:xfrm>
-          <a:prstGeom prst="roundRect">
-            <a:avLst>
-              <a:gd name="adj" fmla="val 16000"/>
-            </a:avLst>
-          </a:prstGeom>
-          <a:solidFill>
-            <a:srgbClr val="6B4FA0"/>
-          </a:solidFill>
-          <a:ln>
-            <a:solidFill>
-              <a:srgbClr val="6B4FA0"/>
-            </a:solidFill>
-          </a:ln>
-        </p:spPr>
-        <p:txBody>
-          <a:bodyPr wrap="square" lIns="0" tIns="0" rIns="0" bIns="0" rtlCol="0" anchor="ctr"/>
-          <a:lstStyle/>
-          <a:p>
-            <a:pPr algn="ctr" indent="0" marL="0">
-              <a:buNone/>
-            </a:pPr>
-            <a:r>
-              <a:rPr lang="en-US" sz="1700" b="1" dirty="0">
-                <a:solidFill>
-                  <a:srgbClr val="FFFFFF"/>
-                </a:solidFill>
-                <a:latin typeface="Calibri" pitchFamily="34" charset="0"/>
-                <a:ea typeface="Calibri" pitchFamily="34" charset="-122"/>
-                <a:cs typeface="Calibri" pitchFamily="34" charset="-120"/>
-              </a:rPr>
-              <a:t>1</a:t>
-            </a:r>
-            <a:endParaRPr lang="en-US" sz="1700" dirty="0"/>
-          </a:p>
-        </p:txBody>
-      </p:sp>
-      <p:sp>
-        <p:nvSpPr>
-          <p:cNvPr id="4" name="Text 2"/>
-          <p:cNvSpPr txBox="1"/>
-          <p:nvPr/>
-        </p:nvSpPr>
-        <p:spPr>
-          <a:xfrm>
-            <a:off x="1280160" y="1463040"/>
-            <a:ext cx="10362895" cy="493776"/>
+            <a:off x="548640" y="2834640"/>
+            <a:ext cx="11094415" cy="1371600"/>
           </a:xfrm>
           <a:prstGeom prst="rect">
             <a:avLst/>
@@ -8400,77 +8428,30 @@
               <a:buNone/>
             </a:pPr>
             <a:r>
-              <a:rPr lang="en-US" sz="2700" dirty="0">
-                <a:solidFill>
-                  <a:srgbClr val="1B2530"/>
-                </a:solidFill>
-                <a:latin typeface="Calibri" pitchFamily="34" charset="0"/>
-                <a:ea typeface="Calibri" pitchFamily="34" charset="-122"/>
-                <a:cs typeface="Calibri" pitchFamily="34" charset="-120"/>
-              </a:rPr>
-              <a:t>Change ONE number</a:t>
-            </a:r>
-            <a:endParaRPr lang="en-US" sz="2700" dirty="0"/>
-          </a:p>
-        </p:txBody>
-      </p:sp>
-      <p:sp>
-        <p:nvSpPr>
-          <p:cNvPr id="5" name="Text 3"/>
-          <p:cNvSpPr txBox="1"/>
-          <p:nvPr/>
-        </p:nvSpPr>
-        <p:spPr>
-          <a:xfrm>
-            <a:off x="548640" y="2711196"/>
-            <a:ext cx="457200" cy="457200"/>
-          </a:xfrm>
-          <a:prstGeom prst="roundRect">
-            <a:avLst>
-              <a:gd name="adj" fmla="val 16000"/>
-            </a:avLst>
-          </a:prstGeom>
-          <a:solidFill>
-            <a:srgbClr val="6B4FA0"/>
-          </a:solidFill>
-          <a:ln>
-            <a:solidFill>
-              <a:srgbClr val="6B4FA0"/>
-            </a:solidFill>
-          </a:ln>
-        </p:spPr>
-        <p:txBody>
-          <a:bodyPr wrap="square" lIns="0" tIns="0" rIns="0" bIns="0" rtlCol="0" anchor="ctr"/>
-          <a:lstStyle/>
-          <a:p>
-            <a:pPr algn="ctr" indent="0" marL="0">
-              <a:buNone/>
-            </a:pPr>
-            <a:r>
-              <a:rPr lang="en-US" sz="1700" b="1" dirty="0">
+              <a:rPr lang="en-US" sz="4200" b="1" dirty="0">
                 <a:solidFill>
                   <a:srgbClr val="FFFFFF"/>
                 </a:solidFill>
-                <a:latin typeface="Calibri" pitchFamily="34" charset="0"/>
-                <a:ea typeface="Calibri" pitchFamily="34" charset="-122"/>
-                <a:cs typeface="Calibri" pitchFamily="34" charset="-120"/>
-              </a:rPr>
-              <a:t>2</a:t>
-            </a:r>
-            <a:endParaRPr lang="en-US" sz="1700" dirty="0"/>
-          </a:p>
-        </p:txBody>
-      </p:sp>
-      <p:sp>
-        <p:nvSpPr>
-          <p:cNvPr id="6" name="Text 4"/>
-          <p:cNvSpPr txBox="1"/>
-          <p:nvPr/>
-        </p:nvSpPr>
-        <p:spPr>
-          <a:xfrm>
-            <a:off x="1280160" y="2692908"/>
-            <a:ext cx="10362895" cy="493776"/>
+                <a:latin typeface="Cambria" pitchFamily="34" charset="0"/>
+                <a:ea typeface="Cambria" pitchFamily="34" charset="-122"/>
+                <a:cs typeface="Cambria" pitchFamily="34" charset="-120"/>
+              </a:rPr>
+              <a:t>Change one thing</a:t>
+            </a:r>
+            <a:endParaRPr lang="en-US" sz="4200" dirty="0"/>
+          </a:p>
+        </p:txBody>
+      </p:sp>
+      <p:sp>
+        <p:nvSpPr>
+          <p:cNvPr id="4" name="Text 2"/>
+          <p:cNvSpPr txBox="1"/>
+          <p:nvPr/>
+        </p:nvSpPr>
+        <p:spPr>
+          <a:xfrm>
+            <a:off x="548640" y="4389120"/>
+            <a:ext cx="11094415" cy="1097280"/>
           </a:xfrm>
           <a:prstGeom prst="rect">
             <a:avLst/>
@@ -8479,196 +8460,24 @@
           <a:ln/>
         </p:spPr>
         <p:txBody>
-          <a:bodyPr wrap="square" lIns="0" tIns="0" rIns="0" bIns="0" rtlCol="0" anchor="ctr"/>
+          <a:bodyPr wrap="square" lIns="0" tIns="0" rIns="0" bIns="0" rtlCol="0" anchor="t"/>
           <a:lstStyle/>
           <a:p>
             <a:pPr indent="0" marL="0">
               <a:buNone/>
             </a:pPr>
             <a:r>
-              <a:rPr lang="en-US" sz="2700" dirty="0">
-                <a:solidFill>
-                  <a:srgbClr val="1B2530"/>
-                </a:solidFill>
-                <a:latin typeface="Calibri" pitchFamily="34" charset="0"/>
-                <a:ea typeface="Calibri" pitchFamily="34" charset="-122"/>
-                <a:cs typeface="Calibri" pitchFamily="34" charset="-120"/>
-              </a:rPr>
-              <a:t>Say what you think will happen</a:t>
-            </a:r>
-            <a:endParaRPr lang="en-US" sz="2700" dirty="0"/>
-          </a:p>
-        </p:txBody>
-      </p:sp>
-      <p:sp>
-        <p:nvSpPr>
-          <p:cNvPr id="7" name="Text 5"/>
-          <p:cNvSpPr txBox="1"/>
-          <p:nvPr/>
-        </p:nvSpPr>
-        <p:spPr>
-          <a:xfrm>
-            <a:off x="548640" y="3941064"/>
-            <a:ext cx="457200" cy="457200"/>
-          </a:xfrm>
-          <a:prstGeom prst="roundRect">
-            <a:avLst>
-              <a:gd name="adj" fmla="val 16000"/>
-            </a:avLst>
-          </a:prstGeom>
-          <a:solidFill>
-            <a:srgbClr val="6B4FA0"/>
-          </a:solidFill>
-          <a:ln>
-            <a:solidFill>
-              <a:srgbClr val="6B4FA0"/>
-            </a:solidFill>
-          </a:ln>
-        </p:spPr>
-        <p:txBody>
-          <a:bodyPr wrap="square" lIns="0" tIns="0" rIns="0" bIns="0" rtlCol="0" anchor="ctr"/>
-          <a:lstStyle/>
-          <a:p>
-            <a:pPr algn="ctr" indent="0" marL="0">
-              <a:buNone/>
-            </a:pPr>
-            <a:r>
-              <a:rPr lang="en-US" sz="1700" b="1" dirty="0">
-                <a:solidFill>
-                  <a:srgbClr val="FFFFFF"/>
-                </a:solidFill>
-                <a:latin typeface="Calibri" pitchFamily="34" charset="0"/>
-                <a:ea typeface="Calibri" pitchFamily="34" charset="-122"/>
-                <a:cs typeface="Calibri" pitchFamily="34" charset="-120"/>
-              </a:rPr>
-              <a:t>3</a:t>
-            </a:r>
-            <a:endParaRPr lang="en-US" sz="1700" dirty="0"/>
-          </a:p>
-        </p:txBody>
-      </p:sp>
-      <p:sp>
-        <p:nvSpPr>
-          <p:cNvPr id="8" name="Text 6"/>
-          <p:cNvSpPr txBox="1"/>
-          <p:nvPr/>
-        </p:nvSpPr>
-        <p:spPr>
-          <a:xfrm>
-            <a:off x="1280160" y="3922776"/>
-            <a:ext cx="10362895" cy="493776"/>
-          </a:xfrm>
-          <a:prstGeom prst="rect">
-            <a:avLst/>
-          </a:prstGeom>
-          <a:noFill/>
-          <a:ln/>
-        </p:spPr>
-        <p:txBody>
-          <a:bodyPr wrap="square" lIns="0" tIns="0" rIns="0" bIns="0" rtlCol="0" anchor="ctr"/>
-          <a:lstStyle/>
-          <a:p>
-            <a:pPr indent="0" marL="0">
-              <a:buNone/>
-            </a:pPr>
-            <a:r>
-              <a:rPr lang="en-US" sz="2700" dirty="0">
-                <a:solidFill>
-                  <a:srgbClr val="1B2530"/>
-                </a:solidFill>
-                <a:latin typeface="Calibri" pitchFamily="34" charset="0"/>
-                <a:ea typeface="Calibri" pitchFamily="34" charset="-122"/>
-                <a:cs typeface="Calibri" pitchFamily="34" charset="-120"/>
-              </a:rPr>
-              <a:t>Press Reset, then Play</a:t>
-            </a:r>
-            <a:endParaRPr lang="en-US" sz="2700" dirty="0"/>
-          </a:p>
-        </p:txBody>
-      </p:sp>
-      <p:sp>
-        <p:nvSpPr>
-          <p:cNvPr id="9" name="Text 7"/>
-          <p:cNvSpPr txBox="1"/>
-          <p:nvPr/>
-        </p:nvSpPr>
-        <p:spPr>
-          <a:xfrm>
-            <a:off x="548640" y="5170932"/>
-            <a:ext cx="457200" cy="457200"/>
-          </a:xfrm>
-          <a:prstGeom prst="roundRect">
-            <a:avLst>
-              <a:gd name="adj" fmla="val 16000"/>
-            </a:avLst>
-          </a:prstGeom>
-          <a:solidFill>
-            <a:srgbClr val="6B4FA0"/>
-          </a:solidFill>
-          <a:ln>
-            <a:solidFill>
-              <a:srgbClr val="6B4FA0"/>
-            </a:solidFill>
-          </a:ln>
-        </p:spPr>
-        <p:txBody>
-          <a:bodyPr wrap="square" lIns="0" tIns="0" rIns="0" bIns="0" rtlCol="0" anchor="ctr"/>
-          <a:lstStyle/>
-          <a:p>
-            <a:pPr algn="ctr" indent="0" marL="0">
-              <a:buNone/>
-            </a:pPr>
-            <a:r>
-              <a:rPr lang="en-US" sz="1700" b="1" dirty="0">
-                <a:solidFill>
-                  <a:srgbClr val="FFFFFF"/>
-                </a:solidFill>
-                <a:latin typeface="Calibri" pitchFamily="34" charset="0"/>
-                <a:ea typeface="Calibri" pitchFamily="34" charset="-122"/>
-                <a:cs typeface="Calibri" pitchFamily="34" charset="-120"/>
-              </a:rPr>
-              <a:t>4</a:t>
-            </a:r>
-            <a:endParaRPr lang="en-US" sz="1700" dirty="0"/>
-          </a:p>
-        </p:txBody>
-      </p:sp>
-      <p:sp>
-        <p:nvSpPr>
-          <p:cNvPr id="10" name="Text 8"/>
-          <p:cNvSpPr txBox="1"/>
-          <p:nvPr/>
-        </p:nvSpPr>
-        <p:spPr>
-          <a:xfrm>
-            <a:off x="1280160" y="5152644"/>
-            <a:ext cx="10362895" cy="493776"/>
-          </a:xfrm>
-          <a:prstGeom prst="rect">
-            <a:avLst/>
-          </a:prstGeom>
-          <a:noFill/>
-          <a:ln/>
-        </p:spPr>
-        <p:txBody>
-          <a:bodyPr wrap="square" lIns="0" tIns="0" rIns="0" bIns="0" rtlCol="0" anchor="ctr"/>
-          <a:lstStyle/>
-          <a:p>
-            <a:pPr indent="0" marL="0">
-              <a:buNone/>
-            </a:pPr>
-            <a:r>
-              <a:rPr lang="en-US" sz="2700" dirty="0">
-                <a:solidFill>
-                  <a:srgbClr val="1B2530"/>
-                </a:solidFill>
-                <a:latin typeface="Calibri" pitchFamily="34" charset="0"/>
-                <a:ea typeface="Calibri" pitchFamily="34" charset="-122"/>
-                <a:cs typeface="Calibri" pitchFamily="34" charset="-120"/>
-              </a:rPr>
-              <a:t>Were you right?</a:t>
-            </a:r>
-            <a:endParaRPr lang="en-US" sz="2700" dirty="0"/>
+              <a:rPr lang="en-US" sz="2200" dirty="0">
+                <a:solidFill>
+                  <a:srgbClr val="CFE3EA"/>
+                </a:solidFill>
+                <a:latin typeface="Calibri" pitchFamily="34" charset="0"/>
+                <a:ea typeface="Calibri" pitchFamily="34" charset="-122"/>
+                <a:cs typeface="Calibri" pitchFamily="34" charset="-120"/>
+              </a:rPr>
+              <a:t>Real programmers experiment</a:t>
+            </a:r>
+            <a:endParaRPr lang="en-US" sz="2200" dirty="0"/>
           </a:p>
         </p:txBody>
       </p:sp>
@@ -8702,7 +8511,7 @@
             <a:lvl1pPr>
               <a:defRPr sz="1000">
                 <a:solidFill>
-                  <a:srgbClr val="5B6B78"/>
+                  <a:srgbClr val="CFE3EA"/>
                 </a:solidFill>
                 <a:latin typeface="Calibri"/>
                 <a:ea typeface="Calibri"/>
@@ -8780,7 +8589,7 @@
                 <a:ea typeface="Cambria" pitchFamily="34" charset="-122"/>
                 <a:cs typeface="Cambria" pitchFamily="34" charset="-120"/>
               </a:rPr>
-              <a:t>Move it left and right</a:t>
+              <a:t>The rule of one</a:t>
             </a:r>
             <a:endParaRPr lang="en-US" sz="3000" dirty="0"/>
           </a:p>
@@ -8795,11 +8604,11 @@
         <p:spPr>
           <a:xfrm>
             <a:off x="548640" y="1481328"/>
-            <a:ext cx="438912" cy="438912"/>
+            <a:ext cx="457200" cy="457200"/>
           </a:xfrm>
           <a:prstGeom prst="roundRect">
             <a:avLst>
-              <a:gd name="adj" fmla="val 16667"/>
+              <a:gd name="adj" fmla="val 16000"/>
             </a:avLst>
           </a:prstGeom>
           <a:solidFill>
@@ -8819,7 +8628,7 @@
               <a:buNone/>
             </a:pPr>
             <a:r>
-              <a:rPr lang="en-US" sz="1600" b="1" dirty="0">
+              <a:rPr lang="en-US" sz="1700" b="1" dirty="0">
                 <a:solidFill>
                   <a:srgbClr val="FFFFFF"/>
                 </a:solidFill>
@@ -8829,7 +8638,7 @@
               </a:rPr>
               <a:t>1</a:t>
             </a:r>
-            <a:endParaRPr lang="en-US" sz="1600" dirty="0"/>
+            <a:endParaRPr lang="en-US" sz="1700" dirty="0"/>
           </a:p>
         </p:txBody>
       </p:sp>
@@ -8841,8 +8650,8 @@
         </p:nvSpPr>
         <p:spPr>
           <a:xfrm>
-            <a:off x="1234440" y="1463040"/>
-            <a:ext cx="6446520" cy="475488"/>
+            <a:off x="1280160" y="1463040"/>
+            <a:ext cx="10362895" cy="493776"/>
           </a:xfrm>
           <a:prstGeom prst="rect">
             <a:avLst/>
@@ -8858,7 +8667,7 @@
               <a:buNone/>
             </a:pPr>
             <a:r>
-              <a:rPr lang="en-US" sz="2400" dirty="0">
+              <a:rPr lang="en-US" sz="2700" dirty="0">
                 <a:solidFill>
                   <a:srgbClr val="1B2530"/>
                 </a:solidFill>
@@ -8866,9 +8675,9 @@
                 <a:ea typeface="Calibri" pitchFamily="34" charset="-122"/>
                 <a:cs typeface="Calibri" pitchFamily="34" charset="-120"/>
               </a:rPr>
-              <a:t>Change player_x to 0. Reset and Play.</a:t>
-            </a:r>
-            <a:endParaRPr lang="en-US" sz="2400" dirty="0"/>
+              <a:t>Change ONE number</a:t>
+            </a:r>
+            <a:endParaRPr lang="en-US" sz="2700" dirty="0"/>
           </a:p>
         </p:txBody>
       </p:sp>
@@ -8880,12 +8689,12 @@
         </p:nvSpPr>
         <p:spPr>
           <a:xfrm>
-            <a:off x="548640" y="3115056"/>
-            <a:ext cx="438912" cy="438912"/>
+            <a:off x="548640" y="2711196"/>
+            <a:ext cx="457200" cy="457200"/>
           </a:xfrm>
           <a:prstGeom prst="roundRect">
             <a:avLst>
-              <a:gd name="adj" fmla="val 16667"/>
+              <a:gd name="adj" fmla="val 16000"/>
             </a:avLst>
           </a:prstGeom>
           <a:solidFill>
@@ -8905,7 +8714,7 @@
               <a:buNone/>
             </a:pPr>
             <a:r>
-              <a:rPr lang="en-US" sz="1600" b="1" dirty="0">
+              <a:rPr lang="en-US" sz="1700" b="1" dirty="0">
                 <a:solidFill>
                   <a:srgbClr val="FFFFFF"/>
                 </a:solidFill>
@@ -8915,7 +8724,7 @@
               </a:rPr>
               <a:t>2</a:t>
             </a:r>
-            <a:endParaRPr lang="en-US" sz="1600" dirty="0"/>
+            <a:endParaRPr lang="en-US" sz="1700" dirty="0"/>
           </a:p>
         </p:txBody>
       </p:sp>
@@ -8927,8 +8736,8 @@
         </p:nvSpPr>
         <p:spPr>
           <a:xfrm>
-            <a:off x="1234440" y="3096768"/>
-            <a:ext cx="6446520" cy="475488"/>
+            <a:off x="1280160" y="2692908"/>
+            <a:ext cx="10362895" cy="493776"/>
           </a:xfrm>
           <a:prstGeom prst="rect">
             <a:avLst/>
@@ -8944,7 +8753,7 @@
               <a:buNone/>
             </a:pPr>
             <a:r>
-              <a:rPr lang="en-US" sz="2400" dirty="0">
+              <a:rPr lang="en-US" sz="2700" dirty="0">
                 <a:solidFill>
                   <a:srgbClr val="1B2530"/>
                 </a:solidFill>
@@ -8952,9 +8761,9 @@
                 <a:ea typeface="Calibri" pitchFamily="34" charset="-122"/>
                 <a:cs typeface="Calibri" pitchFamily="34" charset="-120"/>
               </a:rPr>
-              <a:t>Change player_x to 304. Reset and Play.</a:t>
-            </a:r>
-            <a:endParaRPr lang="en-US" sz="2400" dirty="0"/>
+              <a:t>Say what you think will happen</a:t>
+            </a:r>
+            <a:endParaRPr lang="en-US" sz="2700" dirty="0"/>
           </a:p>
         </p:txBody>
       </p:sp>
@@ -8966,12 +8775,12 @@
         </p:nvSpPr>
         <p:spPr>
           <a:xfrm>
-            <a:off x="548640" y="4748784"/>
-            <a:ext cx="438912" cy="438912"/>
+            <a:off x="548640" y="3941064"/>
+            <a:ext cx="457200" cy="457200"/>
           </a:xfrm>
           <a:prstGeom prst="roundRect">
             <a:avLst>
-              <a:gd name="adj" fmla="val 16667"/>
+              <a:gd name="adj" fmla="val 16000"/>
             </a:avLst>
           </a:prstGeom>
           <a:solidFill>
@@ -8991,7 +8800,7 @@
               <a:buNone/>
             </a:pPr>
             <a:r>
-              <a:rPr lang="en-US" sz="1600" b="1" dirty="0">
+              <a:rPr lang="en-US" sz="1700" b="1" dirty="0">
                 <a:solidFill>
                   <a:srgbClr val="FFFFFF"/>
                 </a:solidFill>
@@ -9001,7 +8810,7 @@
               </a:rPr>
               <a:t>3</a:t>
             </a:r>
-            <a:endParaRPr lang="en-US" sz="1600" dirty="0"/>
+            <a:endParaRPr lang="en-US" sz="1700" dirty="0"/>
           </a:p>
         </p:txBody>
       </p:sp>
@@ -9013,8 +8822,8 @@
         </p:nvSpPr>
         <p:spPr>
           <a:xfrm>
-            <a:off x="1234440" y="4730496"/>
-            <a:ext cx="6446520" cy="475488"/>
+            <a:off x="1280160" y="3922776"/>
+            <a:ext cx="10362895" cy="493776"/>
           </a:xfrm>
           <a:prstGeom prst="rect">
             <a:avLst/>
@@ -9030,7 +8839,7 @@
               <a:buNone/>
             </a:pPr>
             <a:r>
-              <a:rPr lang="en-US" sz="2400" dirty="0">
+              <a:rPr lang="en-US" sz="2700" dirty="0">
                 <a:solidFill>
                   <a:srgbClr val="1B2530"/>
                 </a:solidFill>
@@ -9038,38 +8847,58 @@
                 <a:ea typeface="Calibri" pitchFamily="34" charset="-122"/>
                 <a:cs typeface="Calibri" pitchFamily="34" charset="-120"/>
               </a:rPr>
-              <a:t>Change it back to 152</a:t>
-            </a:r>
-            <a:endParaRPr lang="en-US" sz="2400" dirty="0"/>
-          </a:p>
-        </p:txBody>
-      </p:sp>
-      <p:sp>
-        <p:nvSpPr>
-          <p:cNvPr id="9" name="Shape 7"/>
-          <p:cNvSpPr/>
-          <p:nvPr/>
-        </p:nvSpPr>
-        <p:spPr>
-          <a:xfrm>
-            <a:off x="8092440" y="1463040"/>
-            <a:ext cx="3550615" cy="1143000"/>
+              <a:t>Press Reset, then Play</a:t>
+            </a:r>
+            <a:endParaRPr lang="en-US" sz="2700" dirty="0"/>
+          </a:p>
+        </p:txBody>
+      </p:sp>
+      <p:sp>
+        <p:nvSpPr>
+          <p:cNvPr id="9" name="Text 7"/>
+          <p:cNvSpPr txBox="1"/>
+          <p:nvPr/>
+        </p:nvSpPr>
+        <p:spPr>
+          <a:xfrm>
+            <a:off x="548640" y="5170932"/>
+            <a:ext cx="457200" cy="457200"/>
           </a:xfrm>
           <a:prstGeom prst="roundRect">
             <a:avLst>
-              <a:gd name="adj" fmla="val 6400"/>
+              <a:gd name="adj" fmla="val 16000"/>
             </a:avLst>
           </a:prstGeom>
           <a:solidFill>
-            <a:srgbClr val="1B2530"/>
+            <a:srgbClr val="6B4FA0"/>
           </a:solidFill>
-          <a:ln w="12700">
+          <a:ln>
             <a:solidFill>
-              <a:srgbClr val="1B2530"/>
+              <a:srgbClr val="6B4FA0"/>
             </a:solidFill>
-            <a:prstDash val="solid"/>
           </a:ln>
         </p:spPr>
+        <p:txBody>
+          <a:bodyPr wrap="square" lIns="0" tIns="0" rIns="0" bIns="0" rtlCol="0" anchor="ctr"/>
+          <a:lstStyle/>
+          <a:p>
+            <a:pPr algn="ctr" indent="0" marL="0">
+              <a:buNone/>
+            </a:pPr>
+            <a:r>
+              <a:rPr lang="en-US" sz="1700" b="1" dirty="0">
+                <a:solidFill>
+                  <a:srgbClr val="FFFFFF"/>
+                </a:solidFill>
+                <a:latin typeface="Calibri" pitchFamily="34" charset="0"/>
+                <a:ea typeface="Calibri" pitchFamily="34" charset="-122"/>
+                <a:cs typeface="Calibri" pitchFamily="34" charset="-120"/>
+              </a:rPr>
+              <a:t>4</a:t>
+            </a:r>
+            <a:endParaRPr lang="en-US" sz="1700" dirty="0"/>
+          </a:p>
+        </p:txBody>
       </p:sp>
       <p:sp>
         <p:nvSpPr>
@@ -9079,8 +8908,8 @@
         </p:nvSpPr>
         <p:spPr>
           <a:xfrm>
-            <a:off x="8321040" y="1600200"/>
-            <a:ext cx="3093415" cy="457200"/>
+            <a:off x="1280160" y="5152644"/>
+            <a:ext cx="10362895" cy="493776"/>
           </a:xfrm>
           <a:prstGeom prst="rect">
             <a:avLst/>
@@ -9089,158 +8918,14 @@
           <a:ln/>
         </p:spPr>
         <p:txBody>
-          <a:bodyPr wrap="square" lIns="0" tIns="0" rIns="0" bIns="0" rtlCol="0" anchor="t"/>
+          <a:bodyPr wrap="square" lIns="0" tIns="0" rIns="0" bIns="0" rtlCol="0" anchor="ctr"/>
           <a:lstStyle/>
           <a:p>
             <a:pPr indent="0" marL="0">
               <a:buNone/>
             </a:pPr>
             <a:r>
-              <a:rPr lang="en-US" sz="2200" b="1" dirty="0">
-                <a:solidFill>
-                  <a:srgbClr val="FFFFFF"/>
-                </a:solidFill>
-                <a:latin typeface="Cambria" pitchFamily="34" charset="0"/>
-                <a:ea typeface="Cambria" pitchFamily="34" charset="-122"/>
-                <a:cs typeface="Cambria" pitchFamily="34" charset="-120"/>
-              </a:rPr>
-              <a:t>Step 6</a:t>
-            </a:r>
-            <a:endParaRPr lang="en-US" sz="2200" dirty="0"/>
-          </a:p>
-        </p:txBody>
-      </p:sp>
-      <p:sp>
-        <p:nvSpPr>
-          <p:cNvPr id="11" name="Text 9"/>
-          <p:cNvSpPr txBox="1"/>
-          <p:nvPr/>
-        </p:nvSpPr>
-        <p:spPr>
-          <a:xfrm>
-            <a:off x="8321040" y="2084832"/>
-            <a:ext cx="3093415" cy="365760"/>
-          </a:xfrm>
-          <a:prstGeom prst="rect">
-            <a:avLst/>
-          </a:prstGeom>
-          <a:noFill/>
-          <a:ln/>
-        </p:spPr>
-        <p:txBody>
-          <a:bodyPr wrap="square" lIns="0" tIns="0" rIns="0" bIns="0" rtlCol="0" anchor="t"/>
-          <a:lstStyle/>
-          <a:p>
-            <a:pPr indent="0" marL="0">
-              <a:buNone/>
-            </a:pPr>
-            <a:r>
-              <a:rPr lang="en-US" sz="1600" dirty="0">
-                <a:solidFill>
-                  <a:srgbClr val="CFE3EA"/>
-                </a:solidFill>
-                <a:latin typeface="Calibri" pitchFamily="34" charset="0"/>
-                <a:ea typeface="Calibri" pitchFamily="34" charset="-122"/>
-                <a:cs typeface="Calibri" pitchFamily="34" charset="-120"/>
-              </a:rPr>
-              <a:t>about 4 min</a:t>
-            </a:r>
-            <a:endParaRPr lang="en-US" sz="1600" dirty="0"/>
-          </a:p>
-        </p:txBody>
-      </p:sp>
-      <p:sp>
-        <p:nvSpPr>
-          <p:cNvPr id="12" name="Shape 10"/>
-          <p:cNvSpPr/>
-          <p:nvPr/>
-        </p:nvSpPr>
-        <p:spPr>
-          <a:xfrm>
-            <a:off x="8092440" y="2834640"/>
-            <a:ext cx="3550615" cy="3383280"/>
-          </a:xfrm>
-          <a:prstGeom prst="roundRect">
-            <a:avLst>
-              <a:gd name="adj" fmla="val 2162"/>
-            </a:avLst>
-          </a:prstGeom>
-          <a:solidFill>
-            <a:srgbClr val="EEF2F4"/>
-          </a:solidFill>
-          <a:ln w="12700">
-            <a:solidFill>
-              <a:srgbClr val="EEF2F4"/>
-            </a:solidFill>
-            <a:prstDash val="solid"/>
-          </a:ln>
-        </p:spPr>
-      </p:sp>
-      <p:sp>
-        <p:nvSpPr>
-          <p:cNvPr id="13" name="Text 11"/>
-          <p:cNvSpPr txBox="1"/>
-          <p:nvPr/>
-        </p:nvSpPr>
-        <p:spPr>
-          <a:xfrm>
-            <a:off x="8321040" y="2971800"/>
-            <a:ext cx="3093415" cy="365760"/>
-          </a:xfrm>
-          <a:prstGeom prst="rect">
-            <a:avLst/>
-          </a:prstGeom>
-          <a:noFill/>
-          <a:ln/>
-        </p:spPr>
-        <p:txBody>
-          <a:bodyPr wrap="square" lIns="0" tIns="0" rIns="0" bIns="0" rtlCol="0" anchor="t"/>
-          <a:lstStyle/>
-          <a:p>
-            <a:pPr indent="0" marL="0">
-              <a:buNone/>
-            </a:pPr>
-            <a:r>
-              <a:rPr lang="en-US" sz="1500" b="1" dirty="0">
-                <a:solidFill>
-                  <a:srgbClr val="2F7D4F"/>
-                </a:solidFill>
-                <a:latin typeface="Calibri" pitchFamily="34" charset="0"/>
-                <a:ea typeface="Calibri" pitchFamily="34" charset="-122"/>
-                <a:cs typeface="Calibri" pitchFamily="34" charset="-120"/>
-              </a:rPr>
-              <a:t>You should see</a:t>
-            </a:r>
-            <a:endParaRPr lang="en-US" sz="1500" dirty="0"/>
-          </a:p>
-        </p:txBody>
-      </p:sp>
-      <p:sp>
-        <p:nvSpPr>
-          <p:cNvPr id="14" name="Text 12"/>
-          <p:cNvSpPr txBox="1"/>
-          <p:nvPr/>
-        </p:nvSpPr>
-        <p:spPr>
-          <a:xfrm>
-            <a:off x="8321040" y="3429000"/>
-            <a:ext cx="3093415" cy="2606040"/>
-          </a:xfrm>
-          <a:prstGeom prst="rect">
-            <a:avLst/>
-          </a:prstGeom>
-          <a:noFill/>
-          <a:ln/>
-        </p:spPr>
-        <p:txBody>
-          <a:bodyPr wrap="square" lIns="0" tIns="0" rIns="0" bIns="0" rtlCol="0" anchor="t"/>
-          <a:lstStyle/>
-          <a:p>
-            <a:pPr indent="0" marL="0">
-              <a:buNone/>
-            </a:pPr>
-            <a:r>
-              <a:rPr lang="en-US" sz="2200" dirty="0">
+              <a:rPr lang="en-US" sz="2700" dirty="0">
                 <a:solidFill>
                   <a:srgbClr val="1B2530"/>
                 </a:solidFill>
@@ -9248,9 +8933,9 @@
                 <a:ea typeface="Calibri" pitchFamily="34" charset="-122"/>
                 <a:cs typeface="Calibri" pitchFamily="34" charset="-120"/>
               </a:rPr>
-              <a:t>At 0 the square sits at the left edge. At 304 it touches the right edge.</a:t>
-            </a:r>
-            <a:endParaRPr lang="en-US" sz="2200" dirty="0"/>
+              <a:t>Were you right?</a:t>
+            </a:r>
+            <a:endParaRPr lang="en-US" sz="2700" dirty="0"/>
           </a:p>
         </p:txBody>
       </p:sp>
@@ -9906,7 +9591,7 @@
                 <a:ea typeface="Cambria" pitchFamily="34" charset="-122"/>
                 <a:cs typeface="Cambria" pitchFamily="34" charset="-120"/>
               </a:rPr>
-              <a:t>Move it up and down</a:t>
+              <a:t>Move it left and right</a:t>
             </a:r>
             <a:endParaRPr lang="en-US" sz="3000" dirty="0"/>
           </a:p>
@@ -9992,7 +9677,7 @@
                 <a:ea typeface="Calibri" pitchFamily="34" charset="-122"/>
                 <a:cs typeface="Calibri" pitchFamily="34" charset="-120"/>
               </a:rPr>
-              <a:t>Change player_y to 0</a:t>
+              <a:t>Change player_x to 0. Reset and Play.</a:t>
             </a:r>
             <a:endParaRPr lang="en-US" sz="2400" dirty="0"/>
           </a:p>
@@ -10078,7 +9763,7 @@
                 <a:ea typeface="Calibri" pitchFamily="34" charset="-122"/>
                 <a:cs typeface="Calibri" pitchFamily="34" charset="-120"/>
               </a:rPr>
-              <a:t>Change player_y to 184</a:t>
+              <a:t>Change player_x to 304. Reset and Play.</a:t>
             </a:r>
             <a:endParaRPr lang="en-US" sz="2400" dirty="0"/>
           </a:p>
@@ -10164,7 +9849,7 @@
                 <a:ea typeface="Calibri" pitchFamily="34" charset="-122"/>
                 <a:cs typeface="Calibri" pitchFamily="34" charset="-120"/>
               </a:rPr>
-              <a:t>Which one is at the bottom?</a:t>
+              <a:t>Change it back to 152</a:t>
             </a:r>
             <a:endParaRPr lang="en-US" sz="2400" dirty="0"/>
           </a:p>
@@ -10230,7 +9915,7 @@
                 <a:ea typeface="Cambria" pitchFamily="34" charset="-122"/>
                 <a:cs typeface="Cambria" pitchFamily="34" charset="-120"/>
               </a:rPr>
-              <a:t>Step 7</a:t>
+              <a:t>Step 6</a:t>
             </a:r>
             <a:endParaRPr lang="en-US" sz="2200" dirty="0"/>
           </a:p>
@@ -10283,12 +9968,12 @@
         </p:nvSpPr>
         <p:spPr>
           <a:xfrm>
-            <a:off x="8092440" y="2834640"/>
-            <a:ext cx="3550615" cy="3383280"/>
+            <a:off x="8092440" y="2788920"/>
+            <a:ext cx="3550615" cy="3429000"/>
           </a:xfrm>
           <a:prstGeom prst="roundRect">
             <a:avLst>
-              <a:gd name="adj" fmla="val 2162"/>
+              <a:gd name="adj" fmla="val 2133"/>
             </a:avLst>
           </a:prstGeom>
           <a:solidFill>
@@ -10310,8 +9995,8 @@
         </p:nvSpPr>
         <p:spPr>
           <a:xfrm>
-            <a:off x="8321040" y="2971800"/>
-            <a:ext cx="3093415" cy="365760"/>
+            <a:off x="8321040" y="2880360"/>
+            <a:ext cx="3093415" cy="310896"/>
           </a:xfrm>
           <a:prstGeom prst="rect">
             <a:avLst/>
@@ -10327,7 +10012,7 @@
               <a:buNone/>
             </a:pPr>
             <a:r>
-              <a:rPr lang="en-US" sz="1500" b="1" dirty="0">
+              <a:rPr lang="en-US" sz="1400" b="1" dirty="0">
                 <a:solidFill>
                   <a:srgbClr val="2F7D4F"/>
                 </a:solidFill>
@@ -10337,7 +10022,7 @@
               </a:rPr>
               <a:t>You should see</a:t>
             </a:r>
-            <a:endParaRPr lang="en-US" sz="1500" dirty="0"/>
+            <a:endParaRPr lang="en-US" sz="1400" dirty="0"/>
           </a:p>
         </p:txBody>
       </p:sp>
@@ -10349,8 +10034,8 @@
         </p:nvSpPr>
         <p:spPr>
           <a:xfrm>
-            <a:off x="8321040" y="3429000"/>
-            <a:ext cx="3093415" cy="2606040"/>
+            <a:off x="8321040" y="3246120"/>
+            <a:ext cx="3093415" cy="2862072"/>
           </a:xfrm>
           <a:prstGeom prst="rect">
             <a:avLst/>
@@ -10374,7 +10059,7 @@
                 <a:ea typeface="Calibri" pitchFamily="34" charset="-122"/>
                 <a:cs typeface="Calibri" pitchFamily="34" charset="-120"/>
               </a:rPr>
-              <a:t>0 is the top. 184 is the bottom. Bigger y is lower.</a:t>
+              <a:t>At 0 the square sits at the left edge. At 304 it touches the right edge.</a:t>
             </a:r>
             <a:endParaRPr lang="en-US" sz="2200" dirty="0"/>
           </a:p>
@@ -10488,7 +10173,7 @@
                 <a:ea typeface="Cambria" pitchFamily="34" charset="-122"/>
                 <a:cs typeface="Cambria" pitchFamily="34" charset="-120"/>
               </a:rPr>
-              <a:t>Quick question</a:t>
+              <a:t>Move it up and down</a:t>
             </a:r>
             <a:endParaRPr lang="en-US" sz="3000" dirty="0"/>
           </a:p>
@@ -10502,8 +10187,55 @@
         </p:nvSpPr>
         <p:spPr>
           <a:xfrm>
-            <a:off x="548640" y="1463040"/>
-            <a:ext cx="11094415" cy="1188720"/>
+            <a:off x="548640" y="1481328"/>
+            <a:ext cx="438912" cy="438912"/>
+          </a:xfrm>
+          <a:prstGeom prst="roundRect">
+            <a:avLst>
+              <a:gd name="adj" fmla="val 16667"/>
+            </a:avLst>
+          </a:prstGeom>
+          <a:solidFill>
+            <a:srgbClr val="6B4FA0"/>
+          </a:solidFill>
+          <a:ln>
+            <a:solidFill>
+              <a:srgbClr val="6B4FA0"/>
+            </a:solidFill>
+          </a:ln>
+        </p:spPr>
+        <p:txBody>
+          <a:bodyPr wrap="square" lIns="0" tIns="0" rIns="0" bIns="0" rtlCol="0" anchor="ctr"/>
+          <a:lstStyle/>
+          <a:p>
+            <a:pPr algn="ctr" indent="0" marL="0">
+              <a:buNone/>
+            </a:pPr>
+            <a:r>
+              <a:rPr lang="en-US" sz="1600" b="1" dirty="0">
+                <a:solidFill>
+                  <a:srgbClr val="FFFFFF"/>
+                </a:solidFill>
+                <a:latin typeface="Calibri" pitchFamily="34" charset="0"/>
+                <a:ea typeface="Calibri" pitchFamily="34" charset="-122"/>
+                <a:cs typeface="Calibri" pitchFamily="34" charset="-120"/>
+              </a:rPr>
+              <a:t>1</a:t>
+            </a:r>
+            <a:endParaRPr lang="en-US" sz="1600" dirty="0"/>
+          </a:p>
+        </p:txBody>
+      </p:sp>
+      <p:sp>
+        <p:nvSpPr>
+          <p:cNvPr id="4" name="Text 2"/>
+          <p:cNvSpPr txBox="1"/>
+          <p:nvPr/>
+        </p:nvSpPr>
+        <p:spPr>
+          <a:xfrm>
+            <a:off x="1234440" y="1463040"/>
+            <a:ext cx="6446520" cy="475488"/>
           </a:xfrm>
           <a:prstGeom prst="rect">
             <a:avLst/>
@@ -10519,34 +10251,311 @@
               <a:buNone/>
             </a:pPr>
             <a:r>
-              <a:rPr lang="en-US" sz="2600" b="1" dirty="0">
+              <a:rPr lang="en-US" sz="2400" dirty="0">
                 <a:solidFill>
                   <a:srgbClr val="1B2530"/>
+                </a:solidFill>
+                <a:latin typeface="Calibri" pitchFamily="34" charset="0"/>
+                <a:ea typeface="Calibri" pitchFamily="34" charset="-122"/>
+                <a:cs typeface="Calibri" pitchFamily="34" charset="-120"/>
+              </a:rPr>
+              <a:t>Change player_y to 0</a:t>
+            </a:r>
+            <a:endParaRPr lang="en-US" sz="2400" dirty="0"/>
+          </a:p>
+        </p:txBody>
+      </p:sp>
+      <p:sp>
+        <p:nvSpPr>
+          <p:cNvPr id="5" name="Text 3"/>
+          <p:cNvSpPr txBox="1"/>
+          <p:nvPr/>
+        </p:nvSpPr>
+        <p:spPr>
+          <a:xfrm>
+            <a:off x="548640" y="3115056"/>
+            <a:ext cx="438912" cy="438912"/>
+          </a:xfrm>
+          <a:prstGeom prst="roundRect">
+            <a:avLst>
+              <a:gd name="adj" fmla="val 16667"/>
+            </a:avLst>
+          </a:prstGeom>
+          <a:solidFill>
+            <a:srgbClr val="6B4FA0"/>
+          </a:solidFill>
+          <a:ln>
+            <a:solidFill>
+              <a:srgbClr val="6B4FA0"/>
+            </a:solidFill>
+          </a:ln>
+        </p:spPr>
+        <p:txBody>
+          <a:bodyPr wrap="square" lIns="0" tIns="0" rIns="0" bIns="0" rtlCol="0" anchor="ctr"/>
+          <a:lstStyle/>
+          <a:p>
+            <a:pPr algn="ctr" indent="0" marL="0">
+              <a:buNone/>
+            </a:pPr>
+            <a:r>
+              <a:rPr lang="en-US" sz="1600" b="1" dirty="0">
+                <a:solidFill>
+                  <a:srgbClr val="FFFFFF"/>
+                </a:solidFill>
+                <a:latin typeface="Calibri" pitchFamily="34" charset="0"/>
+                <a:ea typeface="Calibri" pitchFamily="34" charset="-122"/>
+                <a:cs typeface="Calibri" pitchFamily="34" charset="-120"/>
+              </a:rPr>
+              <a:t>2</a:t>
+            </a:r>
+            <a:endParaRPr lang="en-US" sz="1600" dirty="0"/>
+          </a:p>
+        </p:txBody>
+      </p:sp>
+      <p:sp>
+        <p:nvSpPr>
+          <p:cNvPr id="6" name="Text 4"/>
+          <p:cNvSpPr txBox="1"/>
+          <p:nvPr/>
+        </p:nvSpPr>
+        <p:spPr>
+          <a:xfrm>
+            <a:off x="1234440" y="3096768"/>
+            <a:ext cx="6446520" cy="475488"/>
+          </a:xfrm>
+          <a:prstGeom prst="rect">
+            <a:avLst/>
+          </a:prstGeom>
+          <a:noFill/>
+          <a:ln/>
+        </p:spPr>
+        <p:txBody>
+          <a:bodyPr wrap="square" lIns="0" tIns="0" rIns="0" bIns="0" rtlCol="0" anchor="ctr"/>
+          <a:lstStyle/>
+          <a:p>
+            <a:pPr indent="0" marL="0">
+              <a:buNone/>
+            </a:pPr>
+            <a:r>
+              <a:rPr lang="en-US" sz="2400" dirty="0">
+                <a:solidFill>
+                  <a:srgbClr val="1B2530"/>
+                </a:solidFill>
+                <a:latin typeface="Calibri" pitchFamily="34" charset="0"/>
+                <a:ea typeface="Calibri" pitchFamily="34" charset="-122"/>
+                <a:cs typeface="Calibri" pitchFamily="34" charset="-120"/>
+              </a:rPr>
+              <a:t>Change player_y to 184</a:t>
+            </a:r>
+            <a:endParaRPr lang="en-US" sz="2400" dirty="0"/>
+          </a:p>
+        </p:txBody>
+      </p:sp>
+      <p:sp>
+        <p:nvSpPr>
+          <p:cNvPr id="7" name="Text 5"/>
+          <p:cNvSpPr txBox="1"/>
+          <p:nvPr/>
+        </p:nvSpPr>
+        <p:spPr>
+          <a:xfrm>
+            <a:off x="548640" y="4748784"/>
+            <a:ext cx="438912" cy="438912"/>
+          </a:xfrm>
+          <a:prstGeom prst="roundRect">
+            <a:avLst>
+              <a:gd name="adj" fmla="val 16667"/>
+            </a:avLst>
+          </a:prstGeom>
+          <a:solidFill>
+            <a:srgbClr val="6B4FA0"/>
+          </a:solidFill>
+          <a:ln>
+            <a:solidFill>
+              <a:srgbClr val="6B4FA0"/>
+            </a:solidFill>
+          </a:ln>
+        </p:spPr>
+        <p:txBody>
+          <a:bodyPr wrap="square" lIns="0" tIns="0" rIns="0" bIns="0" rtlCol="0" anchor="ctr"/>
+          <a:lstStyle/>
+          <a:p>
+            <a:pPr algn="ctr" indent="0" marL="0">
+              <a:buNone/>
+            </a:pPr>
+            <a:r>
+              <a:rPr lang="en-US" sz="1600" b="1" dirty="0">
+                <a:solidFill>
+                  <a:srgbClr val="FFFFFF"/>
+                </a:solidFill>
+                <a:latin typeface="Calibri" pitchFamily="34" charset="0"/>
+                <a:ea typeface="Calibri" pitchFamily="34" charset="-122"/>
+                <a:cs typeface="Calibri" pitchFamily="34" charset="-120"/>
+              </a:rPr>
+              <a:t>3</a:t>
+            </a:r>
+            <a:endParaRPr lang="en-US" sz="1600" dirty="0"/>
+          </a:p>
+        </p:txBody>
+      </p:sp>
+      <p:sp>
+        <p:nvSpPr>
+          <p:cNvPr id="8" name="Text 6"/>
+          <p:cNvSpPr txBox="1"/>
+          <p:nvPr/>
+        </p:nvSpPr>
+        <p:spPr>
+          <a:xfrm>
+            <a:off x="1234440" y="4730496"/>
+            <a:ext cx="6446520" cy="475488"/>
+          </a:xfrm>
+          <a:prstGeom prst="rect">
+            <a:avLst/>
+          </a:prstGeom>
+          <a:noFill/>
+          <a:ln/>
+        </p:spPr>
+        <p:txBody>
+          <a:bodyPr wrap="square" lIns="0" tIns="0" rIns="0" bIns="0" rtlCol="0" anchor="ctr"/>
+          <a:lstStyle/>
+          <a:p>
+            <a:pPr indent="0" marL="0">
+              <a:buNone/>
+            </a:pPr>
+            <a:r>
+              <a:rPr lang="en-US" sz="2400" dirty="0">
+                <a:solidFill>
+                  <a:srgbClr val="1B2530"/>
+                </a:solidFill>
+                <a:latin typeface="Calibri" pitchFamily="34" charset="0"/>
+                <a:ea typeface="Calibri" pitchFamily="34" charset="-122"/>
+                <a:cs typeface="Calibri" pitchFamily="34" charset="-120"/>
+              </a:rPr>
+              <a:t>Which one is at the bottom?</a:t>
+            </a:r>
+            <a:endParaRPr lang="en-US" sz="2400" dirty="0"/>
+          </a:p>
+        </p:txBody>
+      </p:sp>
+      <p:sp>
+        <p:nvSpPr>
+          <p:cNvPr id="9" name="Shape 7"/>
+          <p:cNvSpPr/>
+          <p:nvPr/>
+        </p:nvSpPr>
+        <p:spPr>
+          <a:xfrm>
+            <a:off x="8092440" y="1463040"/>
+            <a:ext cx="3550615" cy="1143000"/>
+          </a:xfrm>
+          <a:prstGeom prst="roundRect">
+            <a:avLst>
+              <a:gd name="adj" fmla="val 6400"/>
+            </a:avLst>
+          </a:prstGeom>
+          <a:solidFill>
+            <a:srgbClr val="1B2530"/>
+          </a:solidFill>
+          <a:ln w="12700">
+            <a:solidFill>
+              <a:srgbClr val="1B2530"/>
+            </a:solidFill>
+            <a:prstDash val="solid"/>
+          </a:ln>
+        </p:spPr>
+      </p:sp>
+      <p:sp>
+        <p:nvSpPr>
+          <p:cNvPr id="10" name="Text 8"/>
+          <p:cNvSpPr txBox="1"/>
+          <p:nvPr/>
+        </p:nvSpPr>
+        <p:spPr>
+          <a:xfrm>
+            <a:off x="8321040" y="1600200"/>
+            <a:ext cx="3093415" cy="457200"/>
+          </a:xfrm>
+          <a:prstGeom prst="rect">
+            <a:avLst/>
+          </a:prstGeom>
+          <a:noFill/>
+          <a:ln/>
+        </p:spPr>
+        <p:txBody>
+          <a:bodyPr wrap="square" lIns="0" tIns="0" rIns="0" bIns="0" rtlCol="0" anchor="t"/>
+          <a:lstStyle/>
+          <a:p>
+            <a:pPr indent="0" marL="0">
+              <a:buNone/>
+            </a:pPr>
+            <a:r>
+              <a:rPr lang="en-US" sz="2200" b="1" dirty="0">
+                <a:solidFill>
+                  <a:srgbClr val="FFFFFF"/>
                 </a:solidFill>
                 <a:latin typeface="Cambria" pitchFamily="34" charset="0"/>
                 <a:ea typeface="Cambria" pitchFamily="34" charset="-122"/>
                 <a:cs typeface="Cambria" pitchFamily="34" charset="-120"/>
               </a:rPr>
-              <a:t>To put the square in the top right corner we need...</a:t>
-            </a:r>
-            <a:endParaRPr lang="en-US" sz="2600" dirty="0"/>
-          </a:p>
-        </p:txBody>
-      </p:sp>
-      <p:sp>
-        <p:nvSpPr>
-          <p:cNvPr id="4" name="Shape 2"/>
+              <a:t>Step 7</a:t>
+            </a:r>
+            <a:endParaRPr lang="en-US" sz="2200" dirty="0"/>
+          </a:p>
+        </p:txBody>
+      </p:sp>
+      <p:sp>
+        <p:nvSpPr>
+          <p:cNvPr id="11" name="Text 9"/>
+          <p:cNvSpPr txBox="1"/>
+          <p:nvPr/>
+        </p:nvSpPr>
+        <p:spPr>
+          <a:xfrm>
+            <a:off x="8321040" y="2084832"/>
+            <a:ext cx="3093415" cy="365760"/>
+          </a:xfrm>
+          <a:prstGeom prst="rect">
+            <a:avLst/>
+          </a:prstGeom>
+          <a:noFill/>
+          <a:ln/>
+        </p:spPr>
+        <p:txBody>
+          <a:bodyPr wrap="square" lIns="0" tIns="0" rIns="0" bIns="0" rtlCol="0" anchor="t"/>
+          <a:lstStyle/>
+          <a:p>
+            <a:pPr indent="0" marL="0">
+              <a:buNone/>
+            </a:pPr>
+            <a:r>
+              <a:rPr lang="en-US" sz="1600" dirty="0">
+                <a:solidFill>
+                  <a:srgbClr val="CFE3EA"/>
+                </a:solidFill>
+                <a:latin typeface="Calibri" pitchFamily="34" charset="0"/>
+                <a:ea typeface="Calibri" pitchFamily="34" charset="-122"/>
+                <a:cs typeface="Calibri" pitchFamily="34" charset="-120"/>
+              </a:rPr>
+              <a:t>about 4 min</a:t>
+            </a:r>
+            <a:endParaRPr lang="en-US" sz="1600" dirty="0"/>
+          </a:p>
+        </p:txBody>
+      </p:sp>
+      <p:sp>
+        <p:nvSpPr>
+          <p:cNvPr id="12" name="Shape 10"/>
           <p:cNvSpPr/>
           <p:nvPr/>
         </p:nvSpPr>
         <p:spPr>
           <a:xfrm>
-            <a:off x="548640" y="2880360"/>
-            <a:ext cx="5432908" cy="1554480"/>
+            <a:off x="8092440" y="2788920"/>
+            <a:ext cx="3550615" cy="3429000"/>
           </a:xfrm>
           <a:prstGeom prst="roundRect">
             <a:avLst>
-              <a:gd name="adj" fmla="val 4706"/>
+              <a:gd name="adj" fmla="val 2133"/>
             </a:avLst>
           </a:prstGeom>
           <a:solidFill>
@@ -10562,61 +10571,14 @@
       </p:sp>
       <p:sp>
         <p:nvSpPr>
-          <p:cNvPr id="5" name="Text 3"/>
-          <p:cNvSpPr txBox="1"/>
-          <p:nvPr/>
-        </p:nvSpPr>
-        <p:spPr>
-          <a:xfrm>
-            <a:off x="731520" y="3438144"/>
-            <a:ext cx="438912" cy="438912"/>
-          </a:xfrm>
-          <a:prstGeom prst="roundRect">
-            <a:avLst>
-              <a:gd name="adj" fmla="val 16667"/>
-            </a:avLst>
-          </a:prstGeom>
-          <a:solidFill>
-            <a:srgbClr val="2E4A62"/>
-          </a:solidFill>
-          <a:ln>
-            <a:solidFill>
-              <a:srgbClr val="2E4A62"/>
-            </a:solidFill>
-          </a:ln>
-        </p:spPr>
-        <p:txBody>
-          <a:bodyPr wrap="square" lIns="0" tIns="0" rIns="0" bIns="0" rtlCol="0" anchor="ctr"/>
-          <a:lstStyle/>
-          <a:p>
-            <a:pPr algn="ctr" indent="0" marL="0">
-              <a:buNone/>
-            </a:pPr>
-            <a:r>
-              <a:rPr lang="en-US" sz="1600" b="1" dirty="0">
-                <a:solidFill>
-                  <a:srgbClr val="FFFFFF"/>
-                </a:solidFill>
-                <a:latin typeface="Calibri" pitchFamily="34" charset="0"/>
-                <a:ea typeface="Calibri" pitchFamily="34" charset="-122"/>
-                <a:cs typeface="Calibri" pitchFamily="34" charset="-120"/>
-              </a:rPr>
-              <a:t>A</a:t>
-            </a:r>
-            <a:endParaRPr lang="en-US" sz="1600" dirty="0"/>
-          </a:p>
-        </p:txBody>
-      </p:sp>
-      <p:sp>
-        <p:nvSpPr>
-          <p:cNvPr id="6" name="Text 4"/>
-          <p:cNvSpPr txBox="1"/>
-          <p:nvPr/>
-        </p:nvSpPr>
-        <p:spPr>
-          <a:xfrm>
-            <a:off x="1371600" y="2971800"/>
-            <a:ext cx="4427068" cy="1371600"/>
+          <p:cNvPr id="13" name="Text 11"/>
+          <p:cNvSpPr txBox="1"/>
+          <p:nvPr/>
+        </p:nvSpPr>
+        <p:spPr>
+          <a:xfrm>
+            <a:off x="8321040" y="2880360"/>
+            <a:ext cx="3093415" cy="310896"/>
           </a:xfrm>
           <a:prstGeom prst="rect">
             <a:avLst/>
@@ -10625,111 +10587,37 @@
           <a:ln/>
         </p:spPr>
         <p:txBody>
-          <a:bodyPr wrap="square" lIns="0" tIns="0" rIns="0" bIns="0" rtlCol="0" anchor="ctr"/>
+          <a:bodyPr wrap="square" lIns="0" tIns="0" rIns="0" bIns="0" rtlCol="0" anchor="t"/>
           <a:lstStyle/>
           <a:p>
             <a:pPr indent="0" marL="0">
               <a:buNone/>
             </a:pPr>
             <a:r>
-              <a:rPr lang="en-US" sz="2200" dirty="0">
-                <a:solidFill>
-                  <a:srgbClr val="1B2530"/>
-                </a:solidFill>
-                <a:latin typeface="Calibri" pitchFamily="34" charset="0"/>
-                <a:ea typeface="Calibri" pitchFamily="34" charset="-122"/>
-                <a:cs typeface="Calibri" pitchFamily="34" charset="-120"/>
-              </a:rPr>
-              <a:t>x 0, y 0</a:t>
-            </a:r>
-            <a:endParaRPr lang="en-US" sz="2200" dirty="0"/>
-          </a:p>
-        </p:txBody>
-      </p:sp>
-      <p:sp>
-        <p:nvSpPr>
-          <p:cNvPr id="7" name="Shape 5"/>
-          <p:cNvSpPr/>
-          <p:nvPr/>
-        </p:nvSpPr>
-        <p:spPr>
-          <a:xfrm>
-            <a:off x="6210148" y="2880360"/>
-            <a:ext cx="5432908" cy="1554480"/>
-          </a:xfrm>
-          <a:prstGeom prst="roundRect">
-            <a:avLst>
-              <a:gd name="adj" fmla="val 4706"/>
-            </a:avLst>
-          </a:prstGeom>
-          <a:solidFill>
-            <a:srgbClr val="EEF2F4"/>
-          </a:solidFill>
-          <a:ln w="12700">
-            <a:solidFill>
-              <a:srgbClr val="EEF2F4"/>
-            </a:solidFill>
-            <a:prstDash val="solid"/>
-          </a:ln>
-        </p:spPr>
-      </p:sp>
-      <p:sp>
-        <p:nvSpPr>
-          <p:cNvPr id="8" name="Text 6"/>
-          <p:cNvSpPr txBox="1"/>
-          <p:nvPr/>
-        </p:nvSpPr>
-        <p:spPr>
-          <a:xfrm>
-            <a:off x="6393028" y="3438144"/>
-            <a:ext cx="438912" cy="438912"/>
-          </a:xfrm>
-          <a:prstGeom prst="roundRect">
-            <a:avLst>
-              <a:gd name="adj" fmla="val 16667"/>
-            </a:avLst>
-          </a:prstGeom>
-          <a:solidFill>
-            <a:srgbClr val="2E4A62"/>
-          </a:solidFill>
-          <a:ln>
-            <a:solidFill>
-              <a:srgbClr val="2E4A62"/>
-            </a:solidFill>
-          </a:ln>
-        </p:spPr>
-        <p:txBody>
-          <a:bodyPr wrap="square" lIns="0" tIns="0" rIns="0" bIns="0" rtlCol="0" anchor="ctr"/>
-          <a:lstStyle/>
-          <a:p>
-            <a:pPr algn="ctr" indent="0" marL="0">
-              <a:buNone/>
-            </a:pPr>
-            <a:r>
-              <a:rPr lang="en-US" sz="1600" b="1" dirty="0">
-                <a:solidFill>
-                  <a:srgbClr val="FFFFFF"/>
-                </a:solidFill>
-                <a:latin typeface="Calibri" pitchFamily="34" charset="0"/>
-                <a:ea typeface="Calibri" pitchFamily="34" charset="-122"/>
-                <a:cs typeface="Calibri" pitchFamily="34" charset="-120"/>
-              </a:rPr>
-              <a:t>B</a:t>
-            </a:r>
-            <a:endParaRPr lang="en-US" sz="1600" dirty="0"/>
-          </a:p>
-        </p:txBody>
-      </p:sp>
-      <p:sp>
-        <p:nvSpPr>
-          <p:cNvPr id="9" name="Text 7"/>
-          <p:cNvSpPr txBox="1"/>
-          <p:nvPr/>
-        </p:nvSpPr>
-        <p:spPr>
-          <a:xfrm>
-            <a:off x="7033108" y="2971800"/>
-            <a:ext cx="4427068" cy="1371600"/>
+              <a:rPr lang="en-US" sz="1400" b="1" dirty="0">
+                <a:solidFill>
+                  <a:srgbClr val="2F7D4F"/>
+                </a:solidFill>
+                <a:latin typeface="Calibri" pitchFamily="34" charset="0"/>
+                <a:ea typeface="Calibri" pitchFamily="34" charset="-122"/>
+                <a:cs typeface="Calibri" pitchFamily="34" charset="-120"/>
+              </a:rPr>
+              <a:t>You should see</a:t>
+            </a:r>
+            <a:endParaRPr lang="en-US" sz="1400" dirty="0"/>
+          </a:p>
+        </p:txBody>
+      </p:sp>
+      <p:sp>
+        <p:nvSpPr>
+          <p:cNvPr id="14" name="Text 12"/>
+          <p:cNvSpPr txBox="1"/>
+          <p:nvPr/>
+        </p:nvSpPr>
+        <p:spPr>
+          <a:xfrm>
+            <a:off x="8321040" y="3246120"/>
+            <a:ext cx="3093415" cy="2862072"/>
           </a:xfrm>
           <a:prstGeom prst="rect">
             <a:avLst/>
@@ -10738,7 +10626,7 @@
           <a:ln/>
         </p:spPr>
         <p:txBody>
-          <a:bodyPr wrap="square" lIns="0" tIns="0" rIns="0" bIns="0" rtlCol="0" anchor="ctr"/>
+          <a:bodyPr wrap="square" lIns="0" tIns="0" rIns="0" bIns="0" rtlCol="0" anchor="t"/>
           <a:lstStyle/>
           <a:p>
             <a:pPr indent="0" marL="0">
@@ -10753,233 +10641,7 @@
                 <a:ea typeface="Calibri" pitchFamily="34" charset="-122"/>
                 <a:cs typeface="Calibri" pitchFamily="34" charset="-120"/>
               </a:rPr>
-              <a:t>x 304, y 0</a:t>
-            </a:r>
-            <a:endParaRPr lang="en-US" sz="2200" dirty="0"/>
-          </a:p>
-        </p:txBody>
-      </p:sp>
-      <p:sp>
-        <p:nvSpPr>
-          <p:cNvPr id="10" name="Shape 8"/>
-          <p:cNvSpPr/>
-          <p:nvPr/>
-        </p:nvSpPr>
-        <p:spPr>
-          <a:xfrm>
-            <a:off x="548640" y="4663440"/>
-            <a:ext cx="5432908" cy="1554480"/>
-          </a:xfrm>
-          <a:prstGeom prst="roundRect">
-            <a:avLst>
-              <a:gd name="adj" fmla="val 4706"/>
-            </a:avLst>
-          </a:prstGeom>
-          <a:solidFill>
-            <a:srgbClr val="EEF2F4"/>
-          </a:solidFill>
-          <a:ln w="12700">
-            <a:solidFill>
-              <a:srgbClr val="EEF2F4"/>
-            </a:solidFill>
-            <a:prstDash val="solid"/>
-          </a:ln>
-        </p:spPr>
-      </p:sp>
-      <p:sp>
-        <p:nvSpPr>
-          <p:cNvPr id="11" name="Text 9"/>
-          <p:cNvSpPr txBox="1"/>
-          <p:nvPr/>
-        </p:nvSpPr>
-        <p:spPr>
-          <a:xfrm>
-            <a:off x="731520" y="5221224"/>
-            <a:ext cx="438912" cy="438912"/>
-          </a:xfrm>
-          <a:prstGeom prst="roundRect">
-            <a:avLst>
-              <a:gd name="adj" fmla="val 16667"/>
-            </a:avLst>
-          </a:prstGeom>
-          <a:solidFill>
-            <a:srgbClr val="2E4A62"/>
-          </a:solidFill>
-          <a:ln>
-            <a:solidFill>
-              <a:srgbClr val="2E4A62"/>
-            </a:solidFill>
-          </a:ln>
-        </p:spPr>
-        <p:txBody>
-          <a:bodyPr wrap="square" lIns="0" tIns="0" rIns="0" bIns="0" rtlCol="0" anchor="ctr"/>
-          <a:lstStyle/>
-          <a:p>
-            <a:pPr algn="ctr" indent="0" marL="0">
-              <a:buNone/>
-            </a:pPr>
-            <a:r>
-              <a:rPr lang="en-US" sz="1600" b="1" dirty="0">
-                <a:solidFill>
-                  <a:srgbClr val="FFFFFF"/>
-                </a:solidFill>
-                <a:latin typeface="Calibri" pitchFamily="34" charset="0"/>
-                <a:ea typeface="Calibri" pitchFamily="34" charset="-122"/>
-                <a:cs typeface="Calibri" pitchFamily="34" charset="-120"/>
-              </a:rPr>
-              <a:t>C</a:t>
-            </a:r>
-            <a:endParaRPr lang="en-US" sz="1600" dirty="0"/>
-          </a:p>
-        </p:txBody>
-      </p:sp>
-      <p:sp>
-        <p:nvSpPr>
-          <p:cNvPr id="12" name="Text 10"/>
-          <p:cNvSpPr txBox="1"/>
-          <p:nvPr/>
-        </p:nvSpPr>
-        <p:spPr>
-          <a:xfrm>
-            <a:off x="1371600" y="4754880"/>
-            <a:ext cx="4427068" cy="1371600"/>
-          </a:xfrm>
-          <a:prstGeom prst="rect">
-            <a:avLst/>
-          </a:prstGeom>
-          <a:noFill/>
-          <a:ln/>
-        </p:spPr>
-        <p:txBody>
-          <a:bodyPr wrap="square" lIns="0" tIns="0" rIns="0" bIns="0" rtlCol="0" anchor="ctr"/>
-          <a:lstStyle/>
-          <a:p>
-            <a:pPr indent="0" marL="0">
-              <a:buNone/>
-            </a:pPr>
-            <a:r>
-              <a:rPr lang="en-US" sz="2200" dirty="0">
-                <a:solidFill>
-                  <a:srgbClr val="1B2530"/>
-                </a:solidFill>
-                <a:latin typeface="Calibri" pitchFamily="34" charset="0"/>
-                <a:ea typeface="Calibri" pitchFamily="34" charset="-122"/>
-                <a:cs typeface="Calibri" pitchFamily="34" charset="-120"/>
-              </a:rPr>
-              <a:t>x 0, y 184</a:t>
-            </a:r>
-            <a:endParaRPr lang="en-US" sz="2200" dirty="0"/>
-          </a:p>
-        </p:txBody>
-      </p:sp>
-      <p:sp>
-        <p:nvSpPr>
-          <p:cNvPr id="13" name="Shape 11"/>
-          <p:cNvSpPr/>
-          <p:nvPr/>
-        </p:nvSpPr>
-        <p:spPr>
-          <a:xfrm>
-            <a:off x="6210148" y="4663440"/>
-            <a:ext cx="5432908" cy="1554480"/>
-          </a:xfrm>
-          <a:prstGeom prst="roundRect">
-            <a:avLst>
-              <a:gd name="adj" fmla="val 4706"/>
-            </a:avLst>
-          </a:prstGeom>
-          <a:solidFill>
-            <a:srgbClr val="EEF2F4"/>
-          </a:solidFill>
-          <a:ln w="12700">
-            <a:solidFill>
-              <a:srgbClr val="EEF2F4"/>
-            </a:solidFill>
-            <a:prstDash val="solid"/>
-          </a:ln>
-        </p:spPr>
-      </p:sp>
-      <p:sp>
-        <p:nvSpPr>
-          <p:cNvPr id="14" name="Text 12"/>
-          <p:cNvSpPr txBox="1"/>
-          <p:nvPr/>
-        </p:nvSpPr>
-        <p:spPr>
-          <a:xfrm>
-            <a:off x="6393028" y="5221224"/>
-            <a:ext cx="438912" cy="438912"/>
-          </a:xfrm>
-          <a:prstGeom prst="roundRect">
-            <a:avLst>
-              <a:gd name="adj" fmla="val 16667"/>
-            </a:avLst>
-          </a:prstGeom>
-          <a:solidFill>
-            <a:srgbClr val="2E4A62"/>
-          </a:solidFill>
-          <a:ln>
-            <a:solidFill>
-              <a:srgbClr val="2E4A62"/>
-            </a:solidFill>
-          </a:ln>
-        </p:spPr>
-        <p:txBody>
-          <a:bodyPr wrap="square" lIns="0" tIns="0" rIns="0" bIns="0" rtlCol="0" anchor="ctr"/>
-          <a:lstStyle/>
-          <a:p>
-            <a:pPr algn="ctr" indent="0" marL="0">
-              <a:buNone/>
-            </a:pPr>
-            <a:r>
-              <a:rPr lang="en-US" sz="1600" b="1" dirty="0">
-                <a:solidFill>
-                  <a:srgbClr val="FFFFFF"/>
-                </a:solidFill>
-                <a:latin typeface="Calibri" pitchFamily="34" charset="0"/>
-                <a:ea typeface="Calibri" pitchFamily="34" charset="-122"/>
-                <a:cs typeface="Calibri" pitchFamily="34" charset="-120"/>
-              </a:rPr>
-              <a:t>D</a:t>
-            </a:r>
-            <a:endParaRPr lang="en-US" sz="1600" dirty="0"/>
-          </a:p>
-        </p:txBody>
-      </p:sp>
-      <p:sp>
-        <p:nvSpPr>
-          <p:cNvPr id="15" name="Text 13"/>
-          <p:cNvSpPr txBox="1"/>
-          <p:nvPr/>
-        </p:nvSpPr>
-        <p:spPr>
-          <a:xfrm>
-            <a:off x="7033108" y="4754880"/>
-            <a:ext cx="4427068" cy="1371600"/>
-          </a:xfrm>
-          <a:prstGeom prst="rect">
-            <a:avLst/>
-          </a:prstGeom>
-          <a:noFill/>
-          <a:ln/>
-        </p:spPr>
-        <p:txBody>
-          <a:bodyPr wrap="square" lIns="0" tIns="0" rIns="0" bIns="0" rtlCol="0" anchor="ctr"/>
-          <a:lstStyle/>
-          <a:p>
-            <a:pPr indent="0" marL="0">
-              <a:buNone/>
-            </a:pPr>
-            <a:r>
-              <a:rPr lang="en-US" sz="2200" dirty="0">
-                <a:solidFill>
-                  <a:srgbClr val="1B2530"/>
-                </a:solidFill>
-                <a:latin typeface="Calibri" pitchFamily="34" charset="0"/>
-                <a:ea typeface="Calibri" pitchFamily="34" charset="-122"/>
-                <a:cs typeface="Calibri" pitchFamily="34" charset="-120"/>
-              </a:rPr>
-              <a:t>x 304, y 184</a:t>
+              <a:t>0 is the top. 184 is the bottom. Bigger y is lower.</a:t>
             </a:r>
             <a:endParaRPr lang="en-US" sz="2200" dirty="0"/>
           </a:p>
@@ -11093,7 +10755,7 @@
                 <a:ea typeface="Cambria" pitchFamily="34" charset="-122"/>
                 <a:cs typeface="Cambria" pitchFamily="34" charset="-120"/>
               </a:rPr>
-              <a:t>Change the shape</a:t>
+              <a:t>Quick question</a:t>
             </a:r>
             <a:endParaRPr lang="en-US" sz="3000" dirty="0"/>
           </a:p>
@@ -11107,55 +10769,8 @@
         </p:nvSpPr>
         <p:spPr>
           <a:xfrm>
-            <a:off x="548640" y="1481328"/>
-            <a:ext cx="438912" cy="438912"/>
-          </a:xfrm>
-          <a:prstGeom prst="roundRect">
-            <a:avLst>
-              <a:gd name="adj" fmla="val 16667"/>
-            </a:avLst>
-          </a:prstGeom>
-          <a:solidFill>
-            <a:srgbClr val="6B4FA0"/>
-          </a:solidFill>
-          <a:ln>
-            <a:solidFill>
-              <a:srgbClr val="6B4FA0"/>
-            </a:solidFill>
-          </a:ln>
-        </p:spPr>
-        <p:txBody>
-          <a:bodyPr wrap="square" lIns="0" tIns="0" rIns="0" bIns="0" rtlCol="0" anchor="ctr"/>
-          <a:lstStyle/>
-          <a:p>
-            <a:pPr algn="ctr" indent="0" marL="0">
-              <a:buNone/>
-            </a:pPr>
-            <a:r>
-              <a:rPr lang="en-US" sz="1600" b="1" dirty="0">
-                <a:solidFill>
-                  <a:srgbClr val="FFFFFF"/>
-                </a:solidFill>
-                <a:latin typeface="Calibri" pitchFamily="34" charset="0"/>
-                <a:ea typeface="Calibri" pitchFamily="34" charset="-122"/>
-                <a:cs typeface="Calibri" pitchFamily="34" charset="-120"/>
-              </a:rPr>
-              <a:t>1</a:t>
-            </a:r>
-            <a:endParaRPr lang="en-US" sz="1600" dirty="0"/>
-          </a:p>
-        </p:txBody>
-      </p:sp>
-      <p:sp>
-        <p:nvSpPr>
-          <p:cNvPr id="4" name="Text 2"/>
-          <p:cNvSpPr txBox="1"/>
-          <p:nvPr/>
-        </p:nvSpPr>
-        <p:spPr>
-          <a:xfrm>
-            <a:off x="1234440" y="1463040"/>
-            <a:ext cx="6446520" cy="475488"/>
+            <a:off x="548640" y="1463040"/>
+            <a:ext cx="11094415" cy="1188720"/>
           </a:xfrm>
           <a:prstGeom prst="rect">
             <a:avLst/>
@@ -11171,311 +10786,34 @@
               <a:buNone/>
             </a:pPr>
             <a:r>
-              <a:rPr lang="en-US" sz="2400" dirty="0">
+              <a:rPr lang="en-US" sz="2600" b="1" dirty="0">
                 <a:solidFill>
                   <a:srgbClr val="1B2530"/>
-                </a:solidFill>
-                <a:latin typeface="Calibri" pitchFamily="34" charset="0"/>
-                <a:ea typeface="Calibri" pitchFamily="34" charset="-122"/>
-                <a:cs typeface="Calibri" pitchFamily="34" charset="-120"/>
-              </a:rPr>
-              <a:t>Make w 64 and h 8. What shape is it?</a:t>
-            </a:r>
-            <a:endParaRPr lang="en-US" sz="2400" dirty="0"/>
-          </a:p>
-        </p:txBody>
-      </p:sp>
-      <p:sp>
-        <p:nvSpPr>
-          <p:cNvPr id="5" name="Text 3"/>
-          <p:cNvSpPr txBox="1"/>
-          <p:nvPr/>
-        </p:nvSpPr>
-        <p:spPr>
-          <a:xfrm>
-            <a:off x="548640" y="3115056"/>
-            <a:ext cx="438912" cy="438912"/>
-          </a:xfrm>
-          <a:prstGeom prst="roundRect">
-            <a:avLst>
-              <a:gd name="adj" fmla="val 16667"/>
-            </a:avLst>
-          </a:prstGeom>
-          <a:solidFill>
-            <a:srgbClr val="6B4FA0"/>
-          </a:solidFill>
-          <a:ln>
-            <a:solidFill>
-              <a:srgbClr val="6B4FA0"/>
-            </a:solidFill>
-          </a:ln>
-        </p:spPr>
-        <p:txBody>
-          <a:bodyPr wrap="square" lIns="0" tIns="0" rIns="0" bIns="0" rtlCol="0" anchor="ctr"/>
-          <a:lstStyle/>
-          <a:p>
-            <a:pPr algn="ctr" indent="0" marL="0">
-              <a:buNone/>
-            </a:pPr>
-            <a:r>
-              <a:rPr lang="en-US" sz="1600" b="1" dirty="0">
-                <a:solidFill>
-                  <a:srgbClr val="FFFFFF"/>
-                </a:solidFill>
-                <a:latin typeface="Calibri" pitchFamily="34" charset="0"/>
-                <a:ea typeface="Calibri" pitchFamily="34" charset="-122"/>
-                <a:cs typeface="Calibri" pitchFamily="34" charset="-120"/>
-              </a:rPr>
-              <a:t>2</a:t>
-            </a:r>
-            <a:endParaRPr lang="en-US" sz="1600" dirty="0"/>
-          </a:p>
-        </p:txBody>
-      </p:sp>
-      <p:sp>
-        <p:nvSpPr>
-          <p:cNvPr id="6" name="Text 4"/>
-          <p:cNvSpPr txBox="1"/>
-          <p:nvPr/>
-        </p:nvSpPr>
-        <p:spPr>
-          <a:xfrm>
-            <a:off x="1234440" y="3096768"/>
-            <a:ext cx="6446520" cy="475488"/>
-          </a:xfrm>
-          <a:prstGeom prst="rect">
-            <a:avLst/>
-          </a:prstGeom>
-          <a:noFill/>
-          <a:ln/>
-        </p:spPr>
-        <p:txBody>
-          <a:bodyPr wrap="square" lIns="0" tIns="0" rIns="0" bIns="0" rtlCol="0" anchor="ctr"/>
-          <a:lstStyle/>
-          <a:p>
-            <a:pPr indent="0" marL="0">
-              <a:buNone/>
-            </a:pPr>
-            <a:r>
-              <a:rPr lang="en-US" sz="2400" dirty="0">
-                <a:solidFill>
-                  <a:srgbClr val="1B2530"/>
-                </a:solidFill>
-                <a:latin typeface="Calibri" pitchFamily="34" charset="0"/>
-                <a:ea typeface="Calibri" pitchFamily="34" charset="-122"/>
-                <a:cs typeface="Calibri" pitchFamily="34" charset="-120"/>
-              </a:rPr>
-              <a:t>Make w 8 and h 64</a:t>
-            </a:r>
-            <a:endParaRPr lang="en-US" sz="2400" dirty="0"/>
-          </a:p>
-        </p:txBody>
-      </p:sp>
-      <p:sp>
-        <p:nvSpPr>
-          <p:cNvPr id="7" name="Text 5"/>
-          <p:cNvSpPr txBox="1"/>
-          <p:nvPr/>
-        </p:nvSpPr>
-        <p:spPr>
-          <a:xfrm>
-            <a:off x="548640" y="4748784"/>
-            <a:ext cx="438912" cy="438912"/>
-          </a:xfrm>
-          <a:prstGeom prst="roundRect">
-            <a:avLst>
-              <a:gd name="adj" fmla="val 16667"/>
-            </a:avLst>
-          </a:prstGeom>
-          <a:solidFill>
-            <a:srgbClr val="6B4FA0"/>
-          </a:solidFill>
-          <a:ln>
-            <a:solidFill>
-              <a:srgbClr val="6B4FA0"/>
-            </a:solidFill>
-          </a:ln>
-        </p:spPr>
-        <p:txBody>
-          <a:bodyPr wrap="square" lIns="0" tIns="0" rIns="0" bIns="0" rtlCol="0" anchor="ctr"/>
-          <a:lstStyle/>
-          <a:p>
-            <a:pPr algn="ctr" indent="0" marL="0">
-              <a:buNone/>
-            </a:pPr>
-            <a:r>
-              <a:rPr lang="en-US" sz="1600" b="1" dirty="0">
-                <a:solidFill>
-                  <a:srgbClr val="FFFFFF"/>
-                </a:solidFill>
-                <a:latin typeface="Calibri" pitchFamily="34" charset="0"/>
-                <a:ea typeface="Calibri" pitchFamily="34" charset="-122"/>
-                <a:cs typeface="Calibri" pitchFamily="34" charset="-120"/>
-              </a:rPr>
-              <a:t>3</a:t>
-            </a:r>
-            <a:endParaRPr lang="en-US" sz="1600" dirty="0"/>
-          </a:p>
-        </p:txBody>
-      </p:sp>
-      <p:sp>
-        <p:nvSpPr>
-          <p:cNvPr id="8" name="Text 6"/>
-          <p:cNvSpPr txBox="1"/>
-          <p:nvPr/>
-        </p:nvSpPr>
-        <p:spPr>
-          <a:xfrm>
-            <a:off x="1234440" y="4730496"/>
-            <a:ext cx="6446520" cy="475488"/>
-          </a:xfrm>
-          <a:prstGeom prst="rect">
-            <a:avLst/>
-          </a:prstGeom>
-          <a:noFill/>
-          <a:ln/>
-        </p:spPr>
-        <p:txBody>
-          <a:bodyPr wrap="square" lIns="0" tIns="0" rIns="0" bIns="0" rtlCol="0" anchor="ctr"/>
-          <a:lstStyle/>
-          <a:p>
-            <a:pPr indent="0" marL="0">
-              <a:buNone/>
-            </a:pPr>
-            <a:r>
-              <a:rPr lang="en-US" sz="2400" dirty="0">
-                <a:solidFill>
-                  <a:srgbClr val="1B2530"/>
-                </a:solidFill>
-                <a:latin typeface="Calibri" pitchFamily="34" charset="0"/>
-                <a:ea typeface="Calibri" pitchFamily="34" charset="-122"/>
-                <a:cs typeface="Calibri" pitchFamily="34" charset="-120"/>
-              </a:rPr>
-              <a:t>Try a different colour</a:t>
-            </a:r>
-            <a:endParaRPr lang="en-US" sz="2400" dirty="0"/>
-          </a:p>
-        </p:txBody>
-      </p:sp>
-      <p:sp>
-        <p:nvSpPr>
-          <p:cNvPr id="9" name="Shape 7"/>
-          <p:cNvSpPr/>
-          <p:nvPr/>
-        </p:nvSpPr>
-        <p:spPr>
-          <a:xfrm>
-            <a:off x="8092440" y="1463040"/>
-            <a:ext cx="3550615" cy="1143000"/>
-          </a:xfrm>
-          <a:prstGeom prst="roundRect">
-            <a:avLst>
-              <a:gd name="adj" fmla="val 6400"/>
-            </a:avLst>
-          </a:prstGeom>
-          <a:solidFill>
-            <a:srgbClr val="1B2530"/>
-          </a:solidFill>
-          <a:ln w="12700">
-            <a:solidFill>
-              <a:srgbClr val="1B2530"/>
-            </a:solidFill>
-            <a:prstDash val="solid"/>
-          </a:ln>
-        </p:spPr>
-      </p:sp>
-      <p:sp>
-        <p:nvSpPr>
-          <p:cNvPr id="10" name="Text 8"/>
-          <p:cNvSpPr txBox="1"/>
-          <p:nvPr/>
-        </p:nvSpPr>
-        <p:spPr>
-          <a:xfrm>
-            <a:off x="8321040" y="1600200"/>
-            <a:ext cx="3093415" cy="457200"/>
-          </a:xfrm>
-          <a:prstGeom prst="rect">
-            <a:avLst/>
-          </a:prstGeom>
-          <a:noFill/>
-          <a:ln/>
-        </p:spPr>
-        <p:txBody>
-          <a:bodyPr wrap="square" lIns="0" tIns="0" rIns="0" bIns="0" rtlCol="0" anchor="t"/>
-          <a:lstStyle/>
-          <a:p>
-            <a:pPr indent="0" marL="0">
-              <a:buNone/>
-            </a:pPr>
-            <a:r>
-              <a:rPr lang="en-US" sz="2200" b="1" dirty="0">
-                <a:solidFill>
-                  <a:srgbClr val="FFFFFF"/>
                 </a:solidFill>
                 <a:latin typeface="Cambria" pitchFamily="34" charset="0"/>
                 <a:ea typeface="Cambria" pitchFamily="34" charset="-122"/>
                 <a:cs typeface="Cambria" pitchFamily="34" charset="-120"/>
               </a:rPr>
-              <a:t>Step 8</a:t>
-            </a:r>
-            <a:endParaRPr lang="en-US" sz="2200" dirty="0"/>
-          </a:p>
-        </p:txBody>
-      </p:sp>
-      <p:sp>
-        <p:nvSpPr>
-          <p:cNvPr id="11" name="Text 9"/>
-          <p:cNvSpPr txBox="1"/>
-          <p:nvPr/>
-        </p:nvSpPr>
-        <p:spPr>
-          <a:xfrm>
-            <a:off x="8321040" y="2084832"/>
-            <a:ext cx="3093415" cy="365760"/>
-          </a:xfrm>
-          <a:prstGeom prst="rect">
-            <a:avLst/>
-          </a:prstGeom>
-          <a:noFill/>
-          <a:ln/>
-        </p:spPr>
-        <p:txBody>
-          <a:bodyPr wrap="square" lIns="0" tIns="0" rIns="0" bIns="0" rtlCol="0" anchor="t"/>
-          <a:lstStyle/>
-          <a:p>
-            <a:pPr indent="0" marL="0">
-              <a:buNone/>
-            </a:pPr>
-            <a:r>
-              <a:rPr lang="en-US" sz="1600" dirty="0">
-                <a:solidFill>
-                  <a:srgbClr val="CFE3EA"/>
-                </a:solidFill>
-                <a:latin typeface="Calibri" pitchFamily="34" charset="0"/>
-                <a:ea typeface="Calibri" pitchFamily="34" charset="-122"/>
-                <a:cs typeface="Calibri" pitchFamily="34" charset="-120"/>
-              </a:rPr>
-              <a:t>about 4 min</a:t>
-            </a:r>
-            <a:endParaRPr lang="en-US" sz="1600" dirty="0"/>
-          </a:p>
-        </p:txBody>
-      </p:sp>
-      <p:sp>
-        <p:nvSpPr>
-          <p:cNvPr id="12" name="Shape 10"/>
+              <a:t>To put the square in the top right corner we need...</a:t>
+            </a:r>
+            <a:endParaRPr lang="en-US" sz="2600" dirty="0"/>
+          </a:p>
+        </p:txBody>
+      </p:sp>
+      <p:sp>
+        <p:nvSpPr>
+          <p:cNvPr id="4" name="Shape 2"/>
           <p:cNvSpPr/>
           <p:nvPr/>
         </p:nvSpPr>
         <p:spPr>
           <a:xfrm>
-            <a:off x="8092440" y="2834640"/>
-            <a:ext cx="3550615" cy="3383280"/>
+            <a:off x="548640" y="2880360"/>
+            <a:ext cx="5432908" cy="1554480"/>
           </a:xfrm>
           <a:prstGeom prst="roundRect">
             <a:avLst>
-              <a:gd name="adj" fmla="val 2162"/>
+              <a:gd name="adj" fmla="val 4706"/>
             </a:avLst>
           </a:prstGeom>
           <a:solidFill>
@@ -11491,14 +10829,61 @@
       </p:sp>
       <p:sp>
         <p:nvSpPr>
-          <p:cNvPr id="13" name="Text 11"/>
-          <p:cNvSpPr txBox="1"/>
-          <p:nvPr/>
-        </p:nvSpPr>
-        <p:spPr>
-          <a:xfrm>
-            <a:off x="8321040" y="2971800"/>
-            <a:ext cx="3093415" cy="365760"/>
+          <p:cNvPr id="5" name="Text 3"/>
+          <p:cNvSpPr txBox="1"/>
+          <p:nvPr/>
+        </p:nvSpPr>
+        <p:spPr>
+          <a:xfrm>
+            <a:off x="731520" y="3438144"/>
+            <a:ext cx="438912" cy="438912"/>
+          </a:xfrm>
+          <a:prstGeom prst="roundRect">
+            <a:avLst>
+              <a:gd name="adj" fmla="val 16667"/>
+            </a:avLst>
+          </a:prstGeom>
+          <a:solidFill>
+            <a:srgbClr val="2E4A62"/>
+          </a:solidFill>
+          <a:ln>
+            <a:solidFill>
+              <a:srgbClr val="2E4A62"/>
+            </a:solidFill>
+          </a:ln>
+        </p:spPr>
+        <p:txBody>
+          <a:bodyPr wrap="square" lIns="0" tIns="0" rIns="0" bIns="0" rtlCol="0" anchor="ctr"/>
+          <a:lstStyle/>
+          <a:p>
+            <a:pPr algn="ctr" indent="0" marL="0">
+              <a:buNone/>
+            </a:pPr>
+            <a:r>
+              <a:rPr lang="en-US" sz="1600" b="1" dirty="0">
+                <a:solidFill>
+                  <a:srgbClr val="FFFFFF"/>
+                </a:solidFill>
+                <a:latin typeface="Calibri" pitchFamily="34" charset="0"/>
+                <a:ea typeface="Calibri" pitchFamily="34" charset="-122"/>
+                <a:cs typeface="Calibri" pitchFamily="34" charset="-120"/>
+              </a:rPr>
+              <a:t>A</a:t>
+            </a:r>
+            <a:endParaRPr lang="en-US" sz="1600" dirty="0"/>
+          </a:p>
+        </p:txBody>
+      </p:sp>
+      <p:sp>
+        <p:nvSpPr>
+          <p:cNvPr id="6" name="Text 4"/>
+          <p:cNvSpPr txBox="1"/>
+          <p:nvPr/>
+        </p:nvSpPr>
+        <p:spPr>
+          <a:xfrm>
+            <a:off x="1371600" y="2971800"/>
+            <a:ext cx="4427068" cy="1371600"/>
           </a:xfrm>
           <a:prstGeom prst="rect">
             <a:avLst/>
@@ -11507,37 +10892,111 @@
           <a:ln/>
         </p:spPr>
         <p:txBody>
-          <a:bodyPr wrap="square" lIns="0" tIns="0" rIns="0" bIns="0" rtlCol="0" anchor="t"/>
+          <a:bodyPr wrap="square" lIns="0" tIns="0" rIns="0" bIns="0" rtlCol="0" anchor="ctr"/>
           <a:lstStyle/>
           <a:p>
             <a:pPr indent="0" marL="0">
               <a:buNone/>
             </a:pPr>
             <a:r>
-              <a:rPr lang="en-US" sz="1500" b="1" dirty="0">
-                <a:solidFill>
-                  <a:srgbClr val="2F7D4F"/>
-                </a:solidFill>
-                <a:latin typeface="Calibri" pitchFamily="34" charset="0"/>
-                <a:ea typeface="Calibri" pitchFamily="34" charset="-122"/>
-                <a:cs typeface="Calibri" pitchFamily="34" charset="-120"/>
-              </a:rPr>
-              <a:t>You should see</a:t>
-            </a:r>
-            <a:endParaRPr lang="en-US" sz="1500" dirty="0"/>
-          </a:p>
-        </p:txBody>
-      </p:sp>
-      <p:sp>
-        <p:nvSpPr>
-          <p:cNvPr id="14" name="Text 12"/>
-          <p:cNvSpPr txBox="1"/>
-          <p:nvPr/>
-        </p:nvSpPr>
-        <p:spPr>
-          <a:xfrm>
-            <a:off x="8321040" y="3429000"/>
-            <a:ext cx="3093415" cy="2606040"/>
+              <a:rPr lang="en-US" sz="2200" dirty="0">
+                <a:solidFill>
+                  <a:srgbClr val="1B2530"/>
+                </a:solidFill>
+                <a:latin typeface="Calibri" pitchFamily="34" charset="0"/>
+                <a:ea typeface="Calibri" pitchFamily="34" charset="-122"/>
+                <a:cs typeface="Calibri" pitchFamily="34" charset="-120"/>
+              </a:rPr>
+              <a:t>x 0, y 0</a:t>
+            </a:r>
+            <a:endParaRPr lang="en-US" sz="2200" dirty="0"/>
+          </a:p>
+        </p:txBody>
+      </p:sp>
+      <p:sp>
+        <p:nvSpPr>
+          <p:cNvPr id="7" name="Shape 5"/>
+          <p:cNvSpPr/>
+          <p:nvPr/>
+        </p:nvSpPr>
+        <p:spPr>
+          <a:xfrm>
+            <a:off x="6210148" y="2880360"/>
+            <a:ext cx="5432908" cy="1554480"/>
+          </a:xfrm>
+          <a:prstGeom prst="roundRect">
+            <a:avLst>
+              <a:gd name="adj" fmla="val 4706"/>
+            </a:avLst>
+          </a:prstGeom>
+          <a:solidFill>
+            <a:srgbClr val="EEF2F4"/>
+          </a:solidFill>
+          <a:ln w="12700">
+            <a:solidFill>
+              <a:srgbClr val="EEF2F4"/>
+            </a:solidFill>
+            <a:prstDash val="solid"/>
+          </a:ln>
+        </p:spPr>
+      </p:sp>
+      <p:sp>
+        <p:nvSpPr>
+          <p:cNvPr id="8" name="Text 6"/>
+          <p:cNvSpPr txBox="1"/>
+          <p:nvPr/>
+        </p:nvSpPr>
+        <p:spPr>
+          <a:xfrm>
+            <a:off x="6393028" y="3438144"/>
+            <a:ext cx="438912" cy="438912"/>
+          </a:xfrm>
+          <a:prstGeom prst="roundRect">
+            <a:avLst>
+              <a:gd name="adj" fmla="val 16667"/>
+            </a:avLst>
+          </a:prstGeom>
+          <a:solidFill>
+            <a:srgbClr val="2E4A62"/>
+          </a:solidFill>
+          <a:ln>
+            <a:solidFill>
+              <a:srgbClr val="2E4A62"/>
+            </a:solidFill>
+          </a:ln>
+        </p:spPr>
+        <p:txBody>
+          <a:bodyPr wrap="square" lIns="0" tIns="0" rIns="0" bIns="0" rtlCol="0" anchor="ctr"/>
+          <a:lstStyle/>
+          <a:p>
+            <a:pPr algn="ctr" indent="0" marL="0">
+              <a:buNone/>
+            </a:pPr>
+            <a:r>
+              <a:rPr lang="en-US" sz="1600" b="1" dirty="0">
+                <a:solidFill>
+                  <a:srgbClr val="FFFFFF"/>
+                </a:solidFill>
+                <a:latin typeface="Calibri" pitchFamily="34" charset="0"/>
+                <a:ea typeface="Calibri" pitchFamily="34" charset="-122"/>
+                <a:cs typeface="Calibri" pitchFamily="34" charset="-120"/>
+              </a:rPr>
+              <a:t>B</a:t>
+            </a:r>
+            <a:endParaRPr lang="en-US" sz="1600" dirty="0"/>
+          </a:p>
+        </p:txBody>
+      </p:sp>
+      <p:sp>
+        <p:nvSpPr>
+          <p:cNvPr id="9" name="Text 7"/>
+          <p:cNvSpPr txBox="1"/>
+          <p:nvPr/>
+        </p:nvSpPr>
+        <p:spPr>
+          <a:xfrm>
+            <a:off x="7033108" y="2971800"/>
+            <a:ext cx="4427068" cy="1371600"/>
           </a:xfrm>
           <a:prstGeom prst="rect">
             <a:avLst/>
@@ -11546,7 +11005,7 @@
           <a:ln/>
         </p:spPr>
         <p:txBody>
-          <a:bodyPr wrap="square" lIns="0" tIns="0" rIns="0" bIns="0" rtlCol="0" anchor="t"/>
+          <a:bodyPr wrap="square" lIns="0" tIns="0" rIns="0" bIns="0" rtlCol="0" anchor="ctr"/>
           <a:lstStyle/>
           <a:p>
             <a:pPr indent="0" marL="0">
@@ -11561,7 +11020,233 @@
                 <a:ea typeface="Calibri" pitchFamily="34" charset="-122"/>
                 <a:cs typeface="Calibri" pitchFamily="34" charset="-120"/>
               </a:rPr>
-              <a:t>A wide flat bar, then a tall thin bar.</a:t>
+              <a:t>x 304, y 0</a:t>
+            </a:r>
+            <a:endParaRPr lang="en-US" sz="2200" dirty="0"/>
+          </a:p>
+        </p:txBody>
+      </p:sp>
+      <p:sp>
+        <p:nvSpPr>
+          <p:cNvPr id="10" name="Shape 8"/>
+          <p:cNvSpPr/>
+          <p:nvPr/>
+        </p:nvSpPr>
+        <p:spPr>
+          <a:xfrm>
+            <a:off x="548640" y="4663440"/>
+            <a:ext cx="5432908" cy="1554480"/>
+          </a:xfrm>
+          <a:prstGeom prst="roundRect">
+            <a:avLst>
+              <a:gd name="adj" fmla="val 4706"/>
+            </a:avLst>
+          </a:prstGeom>
+          <a:solidFill>
+            <a:srgbClr val="EEF2F4"/>
+          </a:solidFill>
+          <a:ln w="12700">
+            <a:solidFill>
+              <a:srgbClr val="EEF2F4"/>
+            </a:solidFill>
+            <a:prstDash val="solid"/>
+          </a:ln>
+        </p:spPr>
+      </p:sp>
+      <p:sp>
+        <p:nvSpPr>
+          <p:cNvPr id="11" name="Text 9"/>
+          <p:cNvSpPr txBox="1"/>
+          <p:nvPr/>
+        </p:nvSpPr>
+        <p:spPr>
+          <a:xfrm>
+            <a:off x="731520" y="5221224"/>
+            <a:ext cx="438912" cy="438912"/>
+          </a:xfrm>
+          <a:prstGeom prst="roundRect">
+            <a:avLst>
+              <a:gd name="adj" fmla="val 16667"/>
+            </a:avLst>
+          </a:prstGeom>
+          <a:solidFill>
+            <a:srgbClr val="2E4A62"/>
+          </a:solidFill>
+          <a:ln>
+            <a:solidFill>
+              <a:srgbClr val="2E4A62"/>
+            </a:solidFill>
+          </a:ln>
+        </p:spPr>
+        <p:txBody>
+          <a:bodyPr wrap="square" lIns="0" tIns="0" rIns="0" bIns="0" rtlCol="0" anchor="ctr"/>
+          <a:lstStyle/>
+          <a:p>
+            <a:pPr algn="ctr" indent="0" marL="0">
+              <a:buNone/>
+            </a:pPr>
+            <a:r>
+              <a:rPr lang="en-US" sz="1600" b="1" dirty="0">
+                <a:solidFill>
+                  <a:srgbClr val="FFFFFF"/>
+                </a:solidFill>
+                <a:latin typeface="Calibri" pitchFamily="34" charset="0"/>
+                <a:ea typeface="Calibri" pitchFamily="34" charset="-122"/>
+                <a:cs typeface="Calibri" pitchFamily="34" charset="-120"/>
+              </a:rPr>
+              <a:t>C</a:t>
+            </a:r>
+            <a:endParaRPr lang="en-US" sz="1600" dirty="0"/>
+          </a:p>
+        </p:txBody>
+      </p:sp>
+      <p:sp>
+        <p:nvSpPr>
+          <p:cNvPr id="12" name="Text 10"/>
+          <p:cNvSpPr txBox="1"/>
+          <p:nvPr/>
+        </p:nvSpPr>
+        <p:spPr>
+          <a:xfrm>
+            <a:off x="1371600" y="4754880"/>
+            <a:ext cx="4427068" cy="1371600"/>
+          </a:xfrm>
+          <a:prstGeom prst="rect">
+            <a:avLst/>
+          </a:prstGeom>
+          <a:noFill/>
+          <a:ln/>
+        </p:spPr>
+        <p:txBody>
+          <a:bodyPr wrap="square" lIns="0" tIns="0" rIns="0" bIns="0" rtlCol="0" anchor="ctr"/>
+          <a:lstStyle/>
+          <a:p>
+            <a:pPr indent="0" marL="0">
+              <a:buNone/>
+            </a:pPr>
+            <a:r>
+              <a:rPr lang="en-US" sz="2200" dirty="0">
+                <a:solidFill>
+                  <a:srgbClr val="1B2530"/>
+                </a:solidFill>
+                <a:latin typeface="Calibri" pitchFamily="34" charset="0"/>
+                <a:ea typeface="Calibri" pitchFamily="34" charset="-122"/>
+                <a:cs typeface="Calibri" pitchFamily="34" charset="-120"/>
+              </a:rPr>
+              <a:t>x 0, y 184</a:t>
+            </a:r>
+            <a:endParaRPr lang="en-US" sz="2200" dirty="0"/>
+          </a:p>
+        </p:txBody>
+      </p:sp>
+      <p:sp>
+        <p:nvSpPr>
+          <p:cNvPr id="13" name="Shape 11"/>
+          <p:cNvSpPr/>
+          <p:nvPr/>
+        </p:nvSpPr>
+        <p:spPr>
+          <a:xfrm>
+            <a:off x="6210148" y="4663440"/>
+            <a:ext cx="5432908" cy="1554480"/>
+          </a:xfrm>
+          <a:prstGeom prst="roundRect">
+            <a:avLst>
+              <a:gd name="adj" fmla="val 4706"/>
+            </a:avLst>
+          </a:prstGeom>
+          <a:solidFill>
+            <a:srgbClr val="EEF2F4"/>
+          </a:solidFill>
+          <a:ln w="12700">
+            <a:solidFill>
+              <a:srgbClr val="EEF2F4"/>
+            </a:solidFill>
+            <a:prstDash val="solid"/>
+          </a:ln>
+        </p:spPr>
+      </p:sp>
+      <p:sp>
+        <p:nvSpPr>
+          <p:cNvPr id="14" name="Text 12"/>
+          <p:cNvSpPr txBox="1"/>
+          <p:nvPr/>
+        </p:nvSpPr>
+        <p:spPr>
+          <a:xfrm>
+            <a:off x="6393028" y="5221224"/>
+            <a:ext cx="438912" cy="438912"/>
+          </a:xfrm>
+          <a:prstGeom prst="roundRect">
+            <a:avLst>
+              <a:gd name="adj" fmla="val 16667"/>
+            </a:avLst>
+          </a:prstGeom>
+          <a:solidFill>
+            <a:srgbClr val="2E4A62"/>
+          </a:solidFill>
+          <a:ln>
+            <a:solidFill>
+              <a:srgbClr val="2E4A62"/>
+            </a:solidFill>
+          </a:ln>
+        </p:spPr>
+        <p:txBody>
+          <a:bodyPr wrap="square" lIns="0" tIns="0" rIns="0" bIns="0" rtlCol="0" anchor="ctr"/>
+          <a:lstStyle/>
+          <a:p>
+            <a:pPr algn="ctr" indent="0" marL="0">
+              <a:buNone/>
+            </a:pPr>
+            <a:r>
+              <a:rPr lang="en-US" sz="1600" b="1" dirty="0">
+                <a:solidFill>
+                  <a:srgbClr val="FFFFFF"/>
+                </a:solidFill>
+                <a:latin typeface="Calibri" pitchFamily="34" charset="0"/>
+                <a:ea typeface="Calibri" pitchFamily="34" charset="-122"/>
+                <a:cs typeface="Calibri" pitchFamily="34" charset="-120"/>
+              </a:rPr>
+              <a:t>D</a:t>
+            </a:r>
+            <a:endParaRPr lang="en-US" sz="1600" dirty="0"/>
+          </a:p>
+        </p:txBody>
+      </p:sp>
+      <p:sp>
+        <p:nvSpPr>
+          <p:cNvPr id="15" name="Text 13"/>
+          <p:cNvSpPr txBox="1"/>
+          <p:nvPr/>
+        </p:nvSpPr>
+        <p:spPr>
+          <a:xfrm>
+            <a:off x="7033108" y="4754880"/>
+            <a:ext cx="4427068" cy="1371600"/>
+          </a:xfrm>
+          <a:prstGeom prst="rect">
+            <a:avLst/>
+          </a:prstGeom>
+          <a:noFill/>
+          <a:ln/>
+        </p:spPr>
+        <p:txBody>
+          <a:bodyPr wrap="square" lIns="0" tIns="0" rIns="0" bIns="0" rtlCol="0" anchor="ctr"/>
+          <a:lstStyle/>
+          <a:p>
+            <a:pPr indent="0" marL="0">
+              <a:buNone/>
+            </a:pPr>
+            <a:r>
+              <a:rPr lang="en-US" sz="2200" dirty="0">
+                <a:solidFill>
+                  <a:srgbClr val="1B2530"/>
+                </a:solidFill>
+                <a:latin typeface="Calibri" pitchFamily="34" charset="0"/>
+                <a:ea typeface="Calibri" pitchFamily="34" charset="-122"/>
+                <a:cs typeface="Calibri" pitchFamily="34" charset="-120"/>
+              </a:rPr>
+              <a:t>x 304, y 184</a:t>
             </a:r>
             <a:endParaRPr lang="en-US" sz="2200" dirty="0"/>
           </a:p>
@@ -11675,7 +11360,7 @@
                 <a:ea typeface="Cambria" pitchFamily="34" charset="-122"/>
                 <a:cs typeface="Cambria" pitchFamily="34" charset="-120"/>
               </a:rPr>
-              <a:t>Change the words</a:t>
+              <a:t>Change the shape</a:t>
             </a:r>
             <a:endParaRPr lang="en-US" sz="3000" dirty="0"/>
           </a:p>
@@ -11761,7 +11446,7 @@
                 <a:ea typeface="Calibri" pitchFamily="34" charset="-122"/>
                 <a:cs typeface="Calibri" pitchFamily="34" charset="-120"/>
               </a:rPr>
-              <a:t>Change HELLO PRG32 to your team name</a:t>
+              <a:t>Make w 64 and h 8. What shape is it?</a:t>
             </a:r>
             <a:endParaRPr lang="en-US" sz="2400" dirty="0"/>
           </a:p>
@@ -11847,7 +11532,7 @@
                 <a:ea typeface="Calibri" pitchFamily="34" charset="-122"/>
                 <a:cs typeface="Calibri" pitchFamily="34" charset="-120"/>
               </a:rPr>
-              <a:t>Move the text: change its x and y</a:t>
+              <a:t>Make w 8 and h 64</a:t>
             </a:r>
             <a:endParaRPr lang="en-US" sz="2400" dirty="0"/>
           </a:p>
@@ -11933,7 +11618,7 @@
                 <a:ea typeface="Calibri" pitchFamily="34" charset="-122"/>
                 <a:cs typeface="Calibri" pitchFamily="34" charset="-120"/>
               </a:rPr>
-              <a:t>Change its colour</a:t>
+              <a:t>Try a different colour</a:t>
             </a:r>
             <a:endParaRPr lang="en-US" sz="2400" dirty="0"/>
           </a:p>
@@ -11999,7 +11684,7 @@
                 <a:ea typeface="Cambria" pitchFamily="34" charset="-122"/>
                 <a:cs typeface="Cambria" pitchFamily="34" charset="-120"/>
               </a:rPr>
-              <a:t>Step 9</a:t>
+              <a:t>Step 8</a:t>
             </a:r>
             <a:endParaRPr lang="en-US" sz="2200" dirty="0"/>
           </a:p>
@@ -12052,12 +11737,12 @@
         </p:nvSpPr>
         <p:spPr>
           <a:xfrm>
-            <a:off x="8092440" y="2834640"/>
-            <a:ext cx="3550615" cy="3383280"/>
+            <a:off x="8092440" y="2788920"/>
+            <a:ext cx="3550615" cy="3429000"/>
           </a:xfrm>
           <a:prstGeom prst="roundRect">
             <a:avLst>
-              <a:gd name="adj" fmla="val 2162"/>
+              <a:gd name="adj" fmla="val 2133"/>
             </a:avLst>
           </a:prstGeom>
           <a:solidFill>
@@ -12079,8 +11764,8 @@
         </p:nvSpPr>
         <p:spPr>
           <a:xfrm>
-            <a:off x="8321040" y="2971800"/>
-            <a:ext cx="3093415" cy="365760"/>
+            <a:off x="8321040" y="2880360"/>
+            <a:ext cx="3093415" cy="310896"/>
           </a:xfrm>
           <a:prstGeom prst="rect">
             <a:avLst/>
@@ -12096,7 +11781,7 @@
               <a:buNone/>
             </a:pPr>
             <a:r>
-              <a:rPr lang="en-US" sz="1500" b="1" dirty="0">
+              <a:rPr lang="en-US" sz="1400" b="1" dirty="0">
                 <a:solidFill>
                   <a:srgbClr val="2F7D4F"/>
                 </a:solidFill>
@@ -12106,7 +11791,7 @@
               </a:rPr>
               <a:t>You should see</a:t>
             </a:r>
-            <a:endParaRPr lang="en-US" sz="1500" dirty="0"/>
+            <a:endParaRPr lang="en-US" sz="1400" dirty="0"/>
           </a:p>
         </p:txBody>
       </p:sp>
@@ -12118,8 +11803,8 @@
         </p:nvSpPr>
         <p:spPr>
           <a:xfrm>
-            <a:off x="8321040" y="3429000"/>
-            <a:ext cx="3093415" cy="2606040"/>
+            <a:off x="8321040" y="3246120"/>
+            <a:ext cx="3093415" cy="2862072"/>
           </a:xfrm>
           <a:prstGeom prst="rect">
             <a:avLst/>
@@ -12143,7 +11828,7 @@
                 <a:ea typeface="Calibri" pitchFamily="34" charset="-122"/>
                 <a:cs typeface="Calibri" pitchFamily="34" charset="-120"/>
               </a:rPr>
-              <a:t>Your own words, where you want them.</a:t>
+              <a:t>A wide flat bar, then a tall thin bar.</a:t>
             </a:r>
             <a:endParaRPr lang="en-US" sz="2200" dirty="0"/>
           </a:p>
@@ -12257,7 +11942,7 @@
                 <a:ea typeface="Cambria" pitchFamily="34" charset="-122"/>
                 <a:cs typeface="Cambria" pitchFamily="34" charset="-120"/>
               </a:rPr>
-              <a:t>Oops on purpose</a:t>
+              <a:t>Change the words</a:t>
             </a:r>
             <a:endParaRPr lang="en-US" sz="3000" dirty="0"/>
           </a:p>
@@ -12319,7 +12004,7 @@
         <p:spPr>
           <a:xfrm>
             <a:off x="1234440" y="1463040"/>
-            <a:ext cx="6446520" cy="1487424"/>
+            <a:ext cx="6446520" cy="475488"/>
           </a:xfrm>
           <a:prstGeom prst="rect">
             <a:avLst/>
@@ -12328,7 +12013,7 @@
           <a:ln/>
         </p:spPr>
         <p:txBody>
-          <a:bodyPr wrap="square" lIns="0" tIns="0" rIns="0" bIns="0" rtlCol="0" anchor="t"/>
+          <a:bodyPr wrap="square" lIns="0" tIns="0" rIns="0" bIns="0" rtlCol="0" anchor="ctr"/>
           <a:lstStyle/>
           <a:p>
             <a:pPr indent="0" marL="0">
@@ -12343,7 +12028,7 @@
                 <a:ea typeface="Calibri" pitchFamily="34" charset="-122"/>
                 <a:cs typeface="Calibri" pitchFamily="34" charset="-120"/>
               </a:rPr>
-              <a:t>Drag 'clear screen' so it is UNDER the rectangle</a:t>
+              <a:t>Change HELLO PRG32 to your team name</a:t>
             </a:r>
             <a:endParaRPr lang="en-US" sz="2400" dirty="0"/>
           </a:p>
@@ -12429,7 +12114,7 @@
                 <a:ea typeface="Calibri" pitchFamily="34" charset="-122"/>
                 <a:cs typeface="Calibri" pitchFamily="34" charset="-120"/>
               </a:rPr>
-              <a:t>Press Play. Where is the square?</a:t>
+              <a:t>Move the text: change its x and y</a:t>
             </a:r>
             <a:endParaRPr lang="en-US" sz="2400" dirty="0"/>
           </a:p>
@@ -12515,7 +12200,7 @@
                 <a:ea typeface="Calibri" pitchFamily="34" charset="-122"/>
                 <a:cs typeface="Calibri" pitchFamily="34" charset="-120"/>
               </a:rPr>
-              <a:t>Put it back on top</a:t>
+              <a:t>Change its colour</a:t>
             </a:r>
             <a:endParaRPr lang="en-US" sz="2400" dirty="0"/>
           </a:p>
@@ -12581,7 +12266,7 @@
                 <a:ea typeface="Cambria" pitchFamily="34" charset="-122"/>
                 <a:cs typeface="Cambria" pitchFamily="34" charset="-120"/>
               </a:rPr>
-              <a:t>Step 10</a:t>
+              <a:t>Step 9</a:t>
             </a:r>
             <a:endParaRPr lang="en-US" sz="2200" dirty="0"/>
           </a:p>
@@ -12620,7 +12305,7 @@
                 <a:ea typeface="Calibri" pitchFamily="34" charset="-122"/>
                 <a:cs typeface="Calibri" pitchFamily="34" charset="-120"/>
               </a:rPr>
-              <a:t>about 3 min</a:t>
+              <a:t>about 4 min</a:t>
             </a:r>
             <a:endParaRPr lang="en-US" sz="1600" dirty="0"/>
           </a:p>
@@ -12634,12 +12319,12 @@
         </p:nvSpPr>
         <p:spPr>
           <a:xfrm>
-            <a:off x="8092440" y="2834640"/>
-            <a:ext cx="3550615" cy="3383280"/>
+            <a:off x="8092440" y="2788920"/>
+            <a:ext cx="3550615" cy="3429000"/>
           </a:xfrm>
           <a:prstGeom prst="roundRect">
             <a:avLst>
-              <a:gd name="adj" fmla="val 2162"/>
+              <a:gd name="adj" fmla="val 2133"/>
             </a:avLst>
           </a:prstGeom>
           <a:solidFill>
@@ -12661,8 +12346,8 @@
         </p:nvSpPr>
         <p:spPr>
           <a:xfrm>
-            <a:off x="8321040" y="2971800"/>
-            <a:ext cx="3093415" cy="365760"/>
+            <a:off x="8321040" y="2880360"/>
+            <a:ext cx="3093415" cy="310896"/>
           </a:xfrm>
           <a:prstGeom prst="rect">
             <a:avLst/>
@@ -12678,7 +12363,7 @@
               <a:buNone/>
             </a:pPr>
             <a:r>
-              <a:rPr lang="en-US" sz="1500" b="1" dirty="0">
+              <a:rPr lang="en-US" sz="1400" b="1" dirty="0">
                 <a:solidFill>
                   <a:srgbClr val="2F7D4F"/>
                 </a:solidFill>
@@ -12688,7 +12373,7 @@
               </a:rPr>
               <a:t>You should see</a:t>
             </a:r>
-            <a:endParaRPr lang="en-US" sz="1500" dirty="0"/>
+            <a:endParaRPr lang="en-US" sz="1400" dirty="0"/>
           </a:p>
         </p:txBody>
       </p:sp>
@@ -12700,8 +12385,8 @@
         </p:nvSpPr>
         <p:spPr>
           <a:xfrm>
-            <a:off x="8321040" y="3429000"/>
-            <a:ext cx="3093415" cy="2606040"/>
+            <a:off x="8321040" y="3246120"/>
+            <a:ext cx="3093415" cy="2862072"/>
           </a:xfrm>
           <a:prstGeom prst="rect">
             <a:avLst/>
@@ -12725,7 +12410,7 @@
                 <a:ea typeface="Calibri" pitchFamily="34" charset="-122"/>
                 <a:cs typeface="Calibri" pitchFamily="34" charset="-120"/>
               </a:rPr>
-              <a:t>The square is gone! The computer drew it, then painted black over it. Order matters.</a:t>
+              <a:t>Your own words, where you want them.</a:t>
             </a:r>
             <a:endParaRPr lang="en-US" sz="2200" dirty="0"/>
           </a:p>
@@ -12806,14 +12491,16 @@
       </p:grpSpPr>
       <p:sp>
         <p:nvSpPr>
-          <p:cNvPr id="2" name="Text 0"/>
-          <p:cNvSpPr txBox="1"/>
-          <p:nvPr/>
-        </p:nvSpPr>
-        <p:spPr>
-          <a:xfrm>
-            <a:off x="548640" y="1371600"/>
-            <a:ext cx="2743200" cy="1188720"/>
+          <p:cNvPr id="2" name="Text 1"/>
+          <p:cNvSpPr/>
+          <p:nvPr>
+            <p:ph idx="101" type="title" hasCustomPrompt="1"/>
+          </p:nvPr>
+        </p:nvSpPr>
+        <p:spPr>
+          <a:xfrm>
+            <a:off x="548640" y="384048"/>
+            <a:ext cx="11094415" cy="868680"/>
           </a:xfrm>
           <a:prstGeom prst="rect">
             <a:avLst/>
@@ -12822,24 +12509,24 @@
           <a:ln/>
         </p:spPr>
         <p:txBody>
-          <a:bodyPr wrap="square" lIns="0" tIns="0" rIns="0" bIns="0" rtlCol="0" anchor="t"/>
-          <a:lstStyle/>
-          <a:p>
-            <a:pPr indent="0" marL="0">
-              <a:buNone/>
-            </a:pPr>
-            <a:r>
-              <a:rPr lang="en-US" sz="8000" b="1" dirty="0">
-                <a:solidFill>
-                  <a:srgbClr val="B9A4E3"/>
+          <a:bodyPr wrap="square" lIns="0" tIns="0" rIns="0" bIns="0" rtlCol="0" anchor="ctr"/>
+          <a:lstStyle/>
+          <a:p>
+            <a:pPr algn="l" indent="0" marL="0">
+              <a:buNone/>
+            </a:pPr>
+            <a:r>
+              <a:rPr lang="en-US" sz="3000" b="1" dirty="0">
+                <a:solidFill>
+                  <a:srgbClr val="2E4A62"/>
                 </a:solidFill>
                 <a:latin typeface="Cambria" pitchFamily="34" charset="0"/>
                 <a:ea typeface="Cambria" pitchFamily="34" charset="-122"/>
                 <a:cs typeface="Cambria" pitchFamily="34" charset="-120"/>
               </a:rPr>
-              <a:t>05</a:t>
-            </a:r>
-            <a:endParaRPr lang="en-US" sz="8000" dirty="0"/>
+              <a:t>Oops on purpose</a:t>
+            </a:r>
+            <a:endParaRPr lang="en-US" sz="3000" dirty="0"/>
           </a:p>
         </p:txBody>
       </p:sp>
@@ -12851,8 +12538,55 @@
         </p:nvSpPr>
         <p:spPr>
           <a:xfrm>
-            <a:off x="548640" y="2834640"/>
-            <a:ext cx="11094415" cy="1371600"/>
+            <a:off x="548640" y="1481328"/>
+            <a:ext cx="438912" cy="438912"/>
+          </a:xfrm>
+          <a:prstGeom prst="roundRect">
+            <a:avLst>
+              <a:gd name="adj" fmla="val 16667"/>
+            </a:avLst>
+          </a:prstGeom>
+          <a:solidFill>
+            <a:srgbClr val="6B4FA0"/>
+          </a:solidFill>
+          <a:ln>
+            <a:solidFill>
+              <a:srgbClr val="6B4FA0"/>
+            </a:solidFill>
+          </a:ln>
+        </p:spPr>
+        <p:txBody>
+          <a:bodyPr wrap="square" lIns="0" tIns="0" rIns="0" bIns="0" rtlCol="0" anchor="ctr"/>
+          <a:lstStyle/>
+          <a:p>
+            <a:pPr algn="ctr" indent="0" marL="0">
+              <a:buNone/>
+            </a:pPr>
+            <a:r>
+              <a:rPr lang="en-US" sz="1600" b="1" dirty="0">
+                <a:solidFill>
+                  <a:srgbClr val="FFFFFF"/>
+                </a:solidFill>
+                <a:latin typeface="Calibri" pitchFamily="34" charset="0"/>
+                <a:ea typeface="Calibri" pitchFamily="34" charset="-122"/>
+                <a:cs typeface="Calibri" pitchFamily="34" charset="-120"/>
+              </a:rPr>
+              <a:t>1</a:t>
+            </a:r>
+            <a:endParaRPr lang="en-US" sz="1600" dirty="0"/>
+          </a:p>
+        </p:txBody>
+      </p:sp>
+      <p:sp>
+        <p:nvSpPr>
+          <p:cNvPr id="4" name="Text 2"/>
+          <p:cNvSpPr txBox="1"/>
+          <p:nvPr/>
+        </p:nvSpPr>
+        <p:spPr>
+          <a:xfrm>
+            <a:off x="1234440" y="1463040"/>
+            <a:ext cx="6446520" cy="1487424"/>
           </a:xfrm>
           <a:prstGeom prst="rect">
             <a:avLst/>
@@ -12861,14 +12595,252 @@
           <a:ln/>
         </p:spPr>
         <p:txBody>
+          <a:bodyPr wrap="square" lIns="0" tIns="0" rIns="0" bIns="0" rtlCol="0" anchor="t"/>
+          <a:lstStyle/>
+          <a:p>
+            <a:pPr indent="0" marL="0">
+              <a:buNone/>
+            </a:pPr>
+            <a:r>
+              <a:rPr lang="en-US" sz="2400" dirty="0">
+                <a:solidFill>
+                  <a:srgbClr val="1B2530"/>
+                </a:solidFill>
+                <a:latin typeface="Calibri" pitchFamily="34" charset="0"/>
+                <a:ea typeface="Calibri" pitchFamily="34" charset="-122"/>
+                <a:cs typeface="Calibri" pitchFamily="34" charset="-120"/>
+              </a:rPr>
+              <a:t>Drag 'clear screen' so it is UNDER the rectangle</a:t>
+            </a:r>
+            <a:endParaRPr lang="en-US" sz="2400" dirty="0"/>
+          </a:p>
+        </p:txBody>
+      </p:sp>
+      <p:sp>
+        <p:nvSpPr>
+          <p:cNvPr id="5" name="Text 3"/>
+          <p:cNvSpPr txBox="1"/>
+          <p:nvPr/>
+        </p:nvSpPr>
+        <p:spPr>
+          <a:xfrm>
+            <a:off x="548640" y="3115056"/>
+            <a:ext cx="438912" cy="438912"/>
+          </a:xfrm>
+          <a:prstGeom prst="roundRect">
+            <a:avLst>
+              <a:gd name="adj" fmla="val 16667"/>
+            </a:avLst>
+          </a:prstGeom>
+          <a:solidFill>
+            <a:srgbClr val="6B4FA0"/>
+          </a:solidFill>
+          <a:ln>
+            <a:solidFill>
+              <a:srgbClr val="6B4FA0"/>
+            </a:solidFill>
+          </a:ln>
+        </p:spPr>
+        <p:txBody>
           <a:bodyPr wrap="square" lIns="0" tIns="0" rIns="0" bIns="0" rtlCol="0" anchor="ctr"/>
           <a:lstStyle/>
           <a:p>
+            <a:pPr algn="ctr" indent="0" marL="0">
+              <a:buNone/>
+            </a:pPr>
+            <a:r>
+              <a:rPr lang="en-US" sz="1600" b="1" dirty="0">
+                <a:solidFill>
+                  <a:srgbClr val="FFFFFF"/>
+                </a:solidFill>
+                <a:latin typeface="Calibri" pitchFamily="34" charset="0"/>
+                <a:ea typeface="Calibri" pitchFamily="34" charset="-122"/>
+                <a:cs typeface="Calibri" pitchFamily="34" charset="-120"/>
+              </a:rPr>
+              <a:t>2</a:t>
+            </a:r>
+            <a:endParaRPr lang="en-US" sz="1600" dirty="0"/>
+          </a:p>
+        </p:txBody>
+      </p:sp>
+      <p:sp>
+        <p:nvSpPr>
+          <p:cNvPr id="6" name="Text 4"/>
+          <p:cNvSpPr txBox="1"/>
+          <p:nvPr/>
+        </p:nvSpPr>
+        <p:spPr>
+          <a:xfrm>
+            <a:off x="1234440" y="3096768"/>
+            <a:ext cx="6446520" cy="475488"/>
+          </a:xfrm>
+          <a:prstGeom prst="rect">
+            <a:avLst/>
+          </a:prstGeom>
+          <a:noFill/>
+          <a:ln/>
+        </p:spPr>
+        <p:txBody>
+          <a:bodyPr wrap="square" lIns="0" tIns="0" rIns="0" bIns="0" rtlCol="0" anchor="ctr"/>
+          <a:lstStyle/>
+          <a:p>
             <a:pPr indent="0" marL="0">
               <a:buNone/>
             </a:pPr>
             <a:r>
-              <a:rPr lang="en-US" sz="4200" b="1" dirty="0">
+              <a:rPr lang="en-US" sz="2400" dirty="0">
+                <a:solidFill>
+                  <a:srgbClr val="1B2530"/>
+                </a:solidFill>
+                <a:latin typeface="Calibri" pitchFamily="34" charset="0"/>
+                <a:ea typeface="Calibri" pitchFamily="34" charset="-122"/>
+                <a:cs typeface="Calibri" pitchFamily="34" charset="-120"/>
+              </a:rPr>
+              <a:t>Press Play. Where is the square?</a:t>
+            </a:r>
+            <a:endParaRPr lang="en-US" sz="2400" dirty="0"/>
+          </a:p>
+        </p:txBody>
+      </p:sp>
+      <p:sp>
+        <p:nvSpPr>
+          <p:cNvPr id="7" name="Text 5"/>
+          <p:cNvSpPr txBox="1"/>
+          <p:nvPr/>
+        </p:nvSpPr>
+        <p:spPr>
+          <a:xfrm>
+            <a:off x="548640" y="4748784"/>
+            <a:ext cx="438912" cy="438912"/>
+          </a:xfrm>
+          <a:prstGeom prst="roundRect">
+            <a:avLst>
+              <a:gd name="adj" fmla="val 16667"/>
+            </a:avLst>
+          </a:prstGeom>
+          <a:solidFill>
+            <a:srgbClr val="6B4FA0"/>
+          </a:solidFill>
+          <a:ln>
+            <a:solidFill>
+              <a:srgbClr val="6B4FA0"/>
+            </a:solidFill>
+          </a:ln>
+        </p:spPr>
+        <p:txBody>
+          <a:bodyPr wrap="square" lIns="0" tIns="0" rIns="0" bIns="0" rtlCol="0" anchor="ctr"/>
+          <a:lstStyle/>
+          <a:p>
+            <a:pPr algn="ctr" indent="0" marL="0">
+              <a:buNone/>
+            </a:pPr>
+            <a:r>
+              <a:rPr lang="en-US" sz="1600" b="1" dirty="0">
+                <a:solidFill>
+                  <a:srgbClr val="FFFFFF"/>
+                </a:solidFill>
+                <a:latin typeface="Calibri" pitchFamily="34" charset="0"/>
+                <a:ea typeface="Calibri" pitchFamily="34" charset="-122"/>
+                <a:cs typeface="Calibri" pitchFamily="34" charset="-120"/>
+              </a:rPr>
+              <a:t>3</a:t>
+            </a:r>
+            <a:endParaRPr lang="en-US" sz="1600" dirty="0"/>
+          </a:p>
+        </p:txBody>
+      </p:sp>
+      <p:sp>
+        <p:nvSpPr>
+          <p:cNvPr id="8" name="Text 6"/>
+          <p:cNvSpPr txBox="1"/>
+          <p:nvPr/>
+        </p:nvSpPr>
+        <p:spPr>
+          <a:xfrm>
+            <a:off x="1234440" y="4730496"/>
+            <a:ext cx="6446520" cy="475488"/>
+          </a:xfrm>
+          <a:prstGeom prst="rect">
+            <a:avLst/>
+          </a:prstGeom>
+          <a:noFill/>
+          <a:ln/>
+        </p:spPr>
+        <p:txBody>
+          <a:bodyPr wrap="square" lIns="0" tIns="0" rIns="0" bIns="0" rtlCol="0" anchor="ctr"/>
+          <a:lstStyle/>
+          <a:p>
+            <a:pPr indent="0" marL="0">
+              <a:buNone/>
+            </a:pPr>
+            <a:r>
+              <a:rPr lang="en-US" sz="2400" dirty="0">
+                <a:solidFill>
+                  <a:srgbClr val="1B2530"/>
+                </a:solidFill>
+                <a:latin typeface="Calibri" pitchFamily="34" charset="0"/>
+                <a:ea typeface="Calibri" pitchFamily="34" charset="-122"/>
+                <a:cs typeface="Calibri" pitchFamily="34" charset="-120"/>
+              </a:rPr>
+              <a:t>Put it back on top</a:t>
+            </a:r>
+            <a:endParaRPr lang="en-US" sz="2400" dirty="0"/>
+          </a:p>
+        </p:txBody>
+      </p:sp>
+      <p:sp>
+        <p:nvSpPr>
+          <p:cNvPr id="9" name="Shape 7"/>
+          <p:cNvSpPr/>
+          <p:nvPr/>
+        </p:nvSpPr>
+        <p:spPr>
+          <a:xfrm>
+            <a:off x="8092440" y="1463040"/>
+            <a:ext cx="3550615" cy="1143000"/>
+          </a:xfrm>
+          <a:prstGeom prst="roundRect">
+            <a:avLst>
+              <a:gd name="adj" fmla="val 6400"/>
+            </a:avLst>
+          </a:prstGeom>
+          <a:solidFill>
+            <a:srgbClr val="1B2530"/>
+          </a:solidFill>
+          <a:ln w="12700">
+            <a:solidFill>
+              <a:srgbClr val="1B2530"/>
+            </a:solidFill>
+            <a:prstDash val="solid"/>
+          </a:ln>
+        </p:spPr>
+      </p:sp>
+      <p:sp>
+        <p:nvSpPr>
+          <p:cNvPr id="10" name="Text 8"/>
+          <p:cNvSpPr txBox="1"/>
+          <p:nvPr/>
+        </p:nvSpPr>
+        <p:spPr>
+          <a:xfrm>
+            <a:off x="8321040" y="1600200"/>
+            <a:ext cx="3093415" cy="457200"/>
+          </a:xfrm>
+          <a:prstGeom prst="rect">
+            <a:avLst/>
+          </a:prstGeom>
+          <a:noFill/>
+          <a:ln/>
+        </p:spPr>
+        <p:txBody>
+          <a:bodyPr wrap="square" lIns="0" tIns="0" rIns="0" bIns="0" rtlCol="0" anchor="t"/>
+          <a:lstStyle/>
+          <a:p>
+            <a:pPr indent="0" marL="0">
+              <a:buNone/>
+            </a:pPr>
+            <a:r>
+              <a:rPr lang="en-US" sz="2200" b="1" dirty="0">
                 <a:solidFill>
                   <a:srgbClr val="FFFFFF"/>
                 </a:solidFill>
@@ -12876,22 +12848,22 @@
                 <a:ea typeface="Cambria" pitchFamily="34" charset="-122"/>
                 <a:cs typeface="Cambria" pitchFamily="34" charset="-120"/>
               </a:rPr>
-              <a:t>Challenge</a:t>
-            </a:r>
-            <a:endParaRPr lang="en-US" sz="4200" dirty="0"/>
-          </a:p>
-        </p:txBody>
-      </p:sp>
-      <p:sp>
-        <p:nvSpPr>
-          <p:cNvPr id="4" name="Text 2"/>
-          <p:cNvSpPr txBox="1"/>
-          <p:nvPr/>
-        </p:nvSpPr>
-        <p:spPr>
-          <a:xfrm>
-            <a:off x="548640" y="4389120"/>
-            <a:ext cx="11094415" cy="1097280"/>
+              <a:t>Step 10</a:t>
+            </a:r>
+            <a:endParaRPr lang="en-US" sz="2200" dirty="0"/>
+          </a:p>
+        </p:txBody>
+      </p:sp>
+      <p:sp>
+        <p:nvSpPr>
+          <p:cNvPr id="11" name="Text 9"/>
+          <p:cNvSpPr txBox="1"/>
+          <p:nvPr/>
+        </p:nvSpPr>
+        <p:spPr>
+          <a:xfrm>
+            <a:off x="8321040" y="2084832"/>
+            <a:ext cx="3093415" cy="365760"/>
           </a:xfrm>
           <a:prstGeom prst="rect">
             <a:avLst/>
@@ -12907,15 +12879,120 @@
               <a:buNone/>
             </a:pPr>
             <a:r>
+              <a:rPr lang="en-US" sz="1600" dirty="0">
+                <a:solidFill>
+                  <a:srgbClr val="CFE3EA"/>
+                </a:solidFill>
+                <a:latin typeface="Calibri" pitchFamily="34" charset="0"/>
+                <a:ea typeface="Calibri" pitchFamily="34" charset="-122"/>
+                <a:cs typeface="Calibri" pitchFamily="34" charset="-120"/>
+              </a:rPr>
+              <a:t>about 3 min</a:t>
+            </a:r>
+            <a:endParaRPr lang="en-US" sz="1600" dirty="0"/>
+          </a:p>
+        </p:txBody>
+      </p:sp>
+      <p:sp>
+        <p:nvSpPr>
+          <p:cNvPr id="12" name="Shape 10"/>
+          <p:cNvSpPr/>
+          <p:nvPr/>
+        </p:nvSpPr>
+        <p:spPr>
+          <a:xfrm>
+            <a:off x="8092440" y="2788920"/>
+            <a:ext cx="3550615" cy="3429000"/>
+          </a:xfrm>
+          <a:prstGeom prst="roundRect">
+            <a:avLst>
+              <a:gd name="adj" fmla="val 2133"/>
+            </a:avLst>
+          </a:prstGeom>
+          <a:solidFill>
+            <a:srgbClr val="EEF2F4"/>
+          </a:solidFill>
+          <a:ln w="12700">
+            <a:solidFill>
+              <a:srgbClr val="EEF2F4"/>
+            </a:solidFill>
+            <a:prstDash val="solid"/>
+          </a:ln>
+        </p:spPr>
+      </p:sp>
+      <p:sp>
+        <p:nvSpPr>
+          <p:cNvPr id="13" name="Text 11"/>
+          <p:cNvSpPr txBox="1"/>
+          <p:nvPr/>
+        </p:nvSpPr>
+        <p:spPr>
+          <a:xfrm>
+            <a:off x="8321040" y="2880360"/>
+            <a:ext cx="3093415" cy="310896"/>
+          </a:xfrm>
+          <a:prstGeom prst="rect">
+            <a:avLst/>
+          </a:prstGeom>
+          <a:noFill/>
+          <a:ln/>
+        </p:spPr>
+        <p:txBody>
+          <a:bodyPr wrap="square" lIns="0" tIns="0" rIns="0" bIns="0" rtlCol="0" anchor="t"/>
+          <a:lstStyle/>
+          <a:p>
+            <a:pPr indent="0" marL="0">
+              <a:buNone/>
+            </a:pPr>
+            <a:r>
+              <a:rPr lang="en-US" sz="1400" b="1" dirty="0">
+                <a:solidFill>
+                  <a:srgbClr val="2F7D4F"/>
+                </a:solidFill>
+                <a:latin typeface="Calibri" pitchFamily="34" charset="0"/>
+                <a:ea typeface="Calibri" pitchFamily="34" charset="-122"/>
+                <a:cs typeface="Calibri" pitchFamily="34" charset="-120"/>
+              </a:rPr>
+              <a:t>You should see</a:t>
+            </a:r>
+            <a:endParaRPr lang="en-US" sz="1400" dirty="0"/>
+          </a:p>
+        </p:txBody>
+      </p:sp>
+      <p:sp>
+        <p:nvSpPr>
+          <p:cNvPr id="14" name="Text 12"/>
+          <p:cNvSpPr txBox="1"/>
+          <p:nvPr/>
+        </p:nvSpPr>
+        <p:spPr>
+          <a:xfrm>
+            <a:off x="8321040" y="3246120"/>
+            <a:ext cx="3093415" cy="2862072"/>
+          </a:xfrm>
+          <a:prstGeom prst="rect">
+            <a:avLst/>
+          </a:prstGeom>
+          <a:noFill/>
+          <a:ln/>
+        </p:spPr>
+        <p:txBody>
+          <a:bodyPr wrap="square" lIns="0" tIns="0" rIns="0" bIns="0" rtlCol="0" anchor="t"/>
+          <a:lstStyle/>
+          <a:p>
+            <a:pPr indent="0" marL="0">
+              <a:buNone/>
+            </a:pPr>
+            <a:r>
               <a:rPr lang="en-US" sz="2200" dirty="0">
                 <a:solidFill>
-                  <a:srgbClr val="CFE3EA"/>
-                </a:solidFill>
-                <a:latin typeface="Calibri" pitchFamily="34" charset="0"/>
-                <a:ea typeface="Calibri" pitchFamily="34" charset="-122"/>
-                <a:cs typeface="Calibri" pitchFamily="34" charset="-120"/>
-              </a:rPr>
-              <a:t>Build a picture</a:t>
+                  <a:srgbClr val="1B2530"/>
+                </a:solidFill>
+                <a:latin typeface="Calibri" pitchFamily="34" charset="0"/>
+                <a:ea typeface="Calibri" pitchFamily="34" charset="-122"/>
+                <a:cs typeface="Calibri" pitchFamily="34" charset="-120"/>
+              </a:rPr>
+              <a:t>The square is gone! The computer drew it, then painted black over it. Order matters.</a:t>
             </a:r>
             <a:endParaRPr lang="en-US" sz="2200" dirty="0"/>
           </a:p>
@@ -12951,7 +13028,7 @@
             <a:lvl1pPr>
               <a:defRPr sz="1000">
                 <a:solidFill>
-                  <a:srgbClr val="CFE3EA"/>
+                  <a:srgbClr val="5B6B78"/>
                 </a:solidFill>
                 <a:latin typeface="Calibri"/>
                 <a:ea typeface="Calibri"/>
@@ -12996,16 +13073,14 @@
       </p:grpSpPr>
       <p:sp>
         <p:nvSpPr>
-          <p:cNvPr id="2" name="Text 1"/>
-          <p:cNvSpPr/>
-          <p:nvPr>
-            <p:ph idx="101" type="title" hasCustomPrompt="1"/>
-          </p:nvPr>
-        </p:nvSpPr>
-        <p:spPr>
-          <a:xfrm>
-            <a:off x="548640" y="384048"/>
-            <a:ext cx="11094415" cy="868680"/>
+          <p:cNvPr id="2" name="Text 0"/>
+          <p:cNvSpPr txBox="1"/>
+          <p:nvPr/>
+        </p:nvSpPr>
+        <p:spPr>
+          <a:xfrm>
+            <a:off x="548640" y="1371600"/>
+            <a:ext cx="2743200" cy="1188720"/>
           </a:xfrm>
           <a:prstGeom prst="rect">
             <a:avLst/>
@@ -13014,24 +13089,24 @@
           <a:ln/>
         </p:spPr>
         <p:txBody>
-          <a:bodyPr wrap="square" lIns="0" tIns="0" rIns="0" bIns="0" rtlCol="0" anchor="ctr"/>
-          <a:lstStyle/>
-          <a:p>
-            <a:pPr algn="l" indent="0" marL="0">
-              <a:buNone/>
-            </a:pPr>
-            <a:r>
-              <a:rPr lang="en-US" sz="3000" b="1" dirty="0">
-                <a:solidFill>
-                  <a:srgbClr val="2E4A62"/>
+          <a:bodyPr wrap="square" lIns="0" tIns="0" rIns="0" bIns="0" rtlCol="0" anchor="t"/>
+          <a:lstStyle/>
+          <a:p>
+            <a:pPr indent="0" marL="0">
+              <a:buNone/>
+            </a:pPr>
+            <a:r>
+              <a:rPr lang="en-US" sz="8000" b="1" dirty="0">
+                <a:solidFill>
+                  <a:srgbClr val="B9A4E3"/>
                 </a:solidFill>
                 <a:latin typeface="Cambria" pitchFamily="34" charset="0"/>
                 <a:ea typeface="Cambria" pitchFamily="34" charset="-122"/>
                 <a:cs typeface="Cambria" pitchFamily="34" charset="-120"/>
               </a:rPr>
-              <a:t>Draw a house</a:t>
-            </a:r>
-            <a:endParaRPr lang="en-US" sz="3000" dirty="0"/>
+              <a:t>05</a:t>
+            </a:r>
+            <a:endParaRPr lang="en-US" sz="8000" dirty="0"/>
           </a:p>
         </p:txBody>
       </p:sp>
@@ -13043,55 +13118,8 @@
         </p:nvSpPr>
         <p:spPr>
           <a:xfrm>
-            <a:off x="548640" y="1481328"/>
-            <a:ext cx="438912" cy="438912"/>
-          </a:xfrm>
-          <a:prstGeom prst="roundRect">
-            <a:avLst>
-              <a:gd name="adj" fmla="val 16667"/>
-            </a:avLst>
-          </a:prstGeom>
-          <a:solidFill>
-            <a:srgbClr val="6B4FA0"/>
-          </a:solidFill>
-          <a:ln>
-            <a:solidFill>
-              <a:srgbClr val="6B4FA0"/>
-            </a:solidFill>
-          </a:ln>
-        </p:spPr>
-        <p:txBody>
-          <a:bodyPr wrap="square" lIns="0" tIns="0" rIns="0" bIns="0" rtlCol="0" anchor="ctr"/>
-          <a:lstStyle/>
-          <a:p>
-            <a:pPr algn="ctr" indent="0" marL="0">
-              <a:buNone/>
-            </a:pPr>
-            <a:r>
-              <a:rPr lang="en-US" sz="1600" b="1" dirty="0">
-                <a:solidFill>
-                  <a:srgbClr val="FFFFFF"/>
-                </a:solidFill>
-                <a:latin typeface="Calibri" pitchFamily="34" charset="0"/>
-                <a:ea typeface="Calibri" pitchFamily="34" charset="-122"/>
-                <a:cs typeface="Calibri" pitchFamily="34" charset="-120"/>
-              </a:rPr>
-              <a:t>1</a:t>
-            </a:r>
-            <a:endParaRPr lang="en-US" sz="1600" dirty="0"/>
-          </a:p>
-        </p:txBody>
-      </p:sp>
-      <p:sp>
-        <p:nvSpPr>
-          <p:cNvPr id="4" name="Text 2"/>
-          <p:cNvSpPr txBox="1"/>
-          <p:nvPr/>
-        </p:nvSpPr>
-        <p:spPr>
-          <a:xfrm>
-            <a:off x="1234440" y="1463040"/>
-            <a:ext cx="6446520" cy="475488"/>
+            <a:off x="548640" y="2834640"/>
+            <a:ext cx="11094415" cy="1371600"/>
           </a:xfrm>
           <a:prstGeom prst="rect">
             <a:avLst/>
@@ -13107,331 +13135,7 @@
               <a:buNone/>
             </a:pPr>
             <a:r>
-              <a:rPr lang="en-US" sz="2400" dirty="0">
-                <a:solidFill>
-                  <a:srgbClr val="1B2530"/>
-                </a:solidFill>
-                <a:latin typeface="Calibri" pitchFamily="34" charset="0"/>
-                <a:ea typeface="Calibri" pitchFamily="34" charset="-122"/>
-                <a:cs typeface="Calibri" pitchFamily="34" charset="-120"/>
-              </a:rPr>
-              <a:t>Add more 'draw rectangle' blocks</a:t>
-            </a:r>
-            <a:endParaRPr lang="en-US" sz="2400" dirty="0"/>
-          </a:p>
-        </p:txBody>
-      </p:sp>
-      <p:sp>
-        <p:nvSpPr>
-          <p:cNvPr id="5" name="Text 3"/>
-          <p:cNvSpPr txBox="1"/>
-          <p:nvPr/>
-        </p:nvSpPr>
-        <p:spPr>
-          <a:xfrm>
-            <a:off x="548640" y="2706624"/>
-            <a:ext cx="438912" cy="438912"/>
-          </a:xfrm>
-          <a:prstGeom prst="roundRect">
-            <a:avLst>
-              <a:gd name="adj" fmla="val 16667"/>
-            </a:avLst>
-          </a:prstGeom>
-          <a:solidFill>
-            <a:srgbClr val="6B4FA0"/>
-          </a:solidFill>
-          <a:ln>
-            <a:solidFill>
-              <a:srgbClr val="6B4FA0"/>
-            </a:solidFill>
-          </a:ln>
-        </p:spPr>
-        <p:txBody>
-          <a:bodyPr wrap="square" lIns="0" tIns="0" rIns="0" bIns="0" rtlCol="0" anchor="ctr"/>
-          <a:lstStyle/>
-          <a:p>
-            <a:pPr algn="ctr" indent="0" marL="0">
-              <a:buNone/>
-            </a:pPr>
-            <a:r>
-              <a:rPr lang="en-US" sz="1600" b="1" dirty="0">
-                <a:solidFill>
-                  <a:srgbClr val="FFFFFF"/>
-                </a:solidFill>
-                <a:latin typeface="Calibri" pitchFamily="34" charset="0"/>
-                <a:ea typeface="Calibri" pitchFamily="34" charset="-122"/>
-                <a:cs typeface="Calibri" pitchFamily="34" charset="-120"/>
-              </a:rPr>
-              <a:t>2</a:t>
-            </a:r>
-            <a:endParaRPr lang="en-US" sz="1600" dirty="0"/>
-          </a:p>
-        </p:txBody>
-      </p:sp>
-      <p:sp>
-        <p:nvSpPr>
-          <p:cNvPr id="6" name="Text 4"/>
-          <p:cNvSpPr txBox="1"/>
-          <p:nvPr/>
-        </p:nvSpPr>
-        <p:spPr>
-          <a:xfrm>
-            <a:off x="1234440" y="2688336"/>
-            <a:ext cx="6446520" cy="475488"/>
-          </a:xfrm>
-          <a:prstGeom prst="rect">
-            <a:avLst/>
-          </a:prstGeom>
-          <a:noFill/>
-          <a:ln/>
-        </p:spPr>
-        <p:txBody>
-          <a:bodyPr wrap="square" lIns="0" tIns="0" rIns="0" bIns="0" rtlCol="0" anchor="ctr"/>
-          <a:lstStyle/>
-          <a:p>
-            <a:pPr indent="0" marL="0">
-              <a:buNone/>
-            </a:pPr>
-            <a:r>
-              <a:rPr lang="en-US" sz="2400" dirty="0">
-                <a:solidFill>
-                  <a:srgbClr val="1B2530"/>
-                </a:solidFill>
-                <a:latin typeface="Calibri" pitchFamily="34" charset="0"/>
-                <a:ea typeface="Calibri" pitchFamily="34" charset="-122"/>
-                <a:cs typeface="Calibri" pitchFamily="34" charset="-120"/>
-              </a:rPr>
-              <a:t>A big square for the walls</a:t>
-            </a:r>
-            <a:endParaRPr lang="en-US" sz="2400" dirty="0"/>
-          </a:p>
-        </p:txBody>
-      </p:sp>
-      <p:sp>
-        <p:nvSpPr>
-          <p:cNvPr id="7" name="Text 5"/>
-          <p:cNvSpPr txBox="1"/>
-          <p:nvPr/>
-        </p:nvSpPr>
-        <p:spPr>
-          <a:xfrm>
-            <a:off x="548640" y="3931920"/>
-            <a:ext cx="438912" cy="438912"/>
-          </a:xfrm>
-          <a:prstGeom prst="roundRect">
-            <a:avLst>
-              <a:gd name="adj" fmla="val 16667"/>
-            </a:avLst>
-          </a:prstGeom>
-          <a:solidFill>
-            <a:srgbClr val="6B4FA0"/>
-          </a:solidFill>
-          <a:ln>
-            <a:solidFill>
-              <a:srgbClr val="6B4FA0"/>
-            </a:solidFill>
-          </a:ln>
-        </p:spPr>
-        <p:txBody>
-          <a:bodyPr wrap="square" lIns="0" tIns="0" rIns="0" bIns="0" rtlCol="0" anchor="ctr"/>
-          <a:lstStyle/>
-          <a:p>
-            <a:pPr algn="ctr" indent="0" marL="0">
-              <a:buNone/>
-            </a:pPr>
-            <a:r>
-              <a:rPr lang="en-US" sz="1600" b="1" dirty="0">
-                <a:solidFill>
-                  <a:srgbClr val="FFFFFF"/>
-                </a:solidFill>
-                <a:latin typeface="Calibri" pitchFamily="34" charset="0"/>
-                <a:ea typeface="Calibri" pitchFamily="34" charset="-122"/>
-                <a:cs typeface="Calibri" pitchFamily="34" charset="-120"/>
-              </a:rPr>
-              <a:t>3</a:t>
-            </a:r>
-            <a:endParaRPr lang="en-US" sz="1600" dirty="0"/>
-          </a:p>
-        </p:txBody>
-      </p:sp>
-      <p:sp>
-        <p:nvSpPr>
-          <p:cNvPr id="8" name="Text 6"/>
-          <p:cNvSpPr txBox="1"/>
-          <p:nvPr/>
-        </p:nvSpPr>
-        <p:spPr>
-          <a:xfrm>
-            <a:off x="1234440" y="3913632"/>
-            <a:ext cx="6446520" cy="475488"/>
-          </a:xfrm>
-          <a:prstGeom prst="rect">
-            <a:avLst/>
-          </a:prstGeom>
-          <a:noFill/>
-          <a:ln/>
-        </p:spPr>
-        <p:txBody>
-          <a:bodyPr wrap="square" lIns="0" tIns="0" rIns="0" bIns="0" rtlCol="0" anchor="ctr"/>
-          <a:lstStyle/>
-          <a:p>
-            <a:pPr indent="0" marL="0">
-              <a:buNone/>
-            </a:pPr>
-            <a:r>
-              <a:rPr lang="en-US" sz="2400" dirty="0">
-                <a:solidFill>
-                  <a:srgbClr val="1B2530"/>
-                </a:solidFill>
-                <a:latin typeface="Calibri" pitchFamily="34" charset="0"/>
-                <a:ea typeface="Calibri" pitchFamily="34" charset="-122"/>
-                <a:cs typeface="Calibri" pitchFamily="34" charset="-120"/>
-              </a:rPr>
-              <a:t>A small one for the door</a:t>
-            </a:r>
-            <a:endParaRPr lang="en-US" sz="2400" dirty="0"/>
-          </a:p>
-        </p:txBody>
-      </p:sp>
-      <p:sp>
-        <p:nvSpPr>
-          <p:cNvPr id="9" name="Text 7"/>
-          <p:cNvSpPr txBox="1"/>
-          <p:nvPr/>
-        </p:nvSpPr>
-        <p:spPr>
-          <a:xfrm>
-            <a:off x="548640" y="5157216"/>
-            <a:ext cx="438912" cy="438912"/>
-          </a:xfrm>
-          <a:prstGeom prst="roundRect">
-            <a:avLst>
-              <a:gd name="adj" fmla="val 16667"/>
-            </a:avLst>
-          </a:prstGeom>
-          <a:solidFill>
-            <a:srgbClr val="6B4FA0"/>
-          </a:solidFill>
-          <a:ln>
-            <a:solidFill>
-              <a:srgbClr val="6B4FA0"/>
-            </a:solidFill>
-          </a:ln>
-        </p:spPr>
-        <p:txBody>
-          <a:bodyPr wrap="square" lIns="0" tIns="0" rIns="0" bIns="0" rtlCol="0" anchor="ctr"/>
-          <a:lstStyle/>
-          <a:p>
-            <a:pPr algn="ctr" indent="0" marL="0">
-              <a:buNone/>
-            </a:pPr>
-            <a:r>
-              <a:rPr lang="en-US" sz="1600" b="1" dirty="0">
-                <a:solidFill>
-                  <a:srgbClr val="FFFFFF"/>
-                </a:solidFill>
-                <a:latin typeface="Calibri" pitchFamily="34" charset="0"/>
-                <a:ea typeface="Calibri" pitchFamily="34" charset="-122"/>
-                <a:cs typeface="Calibri" pitchFamily="34" charset="-120"/>
-              </a:rPr>
-              <a:t>4</a:t>
-            </a:r>
-            <a:endParaRPr lang="en-US" sz="1600" dirty="0"/>
-          </a:p>
-        </p:txBody>
-      </p:sp>
-      <p:sp>
-        <p:nvSpPr>
-          <p:cNvPr id="10" name="Text 8"/>
-          <p:cNvSpPr txBox="1"/>
-          <p:nvPr/>
-        </p:nvSpPr>
-        <p:spPr>
-          <a:xfrm>
-            <a:off x="1234440" y="5138928"/>
-            <a:ext cx="6446520" cy="475488"/>
-          </a:xfrm>
-          <a:prstGeom prst="rect">
-            <a:avLst/>
-          </a:prstGeom>
-          <a:noFill/>
-          <a:ln/>
-        </p:spPr>
-        <p:txBody>
-          <a:bodyPr wrap="square" lIns="0" tIns="0" rIns="0" bIns="0" rtlCol="0" anchor="ctr"/>
-          <a:lstStyle/>
-          <a:p>
-            <a:pPr indent="0" marL="0">
-              <a:buNone/>
-            </a:pPr>
-            <a:r>
-              <a:rPr lang="en-US" sz="2400" dirty="0">
-                <a:solidFill>
-                  <a:srgbClr val="1B2530"/>
-                </a:solidFill>
-                <a:latin typeface="Calibri" pitchFamily="34" charset="0"/>
-                <a:ea typeface="Calibri" pitchFamily="34" charset="-122"/>
-                <a:cs typeface="Calibri" pitchFamily="34" charset="-120"/>
-              </a:rPr>
-              <a:t>Two for the windows</a:t>
-            </a:r>
-            <a:endParaRPr lang="en-US" sz="2400" dirty="0"/>
-          </a:p>
-        </p:txBody>
-      </p:sp>
-      <p:sp>
-        <p:nvSpPr>
-          <p:cNvPr id="11" name="Shape 9"/>
-          <p:cNvSpPr/>
-          <p:nvPr/>
-        </p:nvSpPr>
-        <p:spPr>
-          <a:xfrm>
-            <a:off x="8092440" y="1463040"/>
-            <a:ext cx="3550615" cy="1143000"/>
-          </a:xfrm>
-          <a:prstGeom prst="roundRect">
-            <a:avLst>
-              <a:gd name="adj" fmla="val 6400"/>
-            </a:avLst>
-          </a:prstGeom>
-          <a:solidFill>
-            <a:srgbClr val="1B2530"/>
-          </a:solidFill>
-          <a:ln w="12700">
-            <a:solidFill>
-              <a:srgbClr val="1B2530"/>
-            </a:solidFill>
-            <a:prstDash val="solid"/>
-          </a:ln>
-        </p:spPr>
-      </p:sp>
-      <p:sp>
-        <p:nvSpPr>
-          <p:cNvPr id="12" name="Text 10"/>
-          <p:cNvSpPr txBox="1"/>
-          <p:nvPr/>
-        </p:nvSpPr>
-        <p:spPr>
-          <a:xfrm>
-            <a:off x="8321040" y="1600200"/>
-            <a:ext cx="3093415" cy="457200"/>
-          </a:xfrm>
-          <a:prstGeom prst="rect">
-            <a:avLst/>
-          </a:prstGeom>
-          <a:noFill/>
-          <a:ln/>
-        </p:spPr>
-        <p:txBody>
-          <a:bodyPr wrap="square" lIns="0" tIns="0" rIns="0" bIns="0" rtlCol="0" anchor="t"/>
-          <a:lstStyle/>
-          <a:p>
-            <a:pPr indent="0" marL="0">
-              <a:buNone/>
-            </a:pPr>
-            <a:r>
-              <a:rPr lang="en-US" sz="2200" b="1" dirty="0">
+              <a:rPr lang="en-US" sz="4200" b="1" dirty="0">
                 <a:solidFill>
                   <a:srgbClr val="FFFFFF"/>
                 </a:solidFill>
@@ -13439,22 +13143,22 @@
                 <a:ea typeface="Cambria" pitchFamily="34" charset="-122"/>
                 <a:cs typeface="Cambria" pitchFamily="34" charset="-120"/>
               </a:rPr>
-              <a:t>Step 11</a:t>
-            </a:r>
-            <a:endParaRPr lang="en-US" sz="2200" dirty="0"/>
-          </a:p>
-        </p:txBody>
-      </p:sp>
-      <p:sp>
-        <p:nvSpPr>
-          <p:cNvPr id="13" name="Text 11"/>
-          <p:cNvSpPr txBox="1"/>
-          <p:nvPr/>
-        </p:nvSpPr>
-        <p:spPr>
-          <a:xfrm>
-            <a:off x="8321040" y="2084832"/>
-            <a:ext cx="3093415" cy="365760"/>
+              <a:t>Challenge</a:t>
+            </a:r>
+            <a:endParaRPr lang="en-US" sz="4200" dirty="0"/>
+          </a:p>
+        </p:txBody>
+      </p:sp>
+      <p:sp>
+        <p:nvSpPr>
+          <p:cNvPr id="4" name="Text 2"/>
+          <p:cNvSpPr txBox="1"/>
+          <p:nvPr/>
+        </p:nvSpPr>
+        <p:spPr>
+          <a:xfrm>
+            <a:off x="548640" y="4389120"/>
+            <a:ext cx="11094415" cy="1097280"/>
           </a:xfrm>
           <a:prstGeom prst="rect">
             <a:avLst/>
@@ -13470,7 +13174,7 @@
               <a:buNone/>
             </a:pPr>
             <a:r>
-              <a:rPr lang="en-US" sz="1600" dirty="0">
+              <a:rPr lang="en-US" sz="2200" dirty="0">
                 <a:solidFill>
                   <a:srgbClr val="CFE3EA"/>
                 </a:solidFill>
@@ -13478,112 +13182,7 @@
                 <a:ea typeface="Calibri" pitchFamily="34" charset="-122"/>
                 <a:cs typeface="Calibri" pitchFamily="34" charset="-120"/>
               </a:rPr>
-              <a:t>about 8 min</a:t>
-            </a:r>
-            <a:endParaRPr lang="en-US" sz="1600" dirty="0"/>
-          </a:p>
-        </p:txBody>
-      </p:sp>
-      <p:sp>
-        <p:nvSpPr>
-          <p:cNvPr id="14" name="Shape 12"/>
-          <p:cNvSpPr/>
-          <p:nvPr/>
-        </p:nvSpPr>
-        <p:spPr>
-          <a:xfrm>
-            <a:off x="8092440" y="2834640"/>
-            <a:ext cx="3550615" cy="3383280"/>
-          </a:xfrm>
-          <a:prstGeom prst="roundRect">
-            <a:avLst>
-              <a:gd name="adj" fmla="val 2162"/>
-            </a:avLst>
-          </a:prstGeom>
-          <a:solidFill>
-            <a:srgbClr val="EEF2F4"/>
-          </a:solidFill>
-          <a:ln w="12700">
-            <a:solidFill>
-              <a:srgbClr val="EEF2F4"/>
-            </a:solidFill>
-            <a:prstDash val="solid"/>
-          </a:ln>
-        </p:spPr>
-      </p:sp>
-      <p:sp>
-        <p:nvSpPr>
-          <p:cNvPr id="15" name="Text 13"/>
-          <p:cNvSpPr txBox="1"/>
-          <p:nvPr/>
-        </p:nvSpPr>
-        <p:spPr>
-          <a:xfrm>
-            <a:off x="8321040" y="2971800"/>
-            <a:ext cx="3093415" cy="365760"/>
-          </a:xfrm>
-          <a:prstGeom prst="rect">
-            <a:avLst/>
-          </a:prstGeom>
-          <a:noFill/>
-          <a:ln/>
-        </p:spPr>
-        <p:txBody>
-          <a:bodyPr wrap="square" lIns="0" tIns="0" rIns="0" bIns="0" rtlCol="0" anchor="t"/>
-          <a:lstStyle/>
-          <a:p>
-            <a:pPr indent="0" marL="0">
-              <a:buNone/>
-            </a:pPr>
-            <a:r>
-              <a:rPr lang="en-US" sz="1500" b="1" dirty="0">
-                <a:solidFill>
-                  <a:srgbClr val="2F7D4F"/>
-                </a:solidFill>
-                <a:latin typeface="Calibri" pitchFamily="34" charset="0"/>
-                <a:ea typeface="Calibri" pitchFamily="34" charset="-122"/>
-                <a:cs typeface="Calibri" pitchFamily="34" charset="-120"/>
-              </a:rPr>
-              <a:t>You should see</a:t>
-            </a:r>
-            <a:endParaRPr lang="en-US" sz="1500" dirty="0"/>
-          </a:p>
-        </p:txBody>
-      </p:sp>
-      <p:sp>
-        <p:nvSpPr>
-          <p:cNvPr id="16" name="Text 14"/>
-          <p:cNvSpPr txBox="1"/>
-          <p:nvPr/>
-        </p:nvSpPr>
-        <p:spPr>
-          <a:xfrm>
-            <a:off x="8321040" y="3429000"/>
-            <a:ext cx="3093415" cy="2606040"/>
-          </a:xfrm>
-          <a:prstGeom prst="rect">
-            <a:avLst/>
-          </a:prstGeom>
-          <a:noFill/>
-          <a:ln/>
-        </p:spPr>
-        <p:txBody>
-          <a:bodyPr wrap="square" lIns="0" tIns="0" rIns="0" bIns="0" rtlCol="0" anchor="t"/>
-          <a:lstStyle/>
-          <a:p>
-            <a:pPr indent="0" marL="0">
-              <a:buNone/>
-            </a:pPr>
-            <a:r>
-              <a:rPr lang="en-US" sz="2200" dirty="0">
-                <a:solidFill>
-                  <a:srgbClr val="1B2530"/>
-                </a:solidFill>
-                <a:latin typeface="Calibri" pitchFamily="34" charset="0"/>
-                <a:ea typeface="Calibri" pitchFamily="34" charset="-122"/>
-                <a:cs typeface="Calibri" pitchFamily="34" charset="-120"/>
-              </a:rPr>
-              <a:t>A house made of rectangles. Every pair's house is different.</a:t>
+              <a:t>Build a picture</a:t>
             </a:r>
             <a:endParaRPr lang="en-US" sz="2200" dirty="0"/>
           </a:p>
@@ -13619,7 +13218,7 @@
             <a:lvl1pPr>
               <a:defRPr sz="1000">
                 <a:solidFill>
-                  <a:srgbClr val="5B6B78"/>
+                  <a:srgbClr val="CFE3EA"/>
                 </a:solidFill>
                 <a:latin typeface="Calibri"/>
                 <a:ea typeface="Calibri"/>
@@ -13697,7 +13296,7 @@
                 <a:ea typeface="Cambria" pitchFamily="34" charset="-122"/>
                 <a:cs typeface="Cambria" pitchFamily="34" charset="-120"/>
               </a:rPr>
-              <a:t>One idea</a:t>
+              <a:t>Draw a house</a:t>
             </a:r>
             <a:endParaRPr lang="en-US" sz="3000" dirty="0"/>
           </a:p>
@@ -13705,232 +13304,18 @@
       </p:sp>
       <p:sp>
         <p:nvSpPr>
-          <p:cNvPr id="3" name="Shape 1"/>
-          <p:cNvSpPr/>
-          <p:nvPr/>
-        </p:nvSpPr>
-        <p:spPr>
-          <a:xfrm>
-            <a:off x="475488" y="1938528"/>
-            <a:ext cx="5998464" cy="3803904"/>
-          </a:xfrm>
-          <a:prstGeom prst="rect">
-            <a:avLst/>
-          </a:prstGeom>
-          <a:solidFill>
-            <a:srgbClr val="2E4A62"/>
-          </a:solidFill>
-          <a:ln w="12700">
-            <a:solidFill>
-              <a:srgbClr val="2E4A62"/>
-            </a:solidFill>
-            <a:prstDash val="solid"/>
-          </a:ln>
-        </p:spPr>
-      </p:sp>
-      <p:sp>
-        <p:nvSpPr>
-          <p:cNvPr id="4" name="Shape 2"/>
-          <p:cNvSpPr/>
-          <p:nvPr/>
-        </p:nvSpPr>
-        <p:spPr>
-          <a:xfrm>
-            <a:off x="548640" y="2011680"/>
-            <a:ext cx="5852160" cy="3657600"/>
-          </a:xfrm>
-          <a:prstGeom prst="rect">
-            <a:avLst/>
-          </a:prstGeom>
-          <a:solidFill>
-            <a:srgbClr val="000000"/>
-          </a:solidFill>
-          <a:ln w="12700">
-            <a:solidFill>
-              <a:srgbClr val="000000"/>
-            </a:solidFill>
-            <a:prstDash val="solid"/>
-          </a:ln>
-        </p:spPr>
-      </p:sp>
-      <p:sp>
-        <p:nvSpPr>
-          <p:cNvPr id="5" name="Shape 3"/>
-          <p:cNvSpPr/>
-          <p:nvPr/>
-        </p:nvSpPr>
-        <p:spPr>
-          <a:xfrm>
-            <a:off x="2560320" y="3474720"/>
-            <a:ext cx="1828800" cy="1645920"/>
-          </a:xfrm>
-          <a:prstGeom prst="rect">
-            <a:avLst/>
-          </a:prstGeom>
-          <a:solidFill>
-            <a:srgbClr val="F8A400"/>
-          </a:solidFill>
-          <a:ln w="12700">
-            <a:solidFill>
-              <a:srgbClr val="F8A400"/>
-            </a:solidFill>
-            <a:prstDash val="solid"/>
-          </a:ln>
-        </p:spPr>
-      </p:sp>
-      <p:sp>
-        <p:nvSpPr>
-          <p:cNvPr id="6" name="Shape 4"/>
-          <p:cNvSpPr/>
-          <p:nvPr/>
-        </p:nvSpPr>
-        <p:spPr>
-          <a:xfrm>
-            <a:off x="3291840" y="4389120"/>
-            <a:ext cx="402336" cy="731520"/>
-          </a:xfrm>
-          <a:prstGeom prst="rect">
-            <a:avLst/>
-          </a:prstGeom>
-          <a:solidFill>
-            <a:srgbClr val="0000F8"/>
-          </a:solidFill>
-          <a:ln w="12700">
-            <a:solidFill>
-              <a:srgbClr val="0000F8"/>
-            </a:solidFill>
-            <a:prstDash val="solid"/>
-          </a:ln>
-        </p:spPr>
-      </p:sp>
-      <p:sp>
-        <p:nvSpPr>
-          <p:cNvPr id="7" name="Shape 5"/>
-          <p:cNvSpPr/>
-          <p:nvPr/>
-        </p:nvSpPr>
-        <p:spPr>
-          <a:xfrm>
-            <a:off x="2779776" y="3767328"/>
-            <a:ext cx="402336" cy="402336"/>
-          </a:xfrm>
-          <a:prstGeom prst="rect">
-            <a:avLst/>
-          </a:prstGeom>
-          <a:solidFill>
-            <a:srgbClr val="00FCF8"/>
-          </a:solidFill>
-          <a:ln w="12700">
-            <a:solidFill>
-              <a:srgbClr val="00FCF8"/>
-            </a:solidFill>
-            <a:prstDash val="solid"/>
-          </a:ln>
-        </p:spPr>
-      </p:sp>
-      <p:sp>
-        <p:nvSpPr>
-          <p:cNvPr id="8" name="Shape 6"/>
-          <p:cNvSpPr/>
-          <p:nvPr/>
-        </p:nvSpPr>
-        <p:spPr>
-          <a:xfrm>
-            <a:off x="3767328" y="3767328"/>
-            <a:ext cx="402336" cy="402336"/>
-          </a:xfrm>
-          <a:prstGeom prst="rect">
-            <a:avLst/>
-          </a:prstGeom>
-          <a:solidFill>
-            <a:srgbClr val="00FCF8"/>
-          </a:solidFill>
-          <a:ln w="12700">
-            <a:solidFill>
-              <a:srgbClr val="00FCF8"/>
-            </a:solidFill>
-            <a:prstDash val="solid"/>
-          </a:ln>
-        </p:spPr>
-      </p:sp>
-      <p:sp>
-        <p:nvSpPr>
-          <p:cNvPr id="9" name="Shape 7"/>
-          <p:cNvSpPr/>
-          <p:nvPr/>
-        </p:nvSpPr>
-        <p:spPr>
-          <a:xfrm>
-            <a:off x="548640" y="5120640"/>
-            <a:ext cx="5852160" cy="548640"/>
-          </a:xfrm>
-          <a:prstGeom prst="rect">
-            <a:avLst/>
-          </a:prstGeom>
-          <a:solidFill>
-            <a:srgbClr val="00FC00"/>
-          </a:solidFill>
-          <a:ln w="12700">
-            <a:solidFill>
-              <a:srgbClr val="00FC00"/>
-            </a:solidFill>
-            <a:prstDash val="solid"/>
-          </a:ln>
-        </p:spPr>
-      </p:sp>
-      <p:sp>
-        <p:nvSpPr>
-          <p:cNvPr id="10" name="Text 8"/>
-          <p:cNvSpPr txBox="1"/>
-          <p:nvPr/>
-        </p:nvSpPr>
-        <p:spPr>
-          <a:xfrm>
-            <a:off x="548640" y="5779008"/>
-            <a:ext cx="5852160" cy="274320"/>
-          </a:xfrm>
-          <a:prstGeom prst="rect">
-            <a:avLst/>
-          </a:prstGeom>
-          <a:noFill/>
-          <a:ln/>
-        </p:spPr>
-        <p:txBody>
-          <a:bodyPr wrap="square" lIns="0" tIns="0" rIns="0" bIns="0" rtlCol="0" anchor="t"/>
-          <a:lstStyle/>
-          <a:p>
-            <a:pPr indent="0" marL="0">
-              <a:buNone/>
-            </a:pPr>
-            <a:r>
-              <a:rPr lang="en-US" sz="1100" i="1" dirty="0">
-                <a:solidFill>
-                  <a:srgbClr val="5B6B78"/>
-                </a:solidFill>
-                <a:latin typeface="Calibri" pitchFamily="34" charset="0"/>
-                <a:ea typeface="Calibri" pitchFamily="34" charset="-122"/>
-                <a:cs typeface="Calibri" pitchFamily="34" charset="-120"/>
-              </a:rPr>
-              <a:t>320 x 200 game viewport</a:t>
-            </a:r>
-            <a:endParaRPr lang="en-US" sz="1100" dirty="0"/>
-          </a:p>
-        </p:txBody>
-      </p:sp>
-      <p:sp>
-        <p:nvSpPr>
-          <p:cNvPr id="11" name="Text 9"/>
-          <p:cNvSpPr txBox="1"/>
-          <p:nvPr/>
-        </p:nvSpPr>
-        <p:spPr>
-          <a:xfrm>
-            <a:off x="6858000" y="1481328"/>
-            <a:ext cx="457200" cy="457200"/>
+          <p:cNvPr id="3" name="Text 1"/>
+          <p:cNvSpPr txBox="1"/>
+          <p:nvPr/>
+        </p:nvSpPr>
+        <p:spPr>
+          <a:xfrm>
+            <a:off x="548640" y="1481328"/>
+            <a:ext cx="438912" cy="438912"/>
           </a:xfrm>
           <a:prstGeom prst="roundRect">
             <a:avLst>
-              <a:gd name="adj" fmla="val 16000"/>
+              <a:gd name="adj" fmla="val 16667"/>
             </a:avLst>
           </a:prstGeom>
           <a:solidFill>
@@ -13950,7 +13335,7 @@
               <a:buNone/>
             </a:pPr>
             <a:r>
-              <a:rPr lang="en-US" sz="1700" b="1" dirty="0">
+              <a:rPr lang="en-US" sz="1600" b="1" dirty="0">
                 <a:solidFill>
                   <a:srgbClr val="FFFFFF"/>
                 </a:solidFill>
@@ -13960,20 +13345,20 @@
               </a:rPr>
               <a:t>1</a:t>
             </a:r>
-            <a:endParaRPr lang="en-US" sz="1700" dirty="0"/>
-          </a:p>
-        </p:txBody>
-      </p:sp>
-      <p:sp>
-        <p:nvSpPr>
-          <p:cNvPr id="12" name="Text 10"/>
-          <p:cNvSpPr txBox="1"/>
-          <p:nvPr/>
-        </p:nvSpPr>
-        <p:spPr>
-          <a:xfrm>
-            <a:off x="7589520" y="1463040"/>
-            <a:ext cx="4053535" cy="1065276"/>
+            <a:endParaRPr lang="en-US" sz="1600" dirty="0"/>
+          </a:p>
+        </p:txBody>
+      </p:sp>
+      <p:sp>
+        <p:nvSpPr>
+          <p:cNvPr id="4" name="Text 2"/>
+          <p:cNvSpPr txBox="1"/>
+          <p:nvPr/>
+        </p:nvSpPr>
+        <p:spPr>
+          <a:xfrm>
+            <a:off x="1234440" y="1463040"/>
+            <a:ext cx="6446520" cy="475488"/>
           </a:xfrm>
           <a:prstGeom prst="rect">
             <a:avLst/>
@@ -13982,14 +13367,14 @@
           <a:ln/>
         </p:spPr>
         <p:txBody>
-          <a:bodyPr wrap="square" lIns="0" tIns="0" rIns="0" bIns="0" rtlCol="0" anchor="t"/>
+          <a:bodyPr wrap="square" lIns="0" tIns="0" rIns="0" bIns="0" rtlCol="0" anchor="ctr"/>
           <a:lstStyle/>
           <a:p>
             <a:pPr indent="0" marL="0">
               <a:buNone/>
             </a:pPr>
             <a:r>
-              <a:rPr lang="en-US" sz="2700" dirty="0">
+              <a:rPr lang="en-US" sz="2400" dirty="0">
                 <a:solidFill>
                   <a:srgbClr val="1B2530"/>
                 </a:solidFill>
@@ -13997,26 +13382,26 @@
                 <a:ea typeface="Calibri" pitchFamily="34" charset="-122"/>
                 <a:cs typeface="Calibri" pitchFamily="34" charset="-120"/>
               </a:rPr>
-              <a:t>Walls: x 110, y 80, w 100, h 90</a:t>
-            </a:r>
-            <a:endParaRPr lang="en-US" sz="2700" dirty="0"/>
-          </a:p>
-        </p:txBody>
-      </p:sp>
-      <p:sp>
-        <p:nvSpPr>
-          <p:cNvPr id="13" name="Text 11"/>
-          <p:cNvSpPr txBox="1"/>
-          <p:nvPr/>
-        </p:nvSpPr>
-        <p:spPr>
-          <a:xfrm>
-            <a:off x="6858000" y="2711196"/>
-            <a:ext cx="457200" cy="457200"/>
+              <a:t>Add more 'draw rectangle' blocks</a:t>
+            </a:r>
+            <a:endParaRPr lang="en-US" sz="2400" dirty="0"/>
+          </a:p>
+        </p:txBody>
+      </p:sp>
+      <p:sp>
+        <p:nvSpPr>
+          <p:cNvPr id="5" name="Text 3"/>
+          <p:cNvSpPr txBox="1"/>
+          <p:nvPr/>
+        </p:nvSpPr>
+        <p:spPr>
+          <a:xfrm>
+            <a:off x="548640" y="2706624"/>
+            <a:ext cx="438912" cy="438912"/>
           </a:xfrm>
           <a:prstGeom prst="roundRect">
             <a:avLst>
-              <a:gd name="adj" fmla="val 16000"/>
+              <a:gd name="adj" fmla="val 16667"/>
             </a:avLst>
           </a:prstGeom>
           <a:solidFill>
@@ -14036,7 +13421,7 @@
               <a:buNone/>
             </a:pPr>
             <a:r>
-              <a:rPr lang="en-US" sz="1700" b="1" dirty="0">
+              <a:rPr lang="en-US" sz="1600" b="1" dirty="0">
                 <a:solidFill>
                   <a:srgbClr val="FFFFFF"/>
                 </a:solidFill>
@@ -14046,20 +13431,20 @@
               </a:rPr>
               <a:t>2</a:t>
             </a:r>
-            <a:endParaRPr lang="en-US" sz="1700" dirty="0"/>
-          </a:p>
-        </p:txBody>
-      </p:sp>
-      <p:sp>
-        <p:nvSpPr>
-          <p:cNvPr id="14" name="Text 12"/>
-          <p:cNvSpPr txBox="1"/>
-          <p:nvPr/>
-        </p:nvSpPr>
-        <p:spPr>
-          <a:xfrm>
-            <a:off x="7589520" y="2692908"/>
-            <a:ext cx="4053535" cy="493776"/>
+            <a:endParaRPr lang="en-US" sz="1600" dirty="0"/>
+          </a:p>
+        </p:txBody>
+      </p:sp>
+      <p:sp>
+        <p:nvSpPr>
+          <p:cNvPr id="6" name="Text 4"/>
+          <p:cNvSpPr txBox="1"/>
+          <p:nvPr/>
+        </p:nvSpPr>
+        <p:spPr>
+          <a:xfrm>
+            <a:off x="1234440" y="2688336"/>
+            <a:ext cx="6446520" cy="475488"/>
           </a:xfrm>
           <a:prstGeom prst="rect">
             <a:avLst/>
@@ -14075,7 +13460,7 @@
               <a:buNone/>
             </a:pPr>
             <a:r>
-              <a:rPr lang="en-US" sz="2700" dirty="0">
+              <a:rPr lang="en-US" sz="2400" dirty="0">
                 <a:solidFill>
                   <a:srgbClr val="1B2530"/>
                 </a:solidFill>
@@ -14083,26 +13468,26 @@
                 <a:ea typeface="Calibri" pitchFamily="34" charset="-122"/>
                 <a:cs typeface="Calibri" pitchFamily="34" charset="-120"/>
               </a:rPr>
-              <a:t>Door: x 150, y 130</a:t>
-            </a:r>
-            <a:endParaRPr lang="en-US" sz="2700" dirty="0"/>
-          </a:p>
-        </p:txBody>
-      </p:sp>
-      <p:sp>
-        <p:nvSpPr>
-          <p:cNvPr id="15" name="Text 13"/>
-          <p:cNvSpPr txBox="1"/>
-          <p:nvPr/>
-        </p:nvSpPr>
-        <p:spPr>
-          <a:xfrm>
-            <a:off x="6858000" y="3941064"/>
-            <a:ext cx="457200" cy="457200"/>
+              <a:t>A big square for the walls</a:t>
+            </a:r>
+            <a:endParaRPr lang="en-US" sz="2400" dirty="0"/>
+          </a:p>
+        </p:txBody>
+      </p:sp>
+      <p:sp>
+        <p:nvSpPr>
+          <p:cNvPr id="7" name="Text 5"/>
+          <p:cNvSpPr txBox="1"/>
+          <p:nvPr/>
+        </p:nvSpPr>
+        <p:spPr>
+          <a:xfrm>
+            <a:off x="548640" y="3931920"/>
+            <a:ext cx="438912" cy="438912"/>
           </a:xfrm>
           <a:prstGeom prst="roundRect">
             <a:avLst>
-              <a:gd name="adj" fmla="val 16000"/>
+              <a:gd name="adj" fmla="val 16667"/>
             </a:avLst>
           </a:prstGeom>
           <a:solidFill>
@@ -14122,7 +13507,7 @@
               <a:buNone/>
             </a:pPr>
             <a:r>
-              <a:rPr lang="en-US" sz="1700" b="1" dirty="0">
+              <a:rPr lang="en-US" sz="1600" b="1" dirty="0">
                 <a:solidFill>
                   <a:srgbClr val="FFFFFF"/>
                 </a:solidFill>
@@ -14132,20 +13517,20 @@
               </a:rPr>
               <a:t>3</a:t>
             </a:r>
-            <a:endParaRPr lang="en-US" sz="1700" dirty="0"/>
-          </a:p>
-        </p:txBody>
-      </p:sp>
-      <p:sp>
-        <p:nvSpPr>
-          <p:cNvPr id="16" name="Text 14"/>
-          <p:cNvSpPr txBox="1"/>
-          <p:nvPr/>
-        </p:nvSpPr>
-        <p:spPr>
-          <a:xfrm>
-            <a:off x="7589520" y="3922776"/>
-            <a:ext cx="4053535" cy="1065276"/>
+            <a:endParaRPr lang="en-US" sz="1600" dirty="0"/>
+          </a:p>
+        </p:txBody>
+      </p:sp>
+      <p:sp>
+        <p:nvSpPr>
+          <p:cNvPr id="8" name="Text 6"/>
+          <p:cNvSpPr txBox="1"/>
+          <p:nvPr/>
+        </p:nvSpPr>
+        <p:spPr>
+          <a:xfrm>
+            <a:off x="1234440" y="3913632"/>
+            <a:ext cx="6446520" cy="475488"/>
           </a:xfrm>
           <a:prstGeom prst="rect">
             <a:avLst/>
@@ -14154,14 +13539,14 @@
           <a:ln/>
         </p:spPr>
         <p:txBody>
-          <a:bodyPr wrap="square" lIns="0" tIns="0" rIns="0" bIns="0" rtlCol="0" anchor="t"/>
+          <a:bodyPr wrap="square" lIns="0" tIns="0" rIns="0" bIns="0" rtlCol="0" anchor="ctr"/>
           <a:lstStyle/>
           <a:p>
             <a:pPr indent="0" marL="0">
               <a:buNone/>
             </a:pPr>
             <a:r>
-              <a:rPr lang="en-US" sz="2700" dirty="0">
+              <a:rPr lang="en-US" sz="2400" dirty="0">
                 <a:solidFill>
                   <a:srgbClr val="1B2530"/>
                 </a:solidFill>
@@ -14169,26 +13554,26 @@
                 <a:ea typeface="Calibri" pitchFamily="34" charset="-122"/>
                 <a:cs typeface="Calibri" pitchFamily="34" charset="-120"/>
               </a:rPr>
-              <a:t>Grass: x 0, y 170, w 320</a:t>
-            </a:r>
-            <a:endParaRPr lang="en-US" sz="2700" dirty="0"/>
-          </a:p>
-        </p:txBody>
-      </p:sp>
-      <p:sp>
-        <p:nvSpPr>
-          <p:cNvPr id="17" name="Text 15"/>
-          <p:cNvSpPr txBox="1"/>
-          <p:nvPr/>
-        </p:nvSpPr>
-        <p:spPr>
-          <a:xfrm>
-            <a:off x="6858000" y="5170932"/>
-            <a:ext cx="457200" cy="457200"/>
+              <a:t>A small one for the door</a:t>
+            </a:r>
+            <a:endParaRPr lang="en-US" sz="2400" dirty="0"/>
+          </a:p>
+        </p:txBody>
+      </p:sp>
+      <p:sp>
+        <p:nvSpPr>
+          <p:cNvPr id="9" name="Text 7"/>
+          <p:cNvSpPr txBox="1"/>
+          <p:nvPr/>
+        </p:nvSpPr>
+        <p:spPr>
+          <a:xfrm>
+            <a:off x="548640" y="5157216"/>
+            <a:ext cx="438912" cy="438912"/>
           </a:xfrm>
           <a:prstGeom prst="roundRect">
             <a:avLst>
-              <a:gd name="adj" fmla="val 16000"/>
+              <a:gd name="adj" fmla="val 16667"/>
             </a:avLst>
           </a:prstGeom>
           <a:solidFill>
@@ -14208,7 +13593,7 @@
               <a:buNone/>
             </a:pPr>
             <a:r>
-              <a:rPr lang="en-US" sz="1700" b="1" dirty="0">
+              <a:rPr lang="en-US" sz="1600" b="1" dirty="0">
                 <a:solidFill>
                   <a:srgbClr val="FFFFFF"/>
                 </a:solidFill>
@@ -14218,20 +13603,20 @@
               </a:rPr>
               <a:t>4</a:t>
             </a:r>
-            <a:endParaRPr lang="en-US" sz="1700" dirty="0"/>
-          </a:p>
-        </p:txBody>
-      </p:sp>
-      <p:sp>
-        <p:nvSpPr>
-          <p:cNvPr id="18" name="Text 16"/>
-          <p:cNvSpPr txBox="1"/>
-          <p:nvPr/>
-        </p:nvSpPr>
-        <p:spPr>
-          <a:xfrm>
-            <a:off x="7589520" y="5152644"/>
-            <a:ext cx="4053535" cy="493776"/>
+            <a:endParaRPr lang="en-US" sz="1600" dirty="0"/>
+          </a:p>
+        </p:txBody>
+      </p:sp>
+      <p:sp>
+        <p:nvSpPr>
+          <p:cNvPr id="10" name="Text 8"/>
+          <p:cNvSpPr txBox="1"/>
+          <p:nvPr/>
+        </p:nvSpPr>
+        <p:spPr>
+          <a:xfrm>
+            <a:off x="1234440" y="5138928"/>
+            <a:ext cx="6446520" cy="475488"/>
           </a:xfrm>
           <a:prstGeom prst="rect">
             <a:avLst/>
@@ -14247,7 +13632,7 @@
               <a:buNone/>
             </a:pPr>
             <a:r>
-              <a:rPr lang="en-US" sz="2700" dirty="0">
+              <a:rPr lang="en-US" sz="2400" dirty="0">
                 <a:solidFill>
                   <a:srgbClr val="1B2530"/>
                 </a:solidFill>
@@ -14255,9 +13640,219 @@
                 <a:ea typeface="Calibri" pitchFamily="34" charset="-122"/>
                 <a:cs typeface="Calibri" pitchFamily="34" charset="-120"/>
               </a:rPr>
-              <a:t>Yours can be different!</a:t>
-            </a:r>
-            <a:endParaRPr lang="en-US" sz="2700" dirty="0"/>
+              <a:t>Two for the windows</a:t>
+            </a:r>
+            <a:endParaRPr lang="en-US" sz="2400" dirty="0"/>
+          </a:p>
+        </p:txBody>
+      </p:sp>
+      <p:sp>
+        <p:nvSpPr>
+          <p:cNvPr id="11" name="Shape 9"/>
+          <p:cNvSpPr/>
+          <p:nvPr/>
+        </p:nvSpPr>
+        <p:spPr>
+          <a:xfrm>
+            <a:off x="8092440" y="1463040"/>
+            <a:ext cx="3550615" cy="1143000"/>
+          </a:xfrm>
+          <a:prstGeom prst="roundRect">
+            <a:avLst>
+              <a:gd name="adj" fmla="val 6400"/>
+            </a:avLst>
+          </a:prstGeom>
+          <a:solidFill>
+            <a:srgbClr val="1B2530"/>
+          </a:solidFill>
+          <a:ln w="12700">
+            <a:solidFill>
+              <a:srgbClr val="1B2530"/>
+            </a:solidFill>
+            <a:prstDash val="solid"/>
+          </a:ln>
+        </p:spPr>
+      </p:sp>
+      <p:sp>
+        <p:nvSpPr>
+          <p:cNvPr id="12" name="Text 10"/>
+          <p:cNvSpPr txBox="1"/>
+          <p:nvPr/>
+        </p:nvSpPr>
+        <p:spPr>
+          <a:xfrm>
+            <a:off x="8321040" y="1600200"/>
+            <a:ext cx="3093415" cy="457200"/>
+          </a:xfrm>
+          <a:prstGeom prst="rect">
+            <a:avLst/>
+          </a:prstGeom>
+          <a:noFill/>
+          <a:ln/>
+        </p:spPr>
+        <p:txBody>
+          <a:bodyPr wrap="square" lIns="0" tIns="0" rIns="0" bIns="0" rtlCol="0" anchor="t"/>
+          <a:lstStyle/>
+          <a:p>
+            <a:pPr indent="0" marL="0">
+              <a:buNone/>
+            </a:pPr>
+            <a:r>
+              <a:rPr lang="en-US" sz="2200" b="1" dirty="0">
+                <a:solidFill>
+                  <a:srgbClr val="FFFFFF"/>
+                </a:solidFill>
+                <a:latin typeface="Cambria" pitchFamily="34" charset="0"/>
+                <a:ea typeface="Cambria" pitchFamily="34" charset="-122"/>
+                <a:cs typeface="Cambria" pitchFamily="34" charset="-120"/>
+              </a:rPr>
+              <a:t>Step 11</a:t>
+            </a:r>
+            <a:endParaRPr lang="en-US" sz="2200" dirty="0"/>
+          </a:p>
+        </p:txBody>
+      </p:sp>
+      <p:sp>
+        <p:nvSpPr>
+          <p:cNvPr id="13" name="Text 11"/>
+          <p:cNvSpPr txBox="1"/>
+          <p:nvPr/>
+        </p:nvSpPr>
+        <p:spPr>
+          <a:xfrm>
+            <a:off x="8321040" y="2084832"/>
+            <a:ext cx="3093415" cy="365760"/>
+          </a:xfrm>
+          <a:prstGeom prst="rect">
+            <a:avLst/>
+          </a:prstGeom>
+          <a:noFill/>
+          <a:ln/>
+        </p:spPr>
+        <p:txBody>
+          <a:bodyPr wrap="square" lIns="0" tIns="0" rIns="0" bIns="0" rtlCol="0" anchor="t"/>
+          <a:lstStyle/>
+          <a:p>
+            <a:pPr indent="0" marL="0">
+              <a:buNone/>
+            </a:pPr>
+            <a:r>
+              <a:rPr lang="en-US" sz="1600" dirty="0">
+                <a:solidFill>
+                  <a:srgbClr val="CFE3EA"/>
+                </a:solidFill>
+                <a:latin typeface="Calibri" pitchFamily="34" charset="0"/>
+                <a:ea typeface="Calibri" pitchFamily="34" charset="-122"/>
+                <a:cs typeface="Calibri" pitchFamily="34" charset="-120"/>
+              </a:rPr>
+              <a:t>about 8 min</a:t>
+            </a:r>
+            <a:endParaRPr lang="en-US" sz="1600" dirty="0"/>
+          </a:p>
+        </p:txBody>
+      </p:sp>
+      <p:sp>
+        <p:nvSpPr>
+          <p:cNvPr id="14" name="Shape 12"/>
+          <p:cNvSpPr/>
+          <p:nvPr/>
+        </p:nvSpPr>
+        <p:spPr>
+          <a:xfrm>
+            <a:off x="8092440" y="2788920"/>
+            <a:ext cx="3550615" cy="3429000"/>
+          </a:xfrm>
+          <a:prstGeom prst="roundRect">
+            <a:avLst>
+              <a:gd name="adj" fmla="val 2133"/>
+            </a:avLst>
+          </a:prstGeom>
+          <a:solidFill>
+            <a:srgbClr val="EEF2F4"/>
+          </a:solidFill>
+          <a:ln w="12700">
+            <a:solidFill>
+              <a:srgbClr val="EEF2F4"/>
+            </a:solidFill>
+            <a:prstDash val="solid"/>
+          </a:ln>
+        </p:spPr>
+      </p:sp>
+      <p:sp>
+        <p:nvSpPr>
+          <p:cNvPr id="15" name="Text 13"/>
+          <p:cNvSpPr txBox="1"/>
+          <p:nvPr/>
+        </p:nvSpPr>
+        <p:spPr>
+          <a:xfrm>
+            <a:off x="8321040" y="2880360"/>
+            <a:ext cx="3093415" cy="310896"/>
+          </a:xfrm>
+          <a:prstGeom prst="rect">
+            <a:avLst/>
+          </a:prstGeom>
+          <a:noFill/>
+          <a:ln/>
+        </p:spPr>
+        <p:txBody>
+          <a:bodyPr wrap="square" lIns="0" tIns="0" rIns="0" bIns="0" rtlCol="0" anchor="t"/>
+          <a:lstStyle/>
+          <a:p>
+            <a:pPr indent="0" marL="0">
+              <a:buNone/>
+            </a:pPr>
+            <a:r>
+              <a:rPr lang="en-US" sz="1400" b="1" dirty="0">
+                <a:solidFill>
+                  <a:srgbClr val="2F7D4F"/>
+                </a:solidFill>
+                <a:latin typeface="Calibri" pitchFamily="34" charset="0"/>
+                <a:ea typeface="Calibri" pitchFamily="34" charset="-122"/>
+                <a:cs typeface="Calibri" pitchFamily="34" charset="-120"/>
+              </a:rPr>
+              <a:t>You should see</a:t>
+            </a:r>
+            <a:endParaRPr lang="en-US" sz="1400" dirty="0"/>
+          </a:p>
+        </p:txBody>
+      </p:sp>
+      <p:sp>
+        <p:nvSpPr>
+          <p:cNvPr id="16" name="Text 14"/>
+          <p:cNvSpPr txBox="1"/>
+          <p:nvPr/>
+        </p:nvSpPr>
+        <p:spPr>
+          <a:xfrm>
+            <a:off x="8321040" y="3246120"/>
+            <a:ext cx="3093415" cy="2862072"/>
+          </a:xfrm>
+          <a:prstGeom prst="rect">
+            <a:avLst/>
+          </a:prstGeom>
+          <a:noFill/>
+          <a:ln/>
+        </p:spPr>
+        <p:txBody>
+          <a:bodyPr wrap="square" lIns="0" tIns="0" rIns="0" bIns="0" rtlCol="0" anchor="t"/>
+          <a:lstStyle/>
+          <a:p>
+            <a:pPr indent="0" marL="0">
+              <a:buNone/>
+            </a:pPr>
+            <a:r>
+              <a:rPr lang="en-US" sz="2200" dirty="0">
+                <a:solidFill>
+                  <a:srgbClr val="1B2530"/>
+                </a:solidFill>
+                <a:latin typeface="Calibri" pitchFamily="34" charset="0"/>
+                <a:ea typeface="Calibri" pitchFamily="34" charset="-122"/>
+                <a:cs typeface="Calibri" pitchFamily="34" charset="-120"/>
+              </a:rPr>
+              <a:t>A house made of rectangles. Every pair's house is different.</a:t>
+            </a:r>
+            <a:endParaRPr lang="en-US" sz="2200" dirty="0"/>
           </a:p>
         </p:txBody>
       </p:sp>
@@ -14369,7 +13964,7 @@
                 <a:ea typeface="Cambria" pitchFamily="34" charset="-122"/>
                 <a:cs typeface="Cambria" pitchFamily="34" charset="-120"/>
               </a:rPr>
-              <a:t>Show and tell</a:t>
+              <a:t>One idea</a:t>
             </a:r>
             <a:endParaRPr lang="en-US" sz="3000" dirty="0"/>
           </a:p>
@@ -14377,18 +13972,232 @@
       </p:sp>
       <p:sp>
         <p:nvSpPr>
-          <p:cNvPr id="3" name="Text 1"/>
-          <p:cNvSpPr txBox="1"/>
-          <p:nvPr/>
-        </p:nvSpPr>
-        <p:spPr>
-          <a:xfrm>
-            <a:off x="548640" y="1481328"/>
-            <a:ext cx="438912" cy="438912"/>
+          <p:cNvPr id="3" name="Shape 1"/>
+          <p:cNvSpPr/>
+          <p:nvPr/>
+        </p:nvSpPr>
+        <p:spPr>
+          <a:xfrm>
+            <a:off x="475488" y="1938528"/>
+            <a:ext cx="5998464" cy="3803904"/>
+          </a:xfrm>
+          <a:prstGeom prst="rect">
+            <a:avLst/>
+          </a:prstGeom>
+          <a:solidFill>
+            <a:srgbClr val="2E4A62"/>
+          </a:solidFill>
+          <a:ln w="12700">
+            <a:solidFill>
+              <a:srgbClr val="2E4A62"/>
+            </a:solidFill>
+            <a:prstDash val="solid"/>
+          </a:ln>
+        </p:spPr>
+      </p:sp>
+      <p:sp>
+        <p:nvSpPr>
+          <p:cNvPr id="4" name="Shape 2"/>
+          <p:cNvSpPr/>
+          <p:nvPr/>
+        </p:nvSpPr>
+        <p:spPr>
+          <a:xfrm>
+            <a:off x="548640" y="2011680"/>
+            <a:ext cx="5852160" cy="3657600"/>
+          </a:xfrm>
+          <a:prstGeom prst="rect">
+            <a:avLst/>
+          </a:prstGeom>
+          <a:solidFill>
+            <a:srgbClr val="000000"/>
+          </a:solidFill>
+          <a:ln w="12700">
+            <a:solidFill>
+              <a:srgbClr val="000000"/>
+            </a:solidFill>
+            <a:prstDash val="solid"/>
+          </a:ln>
+        </p:spPr>
+      </p:sp>
+      <p:sp>
+        <p:nvSpPr>
+          <p:cNvPr id="5" name="Shape 3"/>
+          <p:cNvSpPr/>
+          <p:nvPr/>
+        </p:nvSpPr>
+        <p:spPr>
+          <a:xfrm>
+            <a:off x="2560320" y="3474720"/>
+            <a:ext cx="1828800" cy="1645920"/>
+          </a:xfrm>
+          <a:prstGeom prst="rect">
+            <a:avLst/>
+          </a:prstGeom>
+          <a:solidFill>
+            <a:srgbClr val="F8A400"/>
+          </a:solidFill>
+          <a:ln w="12700">
+            <a:solidFill>
+              <a:srgbClr val="F8A400"/>
+            </a:solidFill>
+            <a:prstDash val="solid"/>
+          </a:ln>
+        </p:spPr>
+      </p:sp>
+      <p:sp>
+        <p:nvSpPr>
+          <p:cNvPr id="6" name="Shape 4"/>
+          <p:cNvSpPr/>
+          <p:nvPr/>
+        </p:nvSpPr>
+        <p:spPr>
+          <a:xfrm>
+            <a:off x="3291840" y="4389120"/>
+            <a:ext cx="402336" cy="731520"/>
+          </a:xfrm>
+          <a:prstGeom prst="rect">
+            <a:avLst/>
+          </a:prstGeom>
+          <a:solidFill>
+            <a:srgbClr val="0000F8"/>
+          </a:solidFill>
+          <a:ln w="12700">
+            <a:solidFill>
+              <a:srgbClr val="0000F8"/>
+            </a:solidFill>
+            <a:prstDash val="solid"/>
+          </a:ln>
+        </p:spPr>
+      </p:sp>
+      <p:sp>
+        <p:nvSpPr>
+          <p:cNvPr id="7" name="Shape 5"/>
+          <p:cNvSpPr/>
+          <p:nvPr/>
+        </p:nvSpPr>
+        <p:spPr>
+          <a:xfrm>
+            <a:off x="2779776" y="3767328"/>
+            <a:ext cx="402336" cy="402336"/>
+          </a:xfrm>
+          <a:prstGeom prst="rect">
+            <a:avLst/>
+          </a:prstGeom>
+          <a:solidFill>
+            <a:srgbClr val="00FCF8"/>
+          </a:solidFill>
+          <a:ln w="12700">
+            <a:solidFill>
+              <a:srgbClr val="00FCF8"/>
+            </a:solidFill>
+            <a:prstDash val="solid"/>
+          </a:ln>
+        </p:spPr>
+      </p:sp>
+      <p:sp>
+        <p:nvSpPr>
+          <p:cNvPr id="8" name="Shape 6"/>
+          <p:cNvSpPr/>
+          <p:nvPr/>
+        </p:nvSpPr>
+        <p:spPr>
+          <a:xfrm>
+            <a:off x="3767328" y="3767328"/>
+            <a:ext cx="402336" cy="402336"/>
+          </a:xfrm>
+          <a:prstGeom prst="rect">
+            <a:avLst/>
+          </a:prstGeom>
+          <a:solidFill>
+            <a:srgbClr val="00FCF8"/>
+          </a:solidFill>
+          <a:ln w="12700">
+            <a:solidFill>
+              <a:srgbClr val="00FCF8"/>
+            </a:solidFill>
+            <a:prstDash val="solid"/>
+          </a:ln>
+        </p:spPr>
+      </p:sp>
+      <p:sp>
+        <p:nvSpPr>
+          <p:cNvPr id="9" name="Shape 7"/>
+          <p:cNvSpPr/>
+          <p:nvPr/>
+        </p:nvSpPr>
+        <p:spPr>
+          <a:xfrm>
+            <a:off x="548640" y="5120640"/>
+            <a:ext cx="5852160" cy="548640"/>
+          </a:xfrm>
+          <a:prstGeom prst="rect">
+            <a:avLst/>
+          </a:prstGeom>
+          <a:solidFill>
+            <a:srgbClr val="00FC00"/>
+          </a:solidFill>
+          <a:ln w="12700">
+            <a:solidFill>
+              <a:srgbClr val="00FC00"/>
+            </a:solidFill>
+            <a:prstDash val="solid"/>
+          </a:ln>
+        </p:spPr>
+      </p:sp>
+      <p:sp>
+        <p:nvSpPr>
+          <p:cNvPr id="10" name="Text 8"/>
+          <p:cNvSpPr txBox="1"/>
+          <p:nvPr/>
+        </p:nvSpPr>
+        <p:spPr>
+          <a:xfrm>
+            <a:off x="548640" y="5779008"/>
+            <a:ext cx="5852160" cy="274320"/>
+          </a:xfrm>
+          <a:prstGeom prst="rect">
+            <a:avLst/>
+          </a:prstGeom>
+          <a:noFill/>
+          <a:ln/>
+        </p:spPr>
+        <p:txBody>
+          <a:bodyPr wrap="square" lIns="0" tIns="0" rIns="0" bIns="0" rtlCol="0" anchor="t"/>
+          <a:lstStyle/>
+          <a:p>
+            <a:pPr indent="0" marL="0">
+              <a:buNone/>
+            </a:pPr>
+            <a:r>
+              <a:rPr lang="en-US" sz="1100" i="1" dirty="0">
+                <a:solidFill>
+                  <a:srgbClr val="5B6B78"/>
+                </a:solidFill>
+                <a:latin typeface="Calibri" pitchFamily="34" charset="0"/>
+                <a:ea typeface="Calibri" pitchFamily="34" charset="-122"/>
+                <a:cs typeface="Calibri" pitchFamily="34" charset="-120"/>
+              </a:rPr>
+              <a:t>320 x 200 game viewport</a:t>
+            </a:r>
+            <a:endParaRPr lang="en-US" sz="1100" dirty="0"/>
+          </a:p>
+        </p:txBody>
+      </p:sp>
+      <p:sp>
+        <p:nvSpPr>
+          <p:cNvPr id="11" name="Text 9"/>
+          <p:cNvSpPr txBox="1"/>
+          <p:nvPr/>
+        </p:nvSpPr>
+        <p:spPr>
+          <a:xfrm>
+            <a:off x="6858000" y="1481328"/>
+            <a:ext cx="457200" cy="457200"/>
           </a:xfrm>
           <a:prstGeom prst="roundRect">
             <a:avLst>
-              <a:gd name="adj" fmla="val 16667"/>
+              <a:gd name="adj" fmla="val 16000"/>
             </a:avLst>
           </a:prstGeom>
           <a:solidFill>
@@ -14408,7 +14217,7 @@
               <a:buNone/>
             </a:pPr>
             <a:r>
-              <a:rPr lang="en-US" sz="1600" b="1" dirty="0">
+              <a:rPr lang="en-US" sz="1700" b="1" dirty="0">
                 <a:solidFill>
                   <a:srgbClr val="FFFFFF"/>
                 </a:solidFill>
@@ -14418,20 +14227,20 @@
               </a:rPr>
               <a:t>1</a:t>
             </a:r>
-            <a:endParaRPr lang="en-US" sz="1600" dirty="0"/>
-          </a:p>
-        </p:txBody>
-      </p:sp>
-      <p:sp>
-        <p:nvSpPr>
-          <p:cNvPr id="4" name="Text 2"/>
-          <p:cNvSpPr txBox="1"/>
-          <p:nvPr/>
-        </p:nvSpPr>
-        <p:spPr>
-          <a:xfrm>
-            <a:off x="1234440" y="1463040"/>
-            <a:ext cx="6446520" cy="475488"/>
+            <a:endParaRPr lang="en-US" sz="1700" dirty="0"/>
+          </a:p>
+        </p:txBody>
+      </p:sp>
+      <p:sp>
+        <p:nvSpPr>
+          <p:cNvPr id="12" name="Text 10"/>
+          <p:cNvSpPr txBox="1"/>
+          <p:nvPr/>
+        </p:nvSpPr>
+        <p:spPr>
+          <a:xfrm>
+            <a:off x="7589520" y="1463040"/>
+            <a:ext cx="4053535" cy="1065276"/>
           </a:xfrm>
           <a:prstGeom prst="rect">
             <a:avLst/>
@@ -14440,14 +14249,14 @@
           <a:ln/>
         </p:spPr>
         <p:txBody>
-          <a:bodyPr wrap="square" lIns="0" tIns="0" rIns="0" bIns="0" rtlCol="0" anchor="ctr"/>
+          <a:bodyPr wrap="square" lIns="0" tIns="0" rIns="0" bIns="0" rtlCol="0" anchor="t"/>
           <a:lstStyle/>
           <a:p>
             <a:pPr indent="0" marL="0">
               <a:buNone/>
             </a:pPr>
             <a:r>
-              <a:rPr lang="en-US" sz="2400" dirty="0">
+              <a:rPr lang="en-US" sz="2700" dirty="0">
                 <a:solidFill>
                   <a:srgbClr val="1B2530"/>
                 </a:solidFill>
@@ -14455,26 +14264,26 @@
                 <a:ea typeface="Calibri" pitchFamily="34" charset="-122"/>
                 <a:cs typeface="Calibri" pitchFamily="34" charset="-120"/>
               </a:rPr>
-              <a:t>Click Save</a:t>
-            </a:r>
-            <a:endParaRPr lang="en-US" sz="2400" dirty="0"/>
-          </a:p>
-        </p:txBody>
-      </p:sp>
-      <p:sp>
-        <p:nvSpPr>
-          <p:cNvPr id="5" name="Text 3"/>
-          <p:cNvSpPr txBox="1"/>
-          <p:nvPr/>
-        </p:nvSpPr>
-        <p:spPr>
-          <a:xfrm>
-            <a:off x="548640" y="3115056"/>
-            <a:ext cx="438912" cy="438912"/>
+              <a:t>Walls: x 110, y 80, w 100, h 90</a:t>
+            </a:r>
+            <a:endParaRPr lang="en-US" sz="2700" dirty="0"/>
+          </a:p>
+        </p:txBody>
+      </p:sp>
+      <p:sp>
+        <p:nvSpPr>
+          <p:cNvPr id="13" name="Text 11"/>
+          <p:cNvSpPr txBox="1"/>
+          <p:nvPr/>
+        </p:nvSpPr>
+        <p:spPr>
+          <a:xfrm>
+            <a:off x="6858000" y="2711196"/>
+            <a:ext cx="457200" cy="457200"/>
           </a:xfrm>
           <a:prstGeom prst="roundRect">
             <a:avLst>
-              <a:gd name="adj" fmla="val 16667"/>
+              <a:gd name="adj" fmla="val 16000"/>
             </a:avLst>
           </a:prstGeom>
           <a:solidFill>
@@ -14494,7 +14303,7 @@
               <a:buNone/>
             </a:pPr>
             <a:r>
-              <a:rPr lang="en-US" sz="1600" b="1" dirty="0">
+              <a:rPr lang="en-US" sz="1700" b="1" dirty="0">
                 <a:solidFill>
                   <a:srgbClr val="FFFFFF"/>
                 </a:solidFill>
@@ -14504,20 +14313,20 @@
               </a:rPr>
               <a:t>2</a:t>
             </a:r>
-            <a:endParaRPr lang="en-US" sz="1600" dirty="0"/>
-          </a:p>
-        </p:txBody>
-      </p:sp>
-      <p:sp>
-        <p:nvSpPr>
-          <p:cNvPr id="6" name="Text 4"/>
-          <p:cNvSpPr txBox="1"/>
-          <p:nvPr/>
-        </p:nvSpPr>
-        <p:spPr>
-          <a:xfrm>
-            <a:off x="1234440" y="3096768"/>
-            <a:ext cx="6446520" cy="475488"/>
+            <a:endParaRPr lang="en-US" sz="1700" dirty="0"/>
+          </a:p>
+        </p:txBody>
+      </p:sp>
+      <p:sp>
+        <p:nvSpPr>
+          <p:cNvPr id="14" name="Text 12"/>
+          <p:cNvSpPr txBox="1"/>
+          <p:nvPr/>
+        </p:nvSpPr>
+        <p:spPr>
+          <a:xfrm>
+            <a:off x="7589520" y="2692908"/>
+            <a:ext cx="4053535" cy="493776"/>
           </a:xfrm>
           <a:prstGeom prst="rect">
             <a:avLst/>
@@ -14533,7 +14342,7 @@
               <a:buNone/>
             </a:pPr>
             <a:r>
-              <a:rPr lang="en-US" sz="2400" dirty="0">
+              <a:rPr lang="en-US" sz="2700" dirty="0">
                 <a:solidFill>
                   <a:srgbClr val="1B2530"/>
                 </a:solidFill>
@@ -14541,26 +14350,26 @@
                 <a:ea typeface="Calibri" pitchFamily="34" charset="-122"/>
                 <a:cs typeface="Calibri" pitchFamily="34" charset="-120"/>
               </a:rPr>
-              <a:t>Show your picture to another pair</a:t>
-            </a:r>
-            <a:endParaRPr lang="en-US" sz="2400" dirty="0"/>
-          </a:p>
-        </p:txBody>
-      </p:sp>
-      <p:sp>
-        <p:nvSpPr>
-          <p:cNvPr id="7" name="Text 5"/>
-          <p:cNvSpPr txBox="1"/>
-          <p:nvPr/>
-        </p:nvSpPr>
-        <p:spPr>
-          <a:xfrm>
-            <a:off x="548640" y="4748784"/>
-            <a:ext cx="438912" cy="438912"/>
+              <a:t>Door: x 150, y 130</a:t>
+            </a:r>
+            <a:endParaRPr lang="en-US" sz="2700" dirty="0"/>
+          </a:p>
+        </p:txBody>
+      </p:sp>
+      <p:sp>
+        <p:nvSpPr>
+          <p:cNvPr id="15" name="Text 13"/>
+          <p:cNvSpPr txBox="1"/>
+          <p:nvPr/>
+        </p:nvSpPr>
+        <p:spPr>
+          <a:xfrm>
+            <a:off x="6858000" y="3941064"/>
+            <a:ext cx="457200" cy="457200"/>
           </a:xfrm>
           <a:prstGeom prst="roundRect">
             <a:avLst>
-              <a:gd name="adj" fmla="val 16667"/>
+              <a:gd name="adj" fmla="val 16000"/>
             </a:avLst>
           </a:prstGeom>
           <a:solidFill>
@@ -14580,7 +14389,7 @@
               <a:buNone/>
             </a:pPr>
             <a:r>
-              <a:rPr lang="en-US" sz="1600" b="1" dirty="0">
+              <a:rPr lang="en-US" sz="1700" b="1" dirty="0">
                 <a:solidFill>
                   <a:srgbClr val="FFFFFF"/>
                 </a:solidFill>
@@ -14590,20 +14399,20 @@
               </a:rPr>
               <a:t>3</a:t>
             </a:r>
-            <a:endParaRPr lang="en-US" sz="1600" dirty="0"/>
-          </a:p>
-        </p:txBody>
-      </p:sp>
-      <p:sp>
-        <p:nvSpPr>
-          <p:cNvPr id="8" name="Text 6"/>
-          <p:cNvSpPr txBox="1"/>
-          <p:nvPr/>
-        </p:nvSpPr>
-        <p:spPr>
-          <a:xfrm>
-            <a:off x="1234440" y="4730496"/>
-            <a:ext cx="6446520" cy="1487424"/>
+            <a:endParaRPr lang="en-US" sz="1700" dirty="0"/>
+          </a:p>
+        </p:txBody>
+      </p:sp>
+      <p:sp>
+        <p:nvSpPr>
+          <p:cNvPr id="16" name="Text 14"/>
+          <p:cNvSpPr txBox="1"/>
+          <p:nvPr/>
+        </p:nvSpPr>
+        <p:spPr>
+          <a:xfrm>
+            <a:off x="7589520" y="3922776"/>
+            <a:ext cx="4053535" cy="1065276"/>
           </a:xfrm>
           <a:prstGeom prst="rect">
             <a:avLst/>
@@ -14619,7 +14428,7 @@
               <a:buNone/>
             </a:pPr>
             <a:r>
-              <a:rPr lang="en-US" sz="2400" dirty="0">
+              <a:rPr lang="en-US" sz="2700" dirty="0">
                 <a:solidFill>
                   <a:srgbClr val="1B2530"/>
                 </a:solidFill>
@@ -14627,49 +14436,69 @@
                 <a:ea typeface="Calibri" pitchFamily="34" charset="-122"/>
                 <a:cs typeface="Calibri" pitchFamily="34" charset="-120"/>
               </a:rPr>
-              <a:t>Tell them one number you changed and what it did</a:t>
-            </a:r>
-            <a:endParaRPr lang="en-US" sz="2400" dirty="0"/>
-          </a:p>
-        </p:txBody>
-      </p:sp>
-      <p:sp>
-        <p:nvSpPr>
-          <p:cNvPr id="9" name="Shape 7"/>
-          <p:cNvSpPr/>
-          <p:nvPr/>
-        </p:nvSpPr>
-        <p:spPr>
-          <a:xfrm>
-            <a:off x="8092440" y="1463040"/>
-            <a:ext cx="3550615" cy="1143000"/>
+              <a:t>Grass: x 0, y 170, w 320</a:t>
+            </a:r>
+            <a:endParaRPr lang="en-US" sz="2700" dirty="0"/>
+          </a:p>
+        </p:txBody>
+      </p:sp>
+      <p:sp>
+        <p:nvSpPr>
+          <p:cNvPr id="17" name="Text 15"/>
+          <p:cNvSpPr txBox="1"/>
+          <p:nvPr/>
+        </p:nvSpPr>
+        <p:spPr>
+          <a:xfrm>
+            <a:off x="6858000" y="5170932"/>
+            <a:ext cx="457200" cy="457200"/>
           </a:xfrm>
           <a:prstGeom prst="roundRect">
             <a:avLst>
-              <a:gd name="adj" fmla="val 6400"/>
+              <a:gd name="adj" fmla="val 16000"/>
             </a:avLst>
           </a:prstGeom>
           <a:solidFill>
-            <a:srgbClr val="1B2530"/>
+            <a:srgbClr val="6B4FA0"/>
           </a:solidFill>
-          <a:ln w="12700">
+          <a:ln>
             <a:solidFill>
-              <a:srgbClr val="1B2530"/>
+              <a:srgbClr val="6B4FA0"/>
             </a:solidFill>
-            <a:prstDash val="solid"/>
           </a:ln>
         </p:spPr>
-      </p:sp>
-      <p:sp>
-        <p:nvSpPr>
-          <p:cNvPr id="10" name="Text 8"/>
-          <p:cNvSpPr txBox="1"/>
-          <p:nvPr/>
-        </p:nvSpPr>
-        <p:spPr>
-          <a:xfrm>
-            <a:off x="8321040" y="1600200"/>
-            <a:ext cx="3093415" cy="457200"/>
+        <p:txBody>
+          <a:bodyPr wrap="square" lIns="0" tIns="0" rIns="0" bIns="0" rtlCol="0" anchor="ctr"/>
+          <a:lstStyle/>
+          <a:p>
+            <a:pPr algn="ctr" indent="0" marL="0">
+              <a:buNone/>
+            </a:pPr>
+            <a:r>
+              <a:rPr lang="en-US" sz="1700" b="1" dirty="0">
+                <a:solidFill>
+                  <a:srgbClr val="FFFFFF"/>
+                </a:solidFill>
+                <a:latin typeface="Calibri" pitchFamily="34" charset="0"/>
+                <a:ea typeface="Calibri" pitchFamily="34" charset="-122"/>
+                <a:cs typeface="Calibri" pitchFamily="34" charset="-120"/>
+              </a:rPr>
+              <a:t>4</a:t>
+            </a:r>
+            <a:endParaRPr lang="en-US" sz="1700" dirty="0"/>
+          </a:p>
+        </p:txBody>
+      </p:sp>
+      <p:sp>
+        <p:nvSpPr>
+          <p:cNvPr id="18" name="Text 16"/>
+          <p:cNvSpPr txBox="1"/>
+          <p:nvPr/>
+        </p:nvSpPr>
+        <p:spPr>
+          <a:xfrm>
+            <a:off x="7589520" y="5152644"/>
+            <a:ext cx="4053535" cy="493776"/>
           </a:xfrm>
           <a:prstGeom prst="rect">
             <a:avLst/>
@@ -14678,158 +14507,14 @@
           <a:ln/>
         </p:spPr>
         <p:txBody>
-          <a:bodyPr wrap="square" lIns="0" tIns="0" rIns="0" bIns="0" rtlCol="0" anchor="t"/>
+          <a:bodyPr wrap="square" lIns="0" tIns="0" rIns="0" bIns="0" rtlCol="0" anchor="ctr"/>
           <a:lstStyle/>
           <a:p>
             <a:pPr indent="0" marL="0">
               <a:buNone/>
             </a:pPr>
             <a:r>
-              <a:rPr lang="en-US" sz="2200" b="1" dirty="0">
-                <a:solidFill>
-                  <a:srgbClr val="FFFFFF"/>
-                </a:solidFill>
-                <a:latin typeface="Cambria" pitchFamily="34" charset="0"/>
-                <a:ea typeface="Cambria" pitchFamily="34" charset="-122"/>
-                <a:cs typeface="Cambria" pitchFamily="34" charset="-120"/>
-              </a:rPr>
-              <a:t>Step 12</a:t>
-            </a:r>
-            <a:endParaRPr lang="en-US" sz="2200" dirty="0"/>
-          </a:p>
-        </p:txBody>
-      </p:sp>
-      <p:sp>
-        <p:nvSpPr>
-          <p:cNvPr id="11" name="Text 9"/>
-          <p:cNvSpPr txBox="1"/>
-          <p:nvPr/>
-        </p:nvSpPr>
-        <p:spPr>
-          <a:xfrm>
-            <a:off x="8321040" y="2084832"/>
-            <a:ext cx="3093415" cy="365760"/>
-          </a:xfrm>
-          <a:prstGeom prst="rect">
-            <a:avLst/>
-          </a:prstGeom>
-          <a:noFill/>
-          <a:ln/>
-        </p:spPr>
-        <p:txBody>
-          <a:bodyPr wrap="square" lIns="0" tIns="0" rIns="0" bIns="0" rtlCol="0" anchor="t"/>
-          <a:lstStyle/>
-          <a:p>
-            <a:pPr indent="0" marL="0">
-              <a:buNone/>
-            </a:pPr>
-            <a:r>
-              <a:rPr lang="en-US" sz="1600" dirty="0">
-                <a:solidFill>
-                  <a:srgbClr val="CFE3EA"/>
-                </a:solidFill>
-                <a:latin typeface="Calibri" pitchFamily="34" charset="0"/>
-                <a:ea typeface="Calibri" pitchFamily="34" charset="-122"/>
-                <a:cs typeface="Calibri" pitchFamily="34" charset="-120"/>
-              </a:rPr>
-              <a:t>about 4 min</a:t>
-            </a:r>
-            <a:endParaRPr lang="en-US" sz="1600" dirty="0"/>
-          </a:p>
-        </p:txBody>
-      </p:sp>
-      <p:sp>
-        <p:nvSpPr>
-          <p:cNvPr id="12" name="Shape 10"/>
-          <p:cNvSpPr/>
-          <p:nvPr/>
-        </p:nvSpPr>
-        <p:spPr>
-          <a:xfrm>
-            <a:off x="8092440" y="2834640"/>
-            <a:ext cx="3550615" cy="3383280"/>
-          </a:xfrm>
-          <a:prstGeom prst="roundRect">
-            <a:avLst>
-              <a:gd name="adj" fmla="val 2162"/>
-            </a:avLst>
-          </a:prstGeom>
-          <a:solidFill>
-            <a:srgbClr val="EEF2F4"/>
-          </a:solidFill>
-          <a:ln w="12700">
-            <a:solidFill>
-              <a:srgbClr val="EEF2F4"/>
-            </a:solidFill>
-            <a:prstDash val="solid"/>
-          </a:ln>
-        </p:spPr>
-      </p:sp>
-      <p:sp>
-        <p:nvSpPr>
-          <p:cNvPr id="13" name="Text 11"/>
-          <p:cNvSpPr txBox="1"/>
-          <p:nvPr/>
-        </p:nvSpPr>
-        <p:spPr>
-          <a:xfrm>
-            <a:off x="8321040" y="2971800"/>
-            <a:ext cx="3093415" cy="365760"/>
-          </a:xfrm>
-          <a:prstGeom prst="rect">
-            <a:avLst/>
-          </a:prstGeom>
-          <a:noFill/>
-          <a:ln/>
-        </p:spPr>
-        <p:txBody>
-          <a:bodyPr wrap="square" lIns="0" tIns="0" rIns="0" bIns="0" rtlCol="0" anchor="t"/>
-          <a:lstStyle/>
-          <a:p>
-            <a:pPr indent="0" marL="0">
-              <a:buNone/>
-            </a:pPr>
-            <a:r>
-              <a:rPr lang="en-US" sz="1500" b="1" dirty="0">
-                <a:solidFill>
-                  <a:srgbClr val="2F7D4F"/>
-                </a:solidFill>
-                <a:latin typeface="Calibri" pitchFamily="34" charset="0"/>
-                <a:ea typeface="Calibri" pitchFamily="34" charset="-122"/>
-                <a:cs typeface="Calibri" pitchFamily="34" charset="-120"/>
-              </a:rPr>
-              <a:t>You should see</a:t>
-            </a:r>
-            <a:endParaRPr lang="en-US" sz="1500" dirty="0"/>
-          </a:p>
-        </p:txBody>
-      </p:sp>
-      <p:sp>
-        <p:nvSpPr>
-          <p:cNvPr id="14" name="Text 12"/>
-          <p:cNvSpPr txBox="1"/>
-          <p:nvPr/>
-        </p:nvSpPr>
-        <p:spPr>
-          <a:xfrm>
-            <a:off x="8321040" y="3429000"/>
-            <a:ext cx="3093415" cy="2606040"/>
-          </a:xfrm>
-          <a:prstGeom prst="rect">
-            <a:avLst/>
-          </a:prstGeom>
-          <a:noFill/>
-          <a:ln/>
-        </p:spPr>
-        <p:txBody>
-          <a:bodyPr wrap="square" lIns="0" tIns="0" rIns="0" bIns="0" rtlCol="0" anchor="t"/>
-          <a:lstStyle/>
-          <a:p>
-            <a:pPr indent="0" marL="0">
-              <a:buNone/>
-            </a:pPr>
-            <a:r>
-              <a:rPr lang="en-US" sz="2200" dirty="0">
+              <a:rPr lang="en-US" sz="2700" dirty="0">
                 <a:solidFill>
                   <a:srgbClr val="1B2530"/>
                 </a:solidFill>
@@ -14837,9 +14522,9 @@
                 <a:ea typeface="Calibri" pitchFamily="34" charset="-122"/>
                 <a:cs typeface="Calibri" pitchFamily="34" charset="-120"/>
               </a:rPr>
-              <a:t>Every pair explains one change in their own words.</a:t>
-            </a:r>
-            <a:endParaRPr lang="en-US" sz="2200" dirty="0"/>
+              <a:t>Yours can be different!</a:t>
+            </a:r>
+            <a:endParaRPr lang="en-US" sz="2700" dirty="0"/>
           </a:p>
         </p:txBody>
       </p:sp>
@@ -14951,7 +14636,7 @@
                 <a:ea typeface="Cambria" pitchFamily="34" charset="-122"/>
                 <a:cs typeface="Cambria" pitchFamily="34" charset="-120"/>
               </a:rPr>
-              <a:t>You did it!</a:t>
+              <a:t>Show and tell</a:t>
             </a:r>
             <a:endParaRPr lang="en-US" sz="3000" dirty="0"/>
           </a:p>
@@ -14966,19 +14651,19 @@
         <p:spPr>
           <a:xfrm>
             <a:off x="548640" y="1481328"/>
-            <a:ext cx="457200" cy="457200"/>
+            <a:ext cx="438912" cy="438912"/>
           </a:xfrm>
           <a:prstGeom prst="roundRect">
             <a:avLst>
-              <a:gd name="adj" fmla="val 16000"/>
+              <a:gd name="adj" fmla="val 16667"/>
             </a:avLst>
           </a:prstGeom>
           <a:solidFill>
-            <a:srgbClr val="2F7D4F"/>
+            <a:srgbClr val="6B4FA0"/>
           </a:solidFill>
           <a:ln>
             <a:solidFill>
-              <a:srgbClr val="2F7D4F"/>
+              <a:srgbClr val="6B4FA0"/>
             </a:solidFill>
           </a:ln>
         </p:spPr>
@@ -14990,7 +14675,7 @@
               <a:buNone/>
             </a:pPr>
             <a:r>
-              <a:rPr lang="en-US" sz="1700" b="1" dirty="0">
+              <a:rPr lang="en-US" sz="1600" b="1" dirty="0">
                 <a:solidFill>
                   <a:srgbClr val="FFFFFF"/>
                 </a:solidFill>
@@ -15000,7 +14685,7 @@
               </a:rPr>
               <a:t>1</a:t>
             </a:r>
-            <a:endParaRPr lang="en-US" sz="1700" dirty="0"/>
+            <a:endParaRPr lang="en-US" sz="1600" dirty="0"/>
           </a:p>
         </p:txBody>
       </p:sp>
@@ -15012,8 +14697,8 @@
         </p:nvSpPr>
         <p:spPr>
           <a:xfrm>
-            <a:off x="1280160" y="1463040"/>
-            <a:ext cx="10362895" cy="493776"/>
+            <a:off x="1234440" y="1463040"/>
+            <a:ext cx="6446520" cy="475488"/>
           </a:xfrm>
           <a:prstGeom prst="rect">
             <a:avLst/>
@@ -15029,7 +14714,7 @@
               <a:buNone/>
             </a:pPr>
             <a:r>
-              <a:rPr lang="en-US" sz="2500" dirty="0">
+              <a:rPr lang="en-US" sz="2400" dirty="0">
                 <a:solidFill>
                   <a:srgbClr val="1B2530"/>
                 </a:solidFill>
@@ -15037,9 +14722,9 @@
                 <a:ea typeface="Calibri" pitchFamily="34" charset="-122"/>
                 <a:cs typeface="Calibri" pitchFamily="34" charset="-120"/>
               </a:rPr>
-              <a:t>You made a project</a:t>
-            </a:r>
-            <a:endParaRPr lang="en-US" sz="2500" dirty="0"/>
+              <a:t>Click Save</a:t>
+            </a:r>
+            <a:endParaRPr lang="en-US" sz="2400" dirty="0"/>
           </a:p>
         </p:txBody>
       </p:sp>
@@ -15051,20 +14736,20 @@
         </p:nvSpPr>
         <p:spPr>
           <a:xfrm>
-            <a:off x="548640" y="2465222"/>
-            <a:ext cx="457200" cy="457200"/>
+            <a:off x="548640" y="3115056"/>
+            <a:ext cx="438912" cy="438912"/>
           </a:xfrm>
           <a:prstGeom prst="roundRect">
             <a:avLst>
-              <a:gd name="adj" fmla="val 16000"/>
+              <a:gd name="adj" fmla="val 16667"/>
             </a:avLst>
           </a:prstGeom>
           <a:solidFill>
-            <a:srgbClr val="2F7D4F"/>
+            <a:srgbClr val="6B4FA0"/>
           </a:solidFill>
           <a:ln>
             <a:solidFill>
-              <a:srgbClr val="2F7D4F"/>
+              <a:srgbClr val="6B4FA0"/>
             </a:solidFill>
           </a:ln>
         </p:spPr>
@@ -15076,7 +14761,7 @@
               <a:buNone/>
             </a:pPr>
             <a:r>
-              <a:rPr lang="en-US" sz="1700" b="1" dirty="0">
+              <a:rPr lang="en-US" sz="1600" b="1" dirty="0">
                 <a:solidFill>
                   <a:srgbClr val="FFFFFF"/>
                 </a:solidFill>
@@ -15086,7 +14771,7 @@
               </a:rPr>
               <a:t>2</a:t>
             </a:r>
-            <a:endParaRPr lang="en-US" sz="1700" dirty="0"/>
+            <a:endParaRPr lang="en-US" sz="1600" dirty="0"/>
           </a:p>
         </p:txBody>
       </p:sp>
@@ -15098,8 +14783,8 @@
         </p:nvSpPr>
         <p:spPr>
           <a:xfrm>
-            <a:off x="1280160" y="2446934"/>
-            <a:ext cx="10362895" cy="493776"/>
+            <a:off x="1234440" y="3096768"/>
+            <a:ext cx="6446520" cy="475488"/>
           </a:xfrm>
           <a:prstGeom prst="rect">
             <a:avLst/>
@@ -15115,7 +14800,7 @@
               <a:buNone/>
             </a:pPr>
             <a:r>
-              <a:rPr lang="en-US" sz="2500" dirty="0">
+              <a:rPr lang="en-US" sz="2400" dirty="0">
                 <a:solidFill>
                   <a:srgbClr val="1B2530"/>
                 </a:solidFill>
@@ -15123,9 +14808,9 @@
                 <a:ea typeface="Calibri" pitchFamily="34" charset="-122"/>
                 <a:cs typeface="Calibri" pitchFamily="34" charset="-120"/>
               </a:rPr>
-              <a:t>You built start blocks and draw blocks</a:t>
-            </a:r>
-            <a:endParaRPr lang="en-US" sz="2500" dirty="0"/>
+              <a:t>Show your picture to another pair</a:t>
+            </a:r>
+            <a:endParaRPr lang="en-US" sz="2400" dirty="0"/>
           </a:p>
         </p:txBody>
       </p:sp>
@@ -15137,20 +14822,20 @@
         </p:nvSpPr>
         <p:spPr>
           <a:xfrm>
-            <a:off x="548640" y="3449117"/>
-            <a:ext cx="457200" cy="457200"/>
+            <a:off x="548640" y="4748784"/>
+            <a:ext cx="438912" cy="438912"/>
           </a:xfrm>
           <a:prstGeom prst="roundRect">
             <a:avLst>
-              <a:gd name="adj" fmla="val 16000"/>
+              <a:gd name="adj" fmla="val 16667"/>
             </a:avLst>
           </a:prstGeom>
           <a:solidFill>
-            <a:srgbClr val="2F7D4F"/>
+            <a:srgbClr val="6B4FA0"/>
           </a:solidFill>
           <a:ln>
             <a:solidFill>
-              <a:srgbClr val="2F7D4F"/>
+              <a:srgbClr val="6B4FA0"/>
             </a:solidFill>
           </a:ln>
         </p:spPr>
@@ -15162,7 +14847,7 @@
               <a:buNone/>
             </a:pPr>
             <a:r>
-              <a:rPr lang="en-US" sz="1700" b="1" dirty="0">
+              <a:rPr lang="en-US" sz="1600" b="1" dirty="0">
                 <a:solidFill>
                   <a:srgbClr val="FFFFFF"/>
                 </a:solidFill>
@@ -15172,7 +14857,7 @@
               </a:rPr>
               <a:t>3</a:t>
             </a:r>
-            <a:endParaRPr lang="en-US" sz="1700" dirty="0"/>
+            <a:endParaRPr lang="en-US" sz="1600" dirty="0"/>
           </a:p>
         </p:txBody>
       </p:sp>
@@ -15184,8 +14869,8 @@
         </p:nvSpPr>
         <p:spPr>
           <a:xfrm>
-            <a:off x="1280160" y="3430829"/>
-            <a:ext cx="10362895" cy="493776"/>
+            <a:off x="1234440" y="4730496"/>
+            <a:ext cx="6446520" cy="1487424"/>
           </a:xfrm>
           <a:prstGeom prst="rect">
             <a:avLst/>
@@ -15194,14 +14879,14 @@
           <a:ln/>
         </p:spPr>
         <p:txBody>
-          <a:bodyPr wrap="square" lIns="0" tIns="0" rIns="0" bIns="0" rtlCol="0" anchor="ctr"/>
+          <a:bodyPr wrap="square" lIns="0" tIns="0" rIns="0" bIns="0" rtlCol="0" anchor="t"/>
           <a:lstStyle/>
           <a:p>
             <a:pPr indent="0" marL="0">
               <a:buNone/>
             </a:pPr>
             <a:r>
-              <a:rPr lang="en-US" sz="2500" dirty="0">
+              <a:rPr lang="en-US" sz="2400" dirty="0">
                 <a:solidFill>
                   <a:srgbClr val="1B2530"/>
                 </a:solidFill>
@@ -15209,58 +14894,38 @@
                 <a:ea typeface="Calibri" pitchFamily="34" charset="-122"/>
                 <a:cs typeface="Calibri" pitchFamily="34" charset="-120"/>
               </a:rPr>
-              <a:t>You pressed Play</a:t>
-            </a:r>
-            <a:endParaRPr lang="en-US" sz="2500" dirty="0"/>
-          </a:p>
-        </p:txBody>
-      </p:sp>
-      <p:sp>
-        <p:nvSpPr>
-          <p:cNvPr id="9" name="Text 7"/>
-          <p:cNvSpPr txBox="1"/>
-          <p:nvPr/>
-        </p:nvSpPr>
-        <p:spPr>
-          <a:xfrm>
-            <a:off x="548640" y="4433011"/>
-            <a:ext cx="457200" cy="457200"/>
+              <a:t>Tell them one number you changed and what it did</a:t>
+            </a:r>
+            <a:endParaRPr lang="en-US" sz="2400" dirty="0"/>
+          </a:p>
+        </p:txBody>
+      </p:sp>
+      <p:sp>
+        <p:nvSpPr>
+          <p:cNvPr id="9" name="Shape 7"/>
+          <p:cNvSpPr/>
+          <p:nvPr/>
+        </p:nvSpPr>
+        <p:spPr>
+          <a:xfrm>
+            <a:off x="8092440" y="1463040"/>
+            <a:ext cx="3550615" cy="1143000"/>
           </a:xfrm>
           <a:prstGeom prst="roundRect">
             <a:avLst>
-              <a:gd name="adj" fmla="val 16000"/>
+              <a:gd name="adj" fmla="val 6400"/>
             </a:avLst>
           </a:prstGeom>
           <a:solidFill>
-            <a:srgbClr val="2F7D4F"/>
+            <a:srgbClr val="1B2530"/>
           </a:solidFill>
-          <a:ln>
+          <a:ln w="12700">
             <a:solidFill>
-              <a:srgbClr val="2F7D4F"/>
+              <a:srgbClr val="1B2530"/>
             </a:solidFill>
+            <a:prstDash val="solid"/>
           </a:ln>
         </p:spPr>
-        <p:txBody>
-          <a:bodyPr wrap="square" lIns="0" tIns="0" rIns="0" bIns="0" rtlCol="0" anchor="ctr"/>
-          <a:lstStyle/>
-          <a:p>
-            <a:pPr algn="ctr" indent="0" marL="0">
-              <a:buNone/>
-            </a:pPr>
-            <a:r>
-              <a:rPr lang="en-US" sz="1700" b="1" dirty="0">
-                <a:solidFill>
-                  <a:srgbClr val="FFFFFF"/>
-                </a:solidFill>
-                <a:latin typeface="Calibri" pitchFamily="34" charset="0"/>
-                <a:ea typeface="Calibri" pitchFamily="34" charset="-122"/>
-                <a:cs typeface="Calibri" pitchFamily="34" charset="-120"/>
-              </a:rPr>
-              <a:t>4</a:t>
-            </a:r>
-            <a:endParaRPr lang="en-US" sz="1700" dirty="0"/>
-          </a:p>
-        </p:txBody>
       </p:sp>
       <p:sp>
         <p:nvSpPr>
@@ -15270,8 +14935,8 @@
         </p:nvSpPr>
         <p:spPr>
           <a:xfrm>
-            <a:off x="1280160" y="4414723"/>
-            <a:ext cx="10362895" cy="493776"/>
+            <a:off x="8321040" y="1600200"/>
+            <a:ext cx="3093415" cy="457200"/>
           </a:xfrm>
           <a:prstGeom prst="rect">
             <a:avLst/>
@@ -15280,24 +14945,24 @@
           <a:ln/>
         </p:spPr>
         <p:txBody>
-          <a:bodyPr wrap="square" lIns="0" tIns="0" rIns="0" bIns="0" rtlCol="0" anchor="ctr"/>
+          <a:bodyPr wrap="square" lIns="0" tIns="0" rIns="0" bIns="0" rtlCol="0" anchor="t"/>
           <a:lstStyle/>
           <a:p>
             <a:pPr indent="0" marL="0">
               <a:buNone/>
             </a:pPr>
             <a:r>
-              <a:rPr lang="en-US" sz="2500" dirty="0">
-                <a:solidFill>
-                  <a:srgbClr val="1B2530"/>
-                </a:solidFill>
-                <a:latin typeface="Calibri" pitchFamily="34" charset="0"/>
-                <a:ea typeface="Calibri" pitchFamily="34" charset="-122"/>
-                <a:cs typeface="Calibri" pitchFamily="34" charset="-120"/>
-              </a:rPr>
-              <a:t>You moved a square with numbers</a:t>
-            </a:r>
-            <a:endParaRPr lang="en-US" sz="2500" dirty="0"/>
+              <a:rPr lang="en-US" sz="2200" b="1" dirty="0">
+                <a:solidFill>
+                  <a:srgbClr val="FFFFFF"/>
+                </a:solidFill>
+                <a:latin typeface="Cambria" pitchFamily="34" charset="0"/>
+                <a:ea typeface="Cambria" pitchFamily="34" charset="-122"/>
+                <a:cs typeface="Cambria" pitchFamily="34" charset="-120"/>
+              </a:rPr>
+              <a:t>Step 12</a:t>
+            </a:r>
+            <a:endParaRPr lang="en-US" sz="2200" dirty="0"/>
           </a:p>
         </p:txBody>
       </p:sp>
@@ -15309,55 +14974,74 @@
         </p:nvSpPr>
         <p:spPr>
           <a:xfrm>
-            <a:off x="548640" y="5416906"/>
-            <a:ext cx="457200" cy="457200"/>
+            <a:off x="8321040" y="2084832"/>
+            <a:ext cx="3093415" cy="365760"/>
+          </a:xfrm>
+          <a:prstGeom prst="rect">
+            <a:avLst/>
+          </a:prstGeom>
+          <a:noFill/>
+          <a:ln/>
+        </p:spPr>
+        <p:txBody>
+          <a:bodyPr wrap="square" lIns="0" tIns="0" rIns="0" bIns="0" rtlCol="0" anchor="t"/>
+          <a:lstStyle/>
+          <a:p>
+            <a:pPr indent="0" marL="0">
+              <a:buNone/>
+            </a:pPr>
+            <a:r>
+              <a:rPr lang="en-US" sz="1600" dirty="0">
+                <a:solidFill>
+                  <a:srgbClr val="CFE3EA"/>
+                </a:solidFill>
+                <a:latin typeface="Calibri" pitchFamily="34" charset="0"/>
+                <a:ea typeface="Calibri" pitchFamily="34" charset="-122"/>
+                <a:cs typeface="Calibri" pitchFamily="34" charset="-120"/>
+              </a:rPr>
+              <a:t>about 4 min</a:t>
+            </a:r>
+            <a:endParaRPr lang="en-US" sz="1600" dirty="0"/>
+          </a:p>
+        </p:txBody>
+      </p:sp>
+      <p:sp>
+        <p:nvSpPr>
+          <p:cNvPr id="12" name="Shape 10"/>
+          <p:cNvSpPr/>
+          <p:nvPr/>
+        </p:nvSpPr>
+        <p:spPr>
+          <a:xfrm>
+            <a:off x="8092440" y="2788920"/>
+            <a:ext cx="3550615" cy="3429000"/>
           </a:xfrm>
           <a:prstGeom prst="roundRect">
             <a:avLst>
-              <a:gd name="adj" fmla="val 16000"/>
+              <a:gd name="adj" fmla="val 2133"/>
             </a:avLst>
           </a:prstGeom>
           <a:solidFill>
-            <a:srgbClr val="2F7D4F"/>
+            <a:srgbClr val="EEF2F4"/>
           </a:solidFill>
-          <a:ln>
+          <a:ln w="12700">
             <a:solidFill>
-              <a:srgbClr val="2F7D4F"/>
+              <a:srgbClr val="EEF2F4"/>
             </a:solidFill>
+            <a:prstDash val="solid"/>
           </a:ln>
         </p:spPr>
-        <p:txBody>
-          <a:bodyPr wrap="square" lIns="0" tIns="0" rIns="0" bIns="0" rtlCol="0" anchor="ctr"/>
-          <a:lstStyle/>
-          <a:p>
-            <a:pPr algn="ctr" indent="0" marL="0">
-              <a:buNone/>
-            </a:pPr>
-            <a:r>
-              <a:rPr lang="en-US" sz="1700" b="1" dirty="0">
-                <a:solidFill>
-                  <a:srgbClr val="FFFFFF"/>
-                </a:solidFill>
-                <a:latin typeface="Calibri" pitchFamily="34" charset="0"/>
-                <a:ea typeface="Calibri" pitchFamily="34" charset="-122"/>
-                <a:cs typeface="Calibri" pitchFamily="34" charset="-120"/>
-              </a:rPr>
-              <a:t>5</a:t>
-            </a:r>
-            <a:endParaRPr lang="en-US" sz="1700" dirty="0"/>
-          </a:p>
-        </p:txBody>
-      </p:sp>
-      <p:sp>
-        <p:nvSpPr>
-          <p:cNvPr id="12" name="Text 10"/>
-          <p:cNvSpPr txBox="1"/>
-          <p:nvPr/>
-        </p:nvSpPr>
-        <p:spPr>
-          <a:xfrm>
-            <a:off x="1280160" y="5398618"/>
-            <a:ext cx="10362895" cy="493776"/>
+      </p:sp>
+      <p:sp>
+        <p:nvSpPr>
+          <p:cNvPr id="13" name="Text 11"/>
+          <p:cNvSpPr txBox="1"/>
+          <p:nvPr/>
+        </p:nvSpPr>
+        <p:spPr>
+          <a:xfrm>
+            <a:off x="8321040" y="2880360"/>
+            <a:ext cx="3093415" cy="310896"/>
           </a:xfrm>
           <a:prstGeom prst="rect">
             <a:avLst/>
@@ -15366,14 +15050,53 @@
           <a:ln/>
         </p:spPr>
         <p:txBody>
-          <a:bodyPr wrap="square" lIns="0" tIns="0" rIns="0" bIns="0" rtlCol="0" anchor="ctr"/>
+          <a:bodyPr wrap="square" lIns="0" tIns="0" rIns="0" bIns="0" rtlCol="0" anchor="t"/>
           <a:lstStyle/>
           <a:p>
             <a:pPr indent="0" marL="0">
               <a:buNone/>
             </a:pPr>
             <a:r>
-              <a:rPr lang="en-US" sz="2500" dirty="0">
+              <a:rPr lang="en-US" sz="1400" b="1" dirty="0">
+                <a:solidFill>
+                  <a:srgbClr val="2F7D4F"/>
+                </a:solidFill>
+                <a:latin typeface="Calibri" pitchFamily="34" charset="0"/>
+                <a:ea typeface="Calibri" pitchFamily="34" charset="-122"/>
+                <a:cs typeface="Calibri" pitchFamily="34" charset="-120"/>
+              </a:rPr>
+              <a:t>You should see</a:t>
+            </a:r>
+            <a:endParaRPr lang="en-US" sz="1400" dirty="0"/>
+          </a:p>
+        </p:txBody>
+      </p:sp>
+      <p:sp>
+        <p:nvSpPr>
+          <p:cNvPr id="14" name="Text 12"/>
+          <p:cNvSpPr txBox="1"/>
+          <p:nvPr/>
+        </p:nvSpPr>
+        <p:spPr>
+          <a:xfrm>
+            <a:off x="8321040" y="3246120"/>
+            <a:ext cx="3093415" cy="2862072"/>
+          </a:xfrm>
+          <a:prstGeom prst="rect">
+            <a:avLst/>
+          </a:prstGeom>
+          <a:noFill/>
+          <a:ln/>
+        </p:spPr>
+        <p:txBody>
+          <a:bodyPr wrap="square" lIns="0" tIns="0" rIns="0" bIns="0" rtlCol="0" anchor="t"/>
+          <a:lstStyle/>
+          <a:p>
+            <a:pPr indent="0" marL="0">
+              <a:buNone/>
+            </a:pPr>
+            <a:r>
+              <a:rPr lang="en-US" sz="2200" dirty="0">
                 <a:solidFill>
                   <a:srgbClr val="1B2530"/>
                 </a:solidFill>
@@ -15381,9 +15104,9 @@
                 <a:ea typeface="Calibri" pitchFamily="34" charset="-122"/>
                 <a:cs typeface="Calibri" pitchFamily="34" charset="-120"/>
               </a:rPr>
-              <a:t>You fixed a bug on purpose</a:t>
-            </a:r>
-            <a:endParaRPr lang="en-US" sz="2500" dirty="0"/>
+              <a:t>Every pair explains one change in their own words.</a:t>
+            </a:r>
+            <a:endParaRPr lang="en-US" sz="2200" dirty="0"/>
           </a:p>
         </p:txBody>
       </p:sp>
@@ -16494,6 +16217,550 @@
                 <a:ea typeface="Cambria" pitchFamily="34" charset="-122"/>
                 <a:cs typeface="Cambria" pitchFamily="34" charset="-120"/>
               </a:rPr>
+              <a:t>You did it!</a:t>
+            </a:r>
+            <a:endParaRPr lang="en-US" sz="3000" dirty="0"/>
+          </a:p>
+        </p:txBody>
+      </p:sp>
+      <p:sp>
+        <p:nvSpPr>
+          <p:cNvPr id="3" name="Text 1"/>
+          <p:cNvSpPr txBox="1"/>
+          <p:nvPr/>
+        </p:nvSpPr>
+        <p:spPr>
+          <a:xfrm>
+            <a:off x="548640" y="1481328"/>
+            <a:ext cx="457200" cy="457200"/>
+          </a:xfrm>
+          <a:prstGeom prst="roundRect">
+            <a:avLst>
+              <a:gd name="adj" fmla="val 16000"/>
+            </a:avLst>
+          </a:prstGeom>
+          <a:solidFill>
+            <a:srgbClr val="2F7D4F"/>
+          </a:solidFill>
+          <a:ln>
+            <a:solidFill>
+              <a:srgbClr val="2F7D4F"/>
+            </a:solidFill>
+          </a:ln>
+        </p:spPr>
+        <p:txBody>
+          <a:bodyPr wrap="square" lIns="0" tIns="0" rIns="0" bIns="0" rtlCol="0" anchor="ctr"/>
+          <a:lstStyle/>
+          <a:p>
+            <a:pPr algn="ctr" indent="0" marL="0">
+              <a:buNone/>
+            </a:pPr>
+            <a:r>
+              <a:rPr lang="en-US" sz="1700" b="1" dirty="0">
+                <a:solidFill>
+                  <a:srgbClr val="FFFFFF"/>
+                </a:solidFill>
+                <a:latin typeface="Calibri" pitchFamily="34" charset="0"/>
+                <a:ea typeface="Calibri" pitchFamily="34" charset="-122"/>
+                <a:cs typeface="Calibri" pitchFamily="34" charset="-120"/>
+              </a:rPr>
+              <a:t>1</a:t>
+            </a:r>
+            <a:endParaRPr lang="en-US" sz="1700" dirty="0"/>
+          </a:p>
+        </p:txBody>
+      </p:sp>
+      <p:sp>
+        <p:nvSpPr>
+          <p:cNvPr id="4" name="Text 2"/>
+          <p:cNvSpPr txBox="1"/>
+          <p:nvPr/>
+        </p:nvSpPr>
+        <p:spPr>
+          <a:xfrm>
+            <a:off x="1280160" y="1463040"/>
+            <a:ext cx="10362895" cy="493776"/>
+          </a:xfrm>
+          <a:prstGeom prst="rect">
+            <a:avLst/>
+          </a:prstGeom>
+          <a:noFill/>
+          <a:ln/>
+        </p:spPr>
+        <p:txBody>
+          <a:bodyPr wrap="square" lIns="0" tIns="0" rIns="0" bIns="0" rtlCol="0" anchor="ctr"/>
+          <a:lstStyle/>
+          <a:p>
+            <a:pPr indent="0" marL="0">
+              <a:buNone/>
+            </a:pPr>
+            <a:r>
+              <a:rPr lang="en-US" sz="2500" dirty="0">
+                <a:solidFill>
+                  <a:srgbClr val="1B2530"/>
+                </a:solidFill>
+                <a:latin typeface="Calibri" pitchFamily="34" charset="0"/>
+                <a:ea typeface="Calibri" pitchFamily="34" charset="-122"/>
+                <a:cs typeface="Calibri" pitchFamily="34" charset="-120"/>
+              </a:rPr>
+              <a:t>You made a project</a:t>
+            </a:r>
+            <a:endParaRPr lang="en-US" sz="2500" dirty="0"/>
+          </a:p>
+        </p:txBody>
+      </p:sp>
+      <p:sp>
+        <p:nvSpPr>
+          <p:cNvPr id="5" name="Text 3"/>
+          <p:cNvSpPr txBox="1"/>
+          <p:nvPr/>
+        </p:nvSpPr>
+        <p:spPr>
+          <a:xfrm>
+            <a:off x="548640" y="2465222"/>
+            <a:ext cx="457200" cy="457200"/>
+          </a:xfrm>
+          <a:prstGeom prst="roundRect">
+            <a:avLst>
+              <a:gd name="adj" fmla="val 16000"/>
+            </a:avLst>
+          </a:prstGeom>
+          <a:solidFill>
+            <a:srgbClr val="2F7D4F"/>
+          </a:solidFill>
+          <a:ln>
+            <a:solidFill>
+              <a:srgbClr val="2F7D4F"/>
+            </a:solidFill>
+          </a:ln>
+        </p:spPr>
+        <p:txBody>
+          <a:bodyPr wrap="square" lIns="0" tIns="0" rIns="0" bIns="0" rtlCol="0" anchor="ctr"/>
+          <a:lstStyle/>
+          <a:p>
+            <a:pPr algn="ctr" indent="0" marL="0">
+              <a:buNone/>
+            </a:pPr>
+            <a:r>
+              <a:rPr lang="en-US" sz="1700" b="1" dirty="0">
+                <a:solidFill>
+                  <a:srgbClr val="FFFFFF"/>
+                </a:solidFill>
+                <a:latin typeface="Calibri" pitchFamily="34" charset="0"/>
+                <a:ea typeface="Calibri" pitchFamily="34" charset="-122"/>
+                <a:cs typeface="Calibri" pitchFamily="34" charset="-120"/>
+              </a:rPr>
+              <a:t>2</a:t>
+            </a:r>
+            <a:endParaRPr lang="en-US" sz="1700" dirty="0"/>
+          </a:p>
+        </p:txBody>
+      </p:sp>
+      <p:sp>
+        <p:nvSpPr>
+          <p:cNvPr id="6" name="Text 4"/>
+          <p:cNvSpPr txBox="1"/>
+          <p:nvPr/>
+        </p:nvSpPr>
+        <p:spPr>
+          <a:xfrm>
+            <a:off x="1280160" y="2446934"/>
+            <a:ext cx="10362895" cy="493776"/>
+          </a:xfrm>
+          <a:prstGeom prst="rect">
+            <a:avLst/>
+          </a:prstGeom>
+          <a:noFill/>
+          <a:ln/>
+        </p:spPr>
+        <p:txBody>
+          <a:bodyPr wrap="square" lIns="0" tIns="0" rIns="0" bIns="0" rtlCol="0" anchor="ctr"/>
+          <a:lstStyle/>
+          <a:p>
+            <a:pPr indent="0" marL="0">
+              <a:buNone/>
+            </a:pPr>
+            <a:r>
+              <a:rPr lang="en-US" sz="2500" dirty="0">
+                <a:solidFill>
+                  <a:srgbClr val="1B2530"/>
+                </a:solidFill>
+                <a:latin typeface="Calibri" pitchFamily="34" charset="0"/>
+                <a:ea typeface="Calibri" pitchFamily="34" charset="-122"/>
+                <a:cs typeface="Calibri" pitchFamily="34" charset="-120"/>
+              </a:rPr>
+              <a:t>You built start blocks and draw blocks</a:t>
+            </a:r>
+            <a:endParaRPr lang="en-US" sz="2500" dirty="0"/>
+          </a:p>
+        </p:txBody>
+      </p:sp>
+      <p:sp>
+        <p:nvSpPr>
+          <p:cNvPr id="7" name="Text 5"/>
+          <p:cNvSpPr txBox="1"/>
+          <p:nvPr/>
+        </p:nvSpPr>
+        <p:spPr>
+          <a:xfrm>
+            <a:off x="548640" y="3449117"/>
+            <a:ext cx="457200" cy="457200"/>
+          </a:xfrm>
+          <a:prstGeom prst="roundRect">
+            <a:avLst>
+              <a:gd name="adj" fmla="val 16000"/>
+            </a:avLst>
+          </a:prstGeom>
+          <a:solidFill>
+            <a:srgbClr val="2F7D4F"/>
+          </a:solidFill>
+          <a:ln>
+            <a:solidFill>
+              <a:srgbClr val="2F7D4F"/>
+            </a:solidFill>
+          </a:ln>
+        </p:spPr>
+        <p:txBody>
+          <a:bodyPr wrap="square" lIns="0" tIns="0" rIns="0" bIns="0" rtlCol="0" anchor="ctr"/>
+          <a:lstStyle/>
+          <a:p>
+            <a:pPr algn="ctr" indent="0" marL="0">
+              <a:buNone/>
+            </a:pPr>
+            <a:r>
+              <a:rPr lang="en-US" sz="1700" b="1" dirty="0">
+                <a:solidFill>
+                  <a:srgbClr val="FFFFFF"/>
+                </a:solidFill>
+                <a:latin typeface="Calibri" pitchFamily="34" charset="0"/>
+                <a:ea typeface="Calibri" pitchFamily="34" charset="-122"/>
+                <a:cs typeface="Calibri" pitchFamily="34" charset="-120"/>
+              </a:rPr>
+              <a:t>3</a:t>
+            </a:r>
+            <a:endParaRPr lang="en-US" sz="1700" dirty="0"/>
+          </a:p>
+        </p:txBody>
+      </p:sp>
+      <p:sp>
+        <p:nvSpPr>
+          <p:cNvPr id="8" name="Text 6"/>
+          <p:cNvSpPr txBox="1"/>
+          <p:nvPr/>
+        </p:nvSpPr>
+        <p:spPr>
+          <a:xfrm>
+            <a:off x="1280160" y="3430829"/>
+            <a:ext cx="10362895" cy="493776"/>
+          </a:xfrm>
+          <a:prstGeom prst="rect">
+            <a:avLst/>
+          </a:prstGeom>
+          <a:noFill/>
+          <a:ln/>
+        </p:spPr>
+        <p:txBody>
+          <a:bodyPr wrap="square" lIns="0" tIns="0" rIns="0" bIns="0" rtlCol="0" anchor="ctr"/>
+          <a:lstStyle/>
+          <a:p>
+            <a:pPr indent="0" marL="0">
+              <a:buNone/>
+            </a:pPr>
+            <a:r>
+              <a:rPr lang="en-US" sz="2500" dirty="0">
+                <a:solidFill>
+                  <a:srgbClr val="1B2530"/>
+                </a:solidFill>
+                <a:latin typeface="Calibri" pitchFamily="34" charset="0"/>
+                <a:ea typeface="Calibri" pitchFamily="34" charset="-122"/>
+                <a:cs typeface="Calibri" pitchFamily="34" charset="-120"/>
+              </a:rPr>
+              <a:t>You pressed Play</a:t>
+            </a:r>
+            <a:endParaRPr lang="en-US" sz="2500" dirty="0"/>
+          </a:p>
+        </p:txBody>
+      </p:sp>
+      <p:sp>
+        <p:nvSpPr>
+          <p:cNvPr id="9" name="Text 7"/>
+          <p:cNvSpPr txBox="1"/>
+          <p:nvPr/>
+        </p:nvSpPr>
+        <p:spPr>
+          <a:xfrm>
+            <a:off x="548640" y="4433011"/>
+            <a:ext cx="457200" cy="457200"/>
+          </a:xfrm>
+          <a:prstGeom prst="roundRect">
+            <a:avLst>
+              <a:gd name="adj" fmla="val 16000"/>
+            </a:avLst>
+          </a:prstGeom>
+          <a:solidFill>
+            <a:srgbClr val="2F7D4F"/>
+          </a:solidFill>
+          <a:ln>
+            <a:solidFill>
+              <a:srgbClr val="2F7D4F"/>
+            </a:solidFill>
+          </a:ln>
+        </p:spPr>
+        <p:txBody>
+          <a:bodyPr wrap="square" lIns="0" tIns="0" rIns="0" bIns="0" rtlCol="0" anchor="ctr"/>
+          <a:lstStyle/>
+          <a:p>
+            <a:pPr algn="ctr" indent="0" marL="0">
+              <a:buNone/>
+            </a:pPr>
+            <a:r>
+              <a:rPr lang="en-US" sz="1700" b="1" dirty="0">
+                <a:solidFill>
+                  <a:srgbClr val="FFFFFF"/>
+                </a:solidFill>
+                <a:latin typeface="Calibri" pitchFamily="34" charset="0"/>
+                <a:ea typeface="Calibri" pitchFamily="34" charset="-122"/>
+                <a:cs typeface="Calibri" pitchFamily="34" charset="-120"/>
+              </a:rPr>
+              <a:t>4</a:t>
+            </a:r>
+            <a:endParaRPr lang="en-US" sz="1700" dirty="0"/>
+          </a:p>
+        </p:txBody>
+      </p:sp>
+      <p:sp>
+        <p:nvSpPr>
+          <p:cNvPr id="10" name="Text 8"/>
+          <p:cNvSpPr txBox="1"/>
+          <p:nvPr/>
+        </p:nvSpPr>
+        <p:spPr>
+          <a:xfrm>
+            <a:off x="1280160" y="4414723"/>
+            <a:ext cx="10362895" cy="493776"/>
+          </a:xfrm>
+          <a:prstGeom prst="rect">
+            <a:avLst/>
+          </a:prstGeom>
+          <a:noFill/>
+          <a:ln/>
+        </p:spPr>
+        <p:txBody>
+          <a:bodyPr wrap="square" lIns="0" tIns="0" rIns="0" bIns="0" rtlCol="0" anchor="ctr"/>
+          <a:lstStyle/>
+          <a:p>
+            <a:pPr indent="0" marL="0">
+              <a:buNone/>
+            </a:pPr>
+            <a:r>
+              <a:rPr lang="en-US" sz="2500" dirty="0">
+                <a:solidFill>
+                  <a:srgbClr val="1B2530"/>
+                </a:solidFill>
+                <a:latin typeface="Calibri" pitchFamily="34" charset="0"/>
+                <a:ea typeface="Calibri" pitchFamily="34" charset="-122"/>
+                <a:cs typeface="Calibri" pitchFamily="34" charset="-120"/>
+              </a:rPr>
+              <a:t>You moved a square with numbers</a:t>
+            </a:r>
+            <a:endParaRPr lang="en-US" sz="2500" dirty="0"/>
+          </a:p>
+        </p:txBody>
+      </p:sp>
+      <p:sp>
+        <p:nvSpPr>
+          <p:cNvPr id="11" name="Text 9"/>
+          <p:cNvSpPr txBox="1"/>
+          <p:nvPr/>
+        </p:nvSpPr>
+        <p:spPr>
+          <a:xfrm>
+            <a:off x="548640" y="5416906"/>
+            <a:ext cx="457200" cy="457200"/>
+          </a:xfrm>
+          <a:prstGeom prst="roundRect">
+            <a:avLst>
+              <a:gd name="adj" fmla="val 16000"/>
+            </a:avLst>
+          </a:prstGeom>
+          <a:solidFill>
+            <a:srgbClr val="2F7D4F"/>
+          </a:solidFill>
+          <a:ln>
+            <a:solidFill>
+              <a:srgbClr val="2F7D4F"/>
+            </a:solidFill>
+          </a:ln>
+        </p:spPr>
+        <p:txBody>
+          <a:bodyPr wrap="square" lIns="0" tIns="0" rIns="0" bIns="0" rtlCol="0" anchor="ctr"/>
+          <a:lstStyle/>
+          <a:p>
+            <a:pPr algn="ctr" indent="0" marL="0">
+              <a:buNone/>
+            </a:pPr>
+            <a:r>
+              <a:rPr lang="en-US" sz="1700" b="1" dirty="0">
+                <a:solidFill>
+                  <a:srgbClr val="FFFFFF"/>
+                </a:solidFill>
+                <a:latin typeface="Calibri" pitchFamily="34" charset="0"/>
+                <a:ea typeface="Calibri" pitchFamily="34" charset="-122"/>
+                <a:cs typeface="Calibri" pitchFamily="34" charset="-120"/>
+              </a:rPr>
+              <a:t>5</a:t>
+            </a:r>
+            <a:endParaRPr lang="en-US" sz="1700" dirty="0"/>
+          </a:p>
+        </p:txBody>
+      </p:sp>
+      <p:sp>
+        <p:nvSpPr>
+          <p:cNvPr id="12" name="Text 10"/>
+          <p:cNvSpPr txBox="1"/>
+          <p:nvPr/>
+        </p:nvSpPr>
+        <p:spPr>
+          <a:xfrm>
+            <a:off x="1280160" y="5398618"/>
+            <a:ext cx="10362895" cy="493776"/>
+          </a:xfrm>
+          <a:prstGeom prst="rect">
+            <a:avLst/>
+          </a:prstGeom>
+          <a:noFill/>
+          <a:ln/>
+        </p:spPr>
+        <p:txBody>
+          <a:bodyPr wrap="square" lIns="0" tIns="0" rIns="0" bIns="0" rtlCol="0" anchor="ctr"/>
+          <a:lstStyle/>
+          <a:p>
+            <a:pPr indent="0" marL="0">
+              <a:buNone/>
+            </a:pPr>
+            <a:r>
+              <a:rPr lang="en-US" sz="2500" dirty="0">
+                <a:solidFill>
+                  <a:srgbClr val="1B2530"/>
+                </a:solidFill>
+                <a:latin typeface="Calibri" pitchFamily="34" charset="0"/>
+                <a:ea typeface="Calibri" pitchFamily="34" charset="-122"/>
+                <a:cs typeface="Calibri" pitchFamily="34" charset="-120"/>
+              </a:rPr>
+              <a:t>You fixed a bug on purpose</a:t>
+            </a:r>
+            <a:endParaRPr lang="en-US" sz="2500" dirty="0"/>
+          </a:p>
+        </p:txBody>
+      </p:sp>
+      <p:sp>
+        <p:nvSpPr>
+          <p:cNvPr id="25" name="Slide Number Placeholder 0"/>
+          <p:cNvSpPr>
+            <a:spLocks noGrp="1"/>
+          </p:cNvSpPr>
+          <p:nvPr>
+            <p:ph type="sldNum" sz="quarter" idx="4294967295"/>
+          </p:nvPr>
+        </p:nvSpPr>
+        <p:spPr>
+          <a:xfrm>
+            <a:off x="11002975" y="6419088"/>
+            <a:ext cx="640080" cy="274320"/>
+          </a:xfrm>
+          <a:prstGeom prst="rect">
+            <a:avLst/>
+          </a:prstGeom>
+          <a:extLst>
+            <a:ext uri="{C572A759-6A51-4108-AA02-DFA0A04FC94B}">
+              <ma14:wrappingTextBoxFlag xmlns:ma14="http://schemas.microsoft.com/office/mac/drawingml/2011/main" val="0"/>
+            </a:ext>
+          </a:extLst>
+        </p:spPr>
+        <p:txBody>
+          <a:bodyPr/>
+          <a:lstStyle>
+            <a:lvl1pPr>
+              <a:defRPr sz="1000">
+                <a:solidFill>
+                  <a:srgbClr val="5B6B78"/>
+                </a:solidFill>
+                <a:latin typeface="Calibri"/>
+                <a:ea typeface="Calibri"/>
+                <a:cs typeface="Calibri"/>
+              </a:defRPr>
+            </a:lvl1pPr>
+          </a:lstStyle>
+          <a:p>
+            <a:pPr algn="r"/>
+            <a:fld id="{F7021451-1387-4CA6-816F-3879F97B5CBC}" type="slidenum">
+              <a:rPr b="0" lang="en-US"/>
+              <a:t>30</a:t>
+            </a:fld>
+            <a:endParaRPr lang="en-US"/>
+          </a:p>
+        </p:txBody>
+      </p:sp>
+    </p:spTree>
+  </p:cSld>
+  <p:clrMapOvr>
+    <a:masterClrMapping/>
+  </p:clrMapOvr>
+</p:sld>
+</file>
+
+<file path=ppt/slides/slide31.xml><?xml version="1.0" encoding="utf-8"?>
+<p:sld xmlns:a="http://schemas.openxmlformats.org/drawingml/2006/main" xmlns:r="http://schemas.openxmlformats.org/officeDocument/2006/relationships" xmlns:p="http://schemas.openxmlformats.org/presentationml/2006/main">
+  <p:cSld name="Slide 31">
+    <p:spTree>
+      <p:nvGrpSpPr>
+        <p:cNvPr id="1" name=""/>
+        <p:cNvGrpSpPr/>
+        <p:nvPr/>
+      </p:nvGrpSpPr>
+      <p:grpSpPr>
+        <a:xfrm>
+          <a:off x="0" y="0"/>
+          <a:ext cx="0" cy="0"/>
+          <a:chOff x="0" y="0"/>
+          <a:chExt cx="0" cy="0"/>
+        </a:xfrm>
+      </p:grpSpPr>
+      <p:sp>
+        <p:nvSpPr>
+          <p:cNvPr id="2" name="Text 1"/>
+          <p:cNvSpPr/>
+          <p:nvPr>
+            <p:ph idx="101" type="title" hasCustomPrompt="1"/>
+          </p:nvPr>
+        </p:nvSpPr>
+        <p:spPr>
+          <a:xfrm>
+            <a:off x="548640" y="384048"/>
+            <a:ext cx="11094415" cy="868680"/>
+          </a:xfrm>
+          <a:prstGeom prst="rect">
+            <a:avLst/>
+          </a:prstGeom>
+          <a:noFill/>
+          <a:ln/>
+        </p:spPr>
+        <p:txBody>
+          <a:bodyPr wrap="square" lIns="0" tIns="0" rIns="0" bIns="0" rtlCol="0" anchor="ctr"/>
+          <a:lstStyle/>
+          <a:p>
+            <a:pPr algn="l" indent="0" marL="0">
+              <a:buNone/>
+            </a:pPr>
+            <a:r>
+              <a:rPr lang="en-US" sz="3000" b="1" dirty="0">
+                <a:solidFill>
+                  <a:srgbClr val="2E4A62"/>
+                </a:solidFill>
+                <a:latin typeface="Cambria" pitchFamily="34" charset="0"/>
+                <a:ea typeface="Cambria" pitchFamily="34" charset="-122"/>
+                <a:cs typeface="Cambria" pitchFamily="34" charset="-120"/>
+              </a:rPr>
               <a:t>Next time, and for grown-ups</a:t>
             </a:r>
             <a:endParaRPr lang="en-US" sz="3000" dirty="0"/>
@@ -16881,7 +17148,7 @@
             <a:pPr algn="r"/>
             <a:fld id="{F7021451-1387-4CA6-816F-3879F97B5CBC}" type="slidenum">
               <a:rPr b="0" lang="en-US"/>
-              <a:t>30</a:t>
+              <a:t>31</a:t>
             </a:fld>
             <a:endParaRPr lang="en-US"/>
           </a:p>
@@ -17972,12 +18239,12 @@
         </p:nvSpPr>
         <p:spPr>
           <a:xfrm>
-            <a:off x="8092440" y="2834640"/>
-            <a:ext cx="3550615" cy="3383280"/>
+            <a:off x="8092440" y="2788920"/>
+            <a:ext cx="3550615" cy="3429000"/>
           </a:xfrm>
           <a:prstGeom prst="roundRect">
             <a:avLst>
-              <a:gd name="adj" fmla="val 2162"/>
+              <a:gd name="adj" fmla="val 2133"/>
             </a:avLst>
           </a:prstGeom>
           <a:solidFill>
@@ -17999,8 +18266,8 @@
         </p:nvSpPr>
         <p:spPr>
           <a:xfrm>
-            <a:off x="8321040" y="2971800"/>
-            <a:ext cx="3093415" cy="365760"/>
+            <a:off x="8321040" y="2880360"/>
+            <a:ext cx="3093415" cy="310896"/>
           </a:xfrm>
           <a:prstGeom prst="rect">
             <a:avLst/>
@@ -18016,7 +18283,7 @@
               <a:buNone/>
             </a:pPr>
             <a:r>
-              <a:rPr lang="en-US" sz="1500" b="1" dirty="0">
+              <a:rPr lang="en-US" sz="1400" b="1" dirty="0">
                 <a:solidFill>
                   <a:srgbClr val="2F7D4F"/>
                 </a:solidFill>
@@ -18026,7 +18293,7 @@
               </a:rPr>
               <a:t>You should see</a:t>
             </a:r>
-            <a:endParaRPr lang="en-US" sz="1500" dirty="0"/>
+            <a:endParaRPr lang="en-US" sz="1400" dirty="0"/>
           </a:p>
         </p:txBody>
       </p:sp>
@@ -18038,8 +18305,8 @@
         </p:nvSpPr>
         <p:spPr>
           <a:xfrm>
-            <a:off x="8321040" y="3429000"/>
-            <a:ext cx="3093415" cy="2606040"/>
+            <a:off x="8321040" y="3246120"/>
+            <a:ext cx="3093415" cy="2862072"/>
           </a:xfrm>
           <a:prstGeom prst="rect">
             <a:avLst/>
@@ -18554,12 +18821,12 @@
         </p:nvSpPr>
         <p:spPr>
           <a:xfrm>
-            <a:off x="8092440" y="2834640"/>
-            <a:ext cx="3550615" cy="3383280"/>
+            <a:off x="8092440" y="2788920"/>
+            <a:ext cx="3550615" cy="3429000"/>
           </a:xfrm>
           <a:prstGeom prst="roundRect">
             <a:avLst>
-              <a:gd name="adj" fmla="val 2162"/>
+              <a:gd name="adj" fmla="val 2133"/>
             </a:avLst>
           </a:prstGeom>
           <a:solidFill>
@@ -18581,8 +18848,8 @@
         </p:nvSpPr>
         <p:spPr>
           <a:xfrm>
-            <a:off x="8321040" y="2971800"/>
-            <a:ext cx="3093415" cy="365760"/>
+            <a:off x="8321040" y="2880360"/>
+            <a:ext cx="3093415" cy="310896"/>
           </a:xfrm>
           <a:prstGeom prst="rect">
             <a:avLst/>
@@ -18598,7 +18865,7 @@
               <a:buNone/>
             </a:pPr>
             <a:r>
-              <a:rPr lang="en-US" sz="1500" b="1" dirty="0">
+              <a:rPr lang="en-US" sz="1400" b="1" dirty="0">
                 <a:solidFill>
                   <a:srgbClr val="2F7D4F"/>
                 </a:solidFill>
@@ -18608,7 +18875,7 @@
               </a:rPr>
               <a:t>You should see</a:t>
             </a:r>
-            <a:endParaRPr lang="en-US" sz="1500" dirty="0"/>
+            <a:endParaRPr lang="en-US" sz="1400" dirty="0"/>
           </a:p>
         </p:txBody>
       </p:sp>
@@ -18620,8 +18887,8 @@
         </p:nvSpPr>
         <p:spPr>
           <a:xfrm>
-            <a:off x="8321040" y="3429000"/>
-            <a:ext cx="3093415" cy="2606040"/>
+            <a:off x="8321040" y="3246120"/>
+            <a:ext cx="3093415" cy="2862072"/>
           </a:xfrm>
           <a:prstGeom prst="rect">
             <a:avLst/>

--- a/presentations/12-kids-first-blocks/12-kids-first-blocks-lab.pptx
+++ b/presentations/12-kids-first-blocks/12-kids-first-blocks-lab.pptx
@@ -137,7 +137,7 @@
   <p:extLst>
     <p:ext uri="{521415D9-36F7-43E2-AB2F-B90AF26B5E84}">
       <p14:sectionLst xmlns:p14="http://schemas.microsoft.com/office/powerpoint/2010/main">
-        <p14:section name="Opening" id="{7543a6b2-6b52-ca3f-6bf5-0babf4f722ed}">
+        <p14:section name="Opening" id="{a9ce8f5f-7206-6bc9-3aef-12b8db221275}">
           <p14:sldIdLst>
             <p14:sldId id="256"/>
             <p14:sldId id="257"/>
@@ -145,14 +145,14 @@
             <p14:sldId id="259"/>
           </p14:sldIdLst>
         </p14:section>
-        <p14:section name="Open and create" id="{bbbc9eb9-e1a4-e494-942f-f33a98279be9}">
+        <p14:section name="Open and create" id="{cd50bfbf-aa65-a529-38db-bafacb1be0bf}">
           <p14:sldIdLst>
             <p14:sldId id="260"/>
             <p14:sldId id="261"/>
             <p14:sldId id="262"/>
           </p14:sldIdLst>
         </p14:section>
-        <p14:section name="Get ready" id="{03e87b24-9d73-ac54-814d-dc39c09a1269}">
+        <p14:section name="Get ready" id="{2f3c2bf0-279a-b4fc-b39e-9b833d0fe264}">
           <p14:sldIdLst>
             <p14:sldId id="263"/>
             <p14:sldId id="264"/>
@@ -160,7 +160,7 @@
             <p14:sldId id="266"/>
           </p14:sldIdLst>
         </p14:section>
-        <p14:section name="Draw" id="{034a6b0e-765a-a2ce-3189-1ecc26ebcc69}">
+        <p14:section name="Draw" id="{76c6960c-cb69-5947-3279-e75a8e13f1b4}">
           <p14:sldIdLst>
             <p14:sldId id="267"/>
             <p14:sldId id="268"/>
@@ -170,7 +170,7 @@
             <p14:sldId id="272"/>
           </p14:sldIdLst>
         </p14:section>
-        <p14:section name="Change one thing" id="{511701c0-9b33-66fa-db0b-941710f20810}">
+        <p14:section name="Change one thing" id="{4c078f11-6621-2712-bd55-e41c7c2aafcb}">
           <p14:sldIdLst>
             <p14:sldId id="273"/>
             <p14:sldId id="274"/>
@@ -182,7 +182,7 @@
             <p14:sldId id="280"/>
           </p14:sldIdLst>
         </p14:section>
-        <p14:section name="Challenge" id="{31506338-fd8b-4030-b4f2-68c59a6adbbb}">
+        <p14:section name="Challenge" id="{68e08496-593d-9816-0a14-29ceccc7874b}">
           <p14:sldIdLst>
             <p14:sldId id="281"/>
             <p14:sldId id="282"/>
@@ -191,7 +191,7 @@
             <p14:sldId id="285"/>
           </p14:sldIdLst>
         </p14:section>
-        <p14:section name="Closing" id="{57032f10-8d8b-4bbb-c215-b0511193398c}">
+        <p14:section name="Closing" id="{e73c8164-5d34-4b08-a116-764ee61a2cfd}">
           <p14:sldIdLst>
             <p14:sldId id="286"/>
           </p14:sldIdLst>
@@ -5761,7 +5761,7 @@
           </a:ln>
         </p:spPr>
         <p:txBody>
-          <a:bodyPr wrap="square" lIns="0" tIns="127000" rIns="101600" bIns="0" rtlCol="0" anchor="ctr"/>
+          <a:bodyPr wrap="square" lIns="88900" tIns="88900" rIns="88900" bIns="88900" rtlCol="0" anchor="ctr"/>
           <a:lstStyle/>
           <a:p>
             <a:pPr algn="l" indent="0" marL="0">
@@ -5808,7 +5808,7 @@
           </a:ln>
         </p:spPr>
         <p:txBody>
-          <a:bodyPr wrap="square" lIns="0" tIns="127000" rIns="101600" bIns="0" rtlCol="0" anchor="ctr"/>
+          <a:bodyPr wrap="square" lIns="88900" tIns="88900" rIns="88900" bIns="88900" rtlCol="0" anchor="ctr"/>
           <a:lstStyle/>
           <a:p>
             <a:pPr algn="l" indent="0" marL="0">
@@ -5855,7 +5855,7 @@
           </a:ln>
         </p:spPr>
         <p:txBody>
-          <a:bodyPr wrap="square" lIns="0" tIns="127000" rIns="101600" bIns="0" rtlCol="0" anchor="ctr"/>
+          <a:bodyPr wrap="square" lIns="88900" tIns="88900" rIns="88900" bIns="88900" rtlCol="0" anchor="ctr"/>
           <a:lstStyle/>
           <a:p>
             <a:pPr algn="l" indent="0" marL="0">
@@ -5902,7 +5902,7 @@
           </a:ln>
         </p:spPr>
         <p:txBody>
-          <a:bodyPr wrap="square" lIns="0" tIns="127000" rIns="101600" bIns="0" rtlCol="0" anchor="ctr"/>
+          <a:bodyPr wrap="square" lIns="88900" tIns="88900" rIns="88900" bIns="88900" rtlCol="0" anchor="ctr"/>
           <a:lstStyle/>
           <a:p>
             <a:pPr algn="l" indent="0" marL="0">
@@ -19275,7 +19275,7 @@
           </a:ln>
         </p:spPr>
         <p:txBody>
-          <a:bodyPr wrap="square" lIns="0" tIns="127000" rIns="101600" bIns="0" rtlCol="0" anchor="ctr"/>
+          <a:bodyPr wrap="square" lIns="88900" tIns="88900" rIns="88900" bIns="88900" rtlCol="0" anchor="ctr"/>
           <a:lstStyle/>
           <a:p>
             <a:pPr algn="l" indent="0" marL="0">
@@ -19322,7 +19322,7 @@
           </a:ln>
         </p:spPr>
         <p:txBody>
-          <a:bodyPr wrap="square" lIns="0" tIns="127000" rIns="101600" bIns="0" rtlCol="0" anchor="ctr"/>
+          <a:bodyPr wrap="square" lIns="88900" tIns="88900" rIns="88900" bIns="88900" rtlCol="0" anchor="ctr"/>
           <a:lstStyle/>
           <a:p>
             <a:pPr algn="l" indent="0" marL="0">
@@ -19369,7 +19369,7 @@
           </a:ln>
         </p:spPr>
         <p:txBody>
-          <a:bodyPr wrap="square" lIns="0" tIns="127000" rIns="101600" bIns="0" rtlCol="0" anchor="ctr"/>
+          <a:bodyPr wrap="square" lIns="88900" tIns="88900" rIns="88900" bIns="88900" rtlCol="0" anchor="ctr"/>
           <a:lstStyle/>
           <a:p>
             <a:pPr algn="l" indent="0" marL="0">
